--- a/apresentacao/slides_relatorio_parcial.pptx
+++ b/apresentacao/slides_relatorio_parcial.pptx
@@ -4,26 +4,29 @@
   <p:sldMasterIdLst>
     <p:sldMasterId id="2147483648" r:id="rId1"/>
   </p:sldMasterIdLst>
+  <p:notesMasterIdLst>
+    <p:notesMasterId r:id="rId19"/>
+  </p:notesMasterIdLst>
   <p:sldIdLst>
-    <p:sldId id="256" r:id="rId7"/>
-    <p:sldId id="257" r:id="rId9"/>
-    <p:sldId id="258" r:id="rId10"/>
-    <p:sldId id="259" r:id="rId11"/>
-    <p:sldId id="260" r:id="rId12"/>
-    <p:sldId id="261" r:id="rId13"/>
-    <p:sldId id="262" r:id="rId14"/>
-    <p:sldId id="263" r:id="rId15"/>
-    <p:sldId id="264" r:id="rId16"/>
-    <p:sldId id="265" r:id="rId17"/>
-    <p:sldId id="266" r:id="rId18"/>
-    <p:sldId id="267" r:id="rId19"/>
-    <p:sldId id="268" r:id="rId20"/>
-    <p:sldId id="269" r:id="rId21"/>
-    <p:sldId id="270" r:id="rId22"/>
-    <p:sldId id="271" r:id="rId23"/>
-    <p:sldId id="272" r:id="rId24"/>
+    <p:sldId id="256" r:id="rId2"/>
+    <p:sldId id="257" r:id="rId3"/>
+    <p:sldId id="258" r:id="rId4"/>
+    <p:sldId id="259" r:id="rId5"/>
+    <p:sldId id="260" r:id="rId6"/>
+    <p:sldId id="261" r:id="rId7"/>
+    <p:sldId id="262" r:id="rId8"/>
+    <p:sldId id="263" r:id="rId9"/>
+    <p:sldId id="264" r:id="rId10"/>
+    <p:sldId id="265" r:id="rId11"/>
+    <p:sldId id="266" r:id="rId12"/>
+    <p:sldId id="267" r:id="rId13"/>
+    <p:sldId id="268" r:id="rId14"/>
+    <p:sldId id="269" r:id="rId15"/>
+    <p:sldId id="270" r:id="rId16"/>
+    <p:sldId id="271" r:id="rId17"/>
+    <p:sldId id="272" r:id="rId18"/>
   </p:sldIdLst>
-  <p:sldSz cx="12191695" cy="6858000" type="screen4x3"/>
+  <p:sldSz cx="12192000" cy="6858000"/>
   <p:notesSz cx="6858000" cy="9144000"/>
   <p:defaultTextStyle>
     <a:defPPr>
@@ -120,11 +123,27 @@
       </a:defRPr>
     </a:lvl9pPr>
   </p:defaultTextStyle>
+  <p:extLst>
+    <p:ext uri="{EFAFB233-063F-42B5-8137-9DF3F51BA10A}">
+      <p15:sldGuideLst xmlns:p15="http://schemas.microsoft.com/office/powerpoint/2012/main">
+        <p15:guide id="1" orient="horz" pos="2160">
+          <p15:clr>
+            <a:srgbClr val="A4A3A4"/>
+          </p15:clr>
+        </p15:guide>
+        <p15:guide id="2" pos="2880">
+          <p15:clr>
+            <a:srgbClr val="A4A3A4"/>
+          </p15:clr>
+        </p15:guide>
+      </p15:sldGuideLst>
+    </p:ext>
+  </p:extLst>
 </p:presentation>
 </file>
 
 <file path=ppt/notesMasters/notesMaster1.xml><?xml version="1.0" encoding="utf-8"?>
-<p:notesMaster xmlns:a="http://schemas.openxmlformats.org/drawingml/2006/main" xmlns:p="http://schemas.openxmlformats.org/presentationml/2006/main" xmlns:r="http://schemas.openxmlformats.org/officeDocument/2006/relationships">
+<p:notesMaster xmlns:a="http://schemas.openxmlformats.org/drawingml/2006/main" xmlns:r="http://schemas.openxmlformats.org/officeDocument/2006/relationships" xmlns:p="http://schemas.openxmlformats.org/presentationml/2006/main">
   <p:cSld>
     <p:bg>
       <p:bgRef idx="1001">
@@ -145,241 +164,16 @@
           <a:chExt cx="0" cy="0"/>
         </a:xfrm>
       </p:grpSpPr>
-      <p:sp>
-        <p:nvSpPr>
-          <p:cNvPr id="2" name="Header Placeholder 1"/>
-          <p:cNvSpPr>
-            <a:spLocks noGrp="1"/>
-          </p:cNvSpPr>
-          <p:nvPr>
-            <p:ph type="hdr" sz="quarter"/>
-          </p:nvPr>
-        </p:nvSpPr>
-        <p:spPr>
-          <a:xfrm>
-            <a:off x="0" y="0"/>
-            <a:ext cx="2971800" cy="457200"/>
-          </a:xfrm>
-          <a:prstGeom prst="rect">
-            <a:avLst/>
-          </a:prstGeom>
-        </p:spPr>
-        <p:txBody>
-          <a:bodyPr vert="horz" lIns="91440" tIns="45720" rIns="91440" bIns="45720" rtlCol="0"/>
-          <a:lstStyle>
-            <a:lvl1pPr algn="l">
-              <a:defRPr sz="1200"/>
-            </a:lvl1pPr>
-          </a:lstStyle>
-          <a:p>
-            <a:endParaRPr lang="en-US"/>
-          </a:p>
-        </p:txBody>
-      </p:sp>
-      <p:sp>
-        <p:nvSpPr>
-          <p:cNvPr id="3" name="Date Placeholder 2"/>
-          <p:cNvSpPr>
-            <a:spLocks noGrp="1"/>
-          </p:cNvSpPr>
-          <p:nvPr>
-            <p:ph type="dt" idx="1"/>
-          </p:nvPr>
-        </p:nvSpPr>
-        <p:spPr>
-          <a:xfrm>
-            <a:off x="3884613" y="0"/>
-            <a:ext cx="2971800" cy="457200"/>
-          </a:xfrm>
-          <a:prstGeom prst="rect">
-            <a:avLst/>
-          </a:prstGeom>
-        </p:spPr>
-        <p:txBody>
-          <a:bodyPr vert="horz" lIns="91440" tIns="45720" rIns="91440" bIns="45720" rtlCol="0"/>
-          <a:lstStyle>
-            <a:lvl1pPr algn="r">
-              <a:defRPr sz="1200"/>
-            </a:lvl1pPr>
-          </a:lstStyle>
-          <a:p>
-            <a:fld id="{0F89C1C7-3DCD-1040-A9CF-14679D8B5DDD}" type="datetimeFigureOut">
-              <a:rPr lang="en-US" smtClean="0"/>
-              <a:t>10/17/16</a:t>
-            </a:fld>
-            <a:endParaRPr lang="en-US"/>
-          </a:p>
-        </p:txBody>
-      </p:sp>
-      <p:sp>
-        <p:nvSpPr>
-          <p:cNvPr id="4" name="Slide Image Placeholder 3"/>
-          <p:cNvSpPr>
-            <a:spLocks noGrp="1" noRot="1" noChangeAspect="1"/>
-          </p:cNvSpPr>
-          <p:nvPr>
-            <p:ph type="sldImg" idx="2"/>
-          </p:nvPr>
-        </p:nvSpPr>
-        <p:spPr>
-          <a:xfrm>
-            <a:off x="1143000" y="685800"/>
-            <a:ext cx="4572000" cy="3429000"/>
-          </a:xfrm>
-          <a:prstGeom prst="rect">
-            <a:avLst/>
-          </a:prstGeom>
-          <a:noFill/>
-          <a:ln w="12700">
-            <a:solidFill>
-              <a:prstClr val="black"/>
-            </a:solidFill>
-          </a:ln>
-        </p:spPr>
-        <p:txBody>
-          <a:bodyPr vert="horz" lIns="91440" tIns="45720" rIns="91440" bIns="45720" rtlCol="0" anchor="ctr"/>
-          <a:lstStyle/>
-          <a:p>
-            <a:endParaRPr lang="en-US"/>
-          </a:p>
-        </p:txBody>
-      </p:sp>
-      <p:sp>
-        <p:nvSpPr>
-          <p:cNvPr id="5" name="Notes Placeholder 4"/>
-          <p:cNvSpPr>
-            <a:spLocks noGrp="1"/>
-          </p:cNvSpPr>
-          <p:nvPr>
-            <p:ph type="body" sz="quarter" idx="3"/>
-          </p:nvPr>
-        </p:nvSpPr>
-        <p:spPr>
-          <a:xfrm>
-            <a:off x="685800" y="4343400"/>
-            <a:ext cx="5486400" cy="4114800"/>
-          </a:xfrm>
-          <a:prstGeom prst="rect">
-            <a:avLst/>
-          </a:prstGeom>
-        </p:spPr>
-        <p:txBody>
-          <a:bodyPr vert="horz" lIns="91440" tIns="45720" rIns="91440" bIns="45720" rtlCol="0"/>
-          <a:lstStyle/>
-          <a:p>
-            <a:pPr lvl="0"/>
-            <a:r>
-              <a:rPr lang="en-US" smtClean="0"/>
-              <a:t>Click to edit Master text styles</a:t>
-            </a:r>
-          </a:p>
-          <a:p>
-            <a:pPr lvl="1"/>
-            <a:r>
-              <a:rPr lang="en-US" smtClean="0"/>
-              <a:t>Second level</a:t>
-            </a:r>
-          </a:p>
-          <a:p>
-            <a:pPr lvl="2"/>
-            <a:r>
-              <a:rPr lang="en-US" smtClean="0"/>
-              <a:t>Third level</a:t>
-            </a:r>
-          </a:p>
-          <a:p>
-            <a:pPr lvl="3"/>
-            <a:r>
-              <a:rPr lang="en-US" smtClean="0"/>
-              <a:t>Fourth level</a:t>
-            </a:r>
-          </a:p>
-          <a:p>
-            <a:pPr lvl="4"/>
-            <a:r>
-              <a:rPr lang="en-US" smtClean="0"/>
-              <a:t>Fifth level</a:t>
-            </a:r>
-            <a:endParaRPr lang="en-US"/>
-          </a:p>
-        </p:txBody>
-      </p:sp>
-      <p:sp>
-        <p:nvSpPr>
-          <p:cNvPr id="6" name="Footer Placeholder 5"/>
-          <p:cNvSpPr>
-            <a:spLocks noGrp="1"/>
-          </p:cNvSpPr>
-          <p:nvPr>
-            <p:ph type="ftr" sz="quarter" idx="4"/>
-          </p:nvPr>
-        </p:nvSpPr>
-        <p:spPr>
-          <a:xfrm>
-            <a:off x="0" y="8685213"/>
-            <a:ext cx="2971800" cy="457200"/>
-          </a:xfrm>
-          <a:prstGeom prst="rect">
-            <a:avLst/>
-          </a:prstGeom>
-        </p:spPr>
-        <p:txBody>
-          <a:bodyPr vert="horz" lIns="91440" tIns="45720" rIns="91440" bIns="45720" rtlCol="0" anchor="b"/>
-          <a:lstStyle>
-            <a:lvl1pPr algn="l">
-              <a:defRPr sz="1200"/>
-            </a:lvl1pPr>
-          </a:lstStyle>
-          <a:p>
-            <a:endParaRPr lang="en-US"/>
-          </a:p>
-        </p:txBody>
-      </p:sp>
-      <p:sp>
-        <p:nvSpPr>
-          <p:cNvPr id="7" name="Slide Number Placeholder 6"/>
-          <p:cNvSpPr>
-            <a:spLocks noGrp="1"/>
-          </p:cNvSpPr>
-          <p:nvPr>
-            <p:ph type="sldNum" sz="quarter" idx="5"/>
-          </p:nvPr>
-        </p:nvSpPr>
-        <p:spPr>
-          <a:xfrm>
-            <a:off x="3884613" y="8685213"/>
-            <a:ext cx="2971800" cy="457200"/>
-          </a:xfrm>
-          <a:prstGeom prst="rect">
-            <a:avLst/>
-          </a:prstGeom>
-        </p:spPr>
-        <p:txBody>
-          <a:bodyPr vert="horz" lIns="91440" tIns="45720" rIns="91440" bIns="45720" rtlCol="0" anchor="b"/>
-          <a:lstStyle>
-            <a:lvl1pPr algn="r">
-              <a:defRPr sz="1200"/>
-            </a:lvl1pPr>
-          </a:lstStyle>
-          <a:p>
-            <a:fld id="{BB5E49A5-4136-284D-997B-48E1D791AD67}" type="slidenum">
-              <a:rPr lang="en-US" smtClean="0"/>
-              <a:t>‹#›</a:t>
-            </a:fld>
-            <a:endParaRPr lang="en-US"/>
-          </a:p>
-        </p:txBody>
-      </p:sp>
     </p:spTree>
     <p:extLst>
       <p:ext uri="{BB962C8B-B14F-4D97-AF65-F5344CB8AC3E}">
-        <p14:creationId xmlns:p14="http://schemas.microsoft.com/office/powerpoint/2010/main" val="2623252185"/>
+        <p14:creationId xmlns:p14="http://schemas.microsoft.com/office/powerpoint/2010/main" val="1290036979"/>
       </p:ext>
     </p:extLst>
   </p:cSld>
   <p:clrMap bg1="lt1" tx1="dk1" bg2="lt2" tx2="dk2" accent1="accent1" accent2="accent2" accent3="accent3" accent4="accent4" accent5="accent5" accent6="accent6" hlink="hlink" folHlink="folHlink"/>
   <p:notesStyle>
-    <a:lvl1pPr marL="0" algn="l" defTabSz="457200" rtl="0" eaLnBrk="1" latinLnBrk="0" hangingPunct="1">
+    <a:lvl1pPr marL="0" algn="l" defTabSz="914400" rtl="0" eaLnBrk="1" latinLnBrk="0" hangingPunct="1">
       <a:defRPr sz="1200" kern="1200">
         <a:solidFill>
           <a:schemeClr val="tx1"/>
@@ -389,7 +183,7 @@
         <a:cs typeface="+mn-cs"/>
       </a:defRPr>
     </a:lvl1pPr>
-    <a:lvl2pPr marL="457200" algn="l" defTabSz="457200" rtl="0" eaLnBrk="1" latinLnBrk="0" hangingPunct="1">
+    <a:lvl2pPr marL="457200" algn="l" defTabSz="914400" rtl="0" eaLnBrk="1" latinLnBrk="0" hangingPunct="1">
       <a:defRPr sz="1200" kern="1200">
         <a:solidFill>
           <a:schemeClr val="tx1"/>
@@ -399,7 +193,7 @@
         <a:cs typeface="+mn-cs"/>
       </a:defRPr>
     </a:lvl2pPr>
-    <a:lvl3pPr marL="914400" algn="l" defTabSz="457200" rtl="0" eaLnBrk="1" latinLnBrk="0" hangingPunct="1">
+    <a:lvl3pPr marL="914400" algn="l" defTabSz="914400" rtl="0" eaLnBrk="1" latinLnBrk="0" hangingPunct="1">
       <a:defRPr sz="1200" kern="1200">
         <a:solidFill>
           <a:schemeClr val="tx1"/>
@@ -409,7 +203,7 @@
         <a:cs typeface="+mn-cs"/>
       </a:defRPr>
     </a:lvl3pPr>
-    <a:lvl4pPr marL="1371600" algn="l" defTabSz="457200" rtl="0" eaLnBrk="1" latinLnBrk="0" hangingPunct="1">
+    <a:lvl4pPr marL="1371600" algn="l" defTabSz="914400" rtl="0" eaLnBrk="1" latinLnBrk="0" hangingPunct="1">
       <a:defRPr sz="1200" kern="1200">
         <a:solidFill>
           <a:schemeClr val="tx1"/>
@@ -419,7 +213,7 @@
         <a:cs typeface="+mn-cs"/>
       </a:defRPr>
     </a:lvl4pPr>
-    <a:lvl5pPr marL="1828800" algn="l" defTabSz="457200" rtl="0" eaLnBrk="1" latinLnBrk="0" hangingPunct="1">
+    <a:lvl5pPr marL="1828800" algn="l" defTabSz="914400" rtl="0" eaLnBrk="1" latinLnBrk="0" hangingPunct="1">
       <a:defRPr sz="1200" kern="1200">
         <a:solidFill>
           <a:schemeClr val="tx1"/>
@@ -429,7 +223,7 @@
         <a:cs typeface="+mn-cs"/>
       </a:defRPr>
     </a:lvl5pPr>
-    <a:lvl6pPr marL="2286000" algn="l" defTabSz="457200" rtl="0" eaLnBrk="1" latinLnBrk="0" hangingPunct="1">
+    <a:lvl6pPr marL="2286000" algn="l" defTabSz="914400" rtl="0" eaLnBrk="1" latinLnBrk="0" hangingPunct="1">
       <a:defRPr sz="1200" kern="1200">
         <a:solidFill>
           <a:schemeClr val="tx1"/>
@@ -439,7 +233,7 @@
         <a:cs typeface="+mn-cs"/>
       </a:defRPr>
     </a:lvl6pPr>
-    <a:lvl7pPr marL="2743200" algn="l" defTabSz="457200" rtl="0" eaLnBrk="1" latinLnBrk="0" hangingPunct="1">
+    <a:lvl7pPr marL="2743200" algn="l" defTabSz="914400" rtl="0" eaLnBrk="1" latinLnBrk="0" hangingPunct="1">
       <a:defRPr sz="1200" kern="1200">
         <a:solidFill>
           <a:schemeClr val="tx1"/>
@@ -449,7 +243,7 @@
         <a:cs typeface="+mn-cs"/>
       </a:defRPr>
     </a:lvl7pPr>
-    <a:lvl8pPr marL="3200400" algn="l" defTabSz="457200" rtl="0" eaLnBrk="1" latinLnBrk="0" hangingPunct="1">
+    <a:lvl8pPr marL="3200400" algn="l" defTabSz="914400" rtl="0" eaLnBrk="1" latinLnBrk="0" hangingPunct="1">
       <a:defRPr sz="1200" kern="1200">
         <a:solidFill>
           <a:schemeClr val="tx1"/>
@@ -459,7 +253,7 @@
         <a:cs typeface="+mn-cs"/>
       </a:defRPr>
     </a:lvl8pPr>
-    <a:lvl9pPr marL="3657600" algn="l" defTabSz="457200" rtl="0" eaLnBrk="1" latinLnBrk="0" hangingPunct="1">
+    <a:lvl9pPr marL="3657600" algn="l" defTabSz="914400" rtl="0" eaLnBrk="1" latinLnBrk="0" hangingPunct="1">
       <a:defRPr sz="1200" kern="1200">
         <a:solidFill>
           <a:schemeClr val="tx1"/>
@@ -474,7 +268,7 @@
 </file>
 
 <file path=ppt/notesSlides/notesSlide1.xml><?xml version="1.0" encoding="utf-8"?>
-<p:notes xmlns:a="http://schemas.openxmlformats.org/drawingml/2006/main" xmlns:p="http://schemas.openxmlformats.org/presentationml/2006/main" xmlns:r="http://schemas.openxmlformats.org/officeDocument/2006/relationships">
+<p:notes xmlns:a="http://schemas.openxmlformats.org/drawingml/2006/main" xmlns:r="http://schemas.openxmlformats.org/officeDocument/2006/relationships" xmlns:p="http://schemas.openxmlformats.org/presentationml/2006/main">
   <p:cSld>
     <p:spTree>
       <p:nvGrpSpPr>
@@ -494,7 +288,7 @@
         <p:nvSpPr>
           <p:cNvPr id="2" name="Slide Image Placeholder 1"/>
           <p:cNvSpPr>
-            <a:spLocks noGrp="1"/>
+            <a:spLocks noGrp="1" noRot="1" noChangeAspect="1"/>
           </p:cNvSpPr>
           <p:nvPr>
             <p:ph type="sldImg" idx="2"/>
@@ -509,7 +303,7 @@
             <a:spLocks noGrp="1"/>
           </p:cNvSpPr>
           <p:nvPr>
-            <p:ph type="body" idx="3" sz="quarter"/>
+            <p:ph type="body" sz="quarter" idx="3"/>
           </p:nvPr>
         </p:nvSpPr>
         <p:spPr/>
@@ -521,7 +315,9 @@
               <a:t>[Todos (abertura) | tempo-alvo: 0:15]</a:t>
             </a:r>
           </a:p>
-          <a:p/>
+          <a:p>
+            <a:endParaRPr/>
+          </a:p>
           <a:p>
             <a:r>
               <a:t>Apresentar o título e os integrantes. Uma frase: 'a pergunta é se dá para antecipar, com o que se sabe no momento da notificação, se uma ocorrência é um incidente, um incidente grave ou um acidente'.</a:t>
@@ -536,7 +332,7 @@
             <a:spLocks noGrp="1"/>
           </p:cNvSpPr>
           <p:nvPr>
-            <p:ph type="sldNum" idx="5" sz="quarter"/>
+            <p:ph type="sldNum" sz="quarter" idx="5"/>
           </p:nvPr>
         </p:nvSpPr>
         <p:spPr/>
@@ -550,7 +346,7 @@
 </file>
 
 <file path=ppt/notesSlides/notesSlide10.xml><?xml version="1.0" encoding="utf-8"?>
-<p:notes xmlns:a="http://schemas.openxmlformats.org/drawingml/2006/main" xmlns:p="http://schemas.openxmlformats.org/presentationml/2006/main" xmlns:r="http://schemas.openxmlformats.org/officeDocument/2006/relationships">
+<p:notes xmlns:a="http://schemas.openxmlformats.org/drawingml/2006/main" xmlns:r="http://schemas.openxmlformats.org/officeDocument/2006/relationships" xmlns:p="http://schemas.openxmlformats.org/presentationml/2006/main">
   <p:cSld>
     <p:spTree>
       <p:nvGrpSpPr>
@@ -570,7 +366,7 @@
         <p:nvSpPr>
           <p:cNvPr id="2" name="Slide Image Placeholder 1"/>
           <p:cNvSpPr>
-            <a:spLocks noGrp="1"/>
+            <a:spLocks noGrp="1" noRot="1" noChangeAspect="1"/>
           </p:cNvSpPr>
           <p:nvPr>
             <p:ph type="sldImg" idx="2"/>
@@ -585,7 +381,7 @@
             <a:spLocks noGrp="1"/>
           </p:cNvSpPr>
           <p:nvPr>
-            <p:ph type="body" idx="3" sz="quarter"/>
+            <p:ph type="body" sz="quarter" idx="3"/>
           </p:nvPr>
         </p:nvSpPr>
         <p:spPr/>
@@ -597,7 +393,9 @@
               <a:t>[Integrante 3 | tempo-alvo: 0:30]</a:t>
             </a:r>
           </a:p>
-          <a:p/>
+          <a:p>
+            <a:endParaRPr/>
+          </a:p>
           <a:p>
             <a:r>
               <a:t>Apontar a descontinuidade em 2023 no painel de cima e a estabilidade dos acidentes no painel de baixo. Conclusão: é mudança de cobertura das notificações, e o ano não pode ser preditor.</a:t>
@@ -612,7 +410,7 @@
             <a:spLocks noGrp="1"/>
           </p:cNvSpPr>
           <p:nvPr>
-            <p:ph type="sldNum" idx="5" sz="quarter"/>
+            <p:ph type="sldNum" sz="quarter" idx="5"/>
           </p:nvPr>
         </p:nvSpPr>
         <p:spPr/>
@@ -626,7 +424,7 @@
 </file>
 
 <file path=ppt/notesSlides/notesSlide11.xml><?xml version="1.0" encoding="utf-8"?>
-<p:notes xmlns:a="http://schemas.openxmlformats.org/drawingml/2006/main" xmlns:p="http://schemas.openxmlformats.org/presentationml/2006/main" xmlns:r="http://schemas.openxmlformats.org/officeDocument/2006/relationships">
+<p:notes xmlns:a="http://schemas.openxmlformats.org/drawingml/2006/main" xmlns:r="http://schemas.openxmlformats.org/officeDocument/2006/relationships" xmlns:p="http://schemas.openxmlformats.org/presentationml/2006/main">
   <p:cSld>
     <p:spTree>
       <p:nvGrpSpPr>
@@ -646,7 +444,7 @@
         <p:nvSpPr>
           <p:cNvPr id="2" name="Slide Image Placeholder 1"/>
           <p:cNvSpPr>
-            <a:spLocks noGrp="1"/>
+            <a:spLocks noGrp="1" noRot="1" noChangeAspect="1"/>
           </p:cNvSpPr>
           <p:nvPr>
             <p:ph type="sldImg" idx="2"/>
@@ -661,7 +459,7 @@
             <a:spLocks noGrp="1"/>
           </p:cNvSpPr>
           <p:nvPr>
-            <p:ph type="body" idx="3" sz="quarter"/>
+            <p:ph type="body" sz="quarter" idx="3"/>
           </p:nvPr>
         </p:nvSpPr>
         <p:spPr/>
@@ -673,7 +471,9 @@
               <a:t>[Integrante 3 | tempo-alvo: 0:25]</a:t>
             </a:r>
           </a:p>
-          <a:p/>
+          <a:p>
+            <a:endParaRPr/>
+          </a:p>
           <a:p>
             <a:r>
               <a:t>Norte concentra acidentes, e isso reflete a operação (táxi aéreo). O local separa as duas classes graves: incidentes graves acontecem nos grandes aeródromos, acidentes fora de aeródromo.</a:t>
@@ -688,7 +488,7 @@
             <a:spLocks noGrp="1"/>
           </p:cNvSpPr>
           <p:nvPr>
-            <p:ph type="sldNum" idx="5" sz="quarter"/>
+            <p:ph type="sldNum" sz="quarter" idx="5"/>
           </p:nvPr>
         </p:nvSpPr>
         <p:spPr/>
@@ -702,7 +502,7 @@
 </file>
 
 <file path=ppt/notesSlides/notesSlide12.xml><?xml version="1.0" encoding="utf-8"?>
-<p:notes xmlns:a="http://schemas.openxmlformats.org/drawingml/2006/main" xmlns:p="http://schemas.openxmlformats.org/presentationml/2006/main" xmlns:r="http://schemas.openxmlformats.org/officeDocument/2006/relationships">
+<p:notes xmlns:a="http://schemas.openxmlformats.org/drawingml/2006/main" xmlns:r="http://schemas.openxmlformats.org/officeDocument/2006/relationships" xmlns:p="http://schemas.openxmlformats.org/presentationml/2006/main">
   <p:cSld>
     <p:spTree>
       <p:nvGrpSpPr>
@@ -722,7 +522,7 @@
         <p:nvSpPr>
           <p:cNvPr id="2" name="Slide Image Placeholder 1"/>
           <p:cNvSpPr>
-            <a:spLocks noGrp="1"/>
+            <a:spLocks noGrp="1" noRot="1" noChangeAspect="1"/>
           </p:cNvSpPr>
           <p:nvPr>
             <p:ph type="sldImg" idx="2"/>
@@ -737,7 +537,7 @@
             <a:spLocks noGrp="1"/>
           </p:cNvSpPr>
           <p:nvPr>
-            <p:ph type="body" idx="3" sz="quarter"/>
+            <p:ph type="body" sz="quarter" idx="3"/>
           </p:nvPr>
         </p:nvSpPr>
         <p:spPr/>
@@ -749,7 +549,9 @@
               <a:t>[Integrante 1 ou 2 | tempo-alvo: 0:30]</a:t>
             </a:r>
           </a:p>
-          <a:p/>
+          <a:p>
+            <a:endParaRPr/>
+          </a:p>
           <a:p>
             <a:r>
               <a:t>Ler só as linhas destacadas (†). Explicar a troca sensibilidade × precisão na Regressão Logística com pesos. No Random Forest o balanceamento ajuda sem destruir a precisão. Mencionar que SMOTENC + pesos é idêntico ao SMOTENC, e por quê.</a:t>
@@ -764,7 +566,7 @@
             <a:spLocks noGrp="1"/>
           </p:cNvSpPr>
           <p:nvPr>
-            <p:ph type="sldNum" idx="5" sz="quarter"/>
+            <p:ph type="sldNum" sz="quarter" idx="5"/>
           </p:nvPr>
         </p:nvSpPr>
         <p:spPr/>
@@ -778,7 +580,7 @@
 </file>
 
 <file path=ppt/notesSlides/notesSlide13.xml><?xml version="1.0" encoding="utf-8"?>
-<p:notes xmlns:a="http://schemas.openxmlformats.org/drawingml/2006/main" xmlns:p="http://schemas.openxmlformats.org/presentationml/2006/main" xmlns:r="http://schemas.openxmlformats.org/officeDocument/2006/relationships">
+<p:notes xmlns:a="http://schemas.openxmlformats.org/drawingml/2006/main" xmlns:r="http://schemas.openxmlformats.org/officeDocument/2006/relationships" xmlns:p="http://schemas.openxmlformats.org/presentationml/2006/main">
   <p:cSld>
     <p:spTree>
       <p:nvGrpSpPr>
@@ -798,7 +600,7 @@
         <p:nvSpPr>
           <p:cNvPr id="2" name="Slide Image Placeholder 1"/>
           <p:cNvSpPr>
-            <a:spLocks noGrp="1"/>
+            <a:spLocks noGrp="1" noRot="1" noChangeAspect="1"/>
           </p:cNvSpPr>
           <p:nvPr>
             <p:ph type="sldImg" idx="2"/>
@@ -813,7 +615,7 @@
             <a:spLocks noGrp="1"/>
           </p:cNvSpPr>
           <p:nvPr>
-            <p:ph type="body" idx="3" sz="quarter"/>
+            <p:ph type="body" sz="quarter" idx="3"/>
           </p:nvPr>
         </p:nvSpPr>
         <p:spPr/>
@@ -825,7 +627,9 @@
               <a:t>[Integrante 1 ou 2 | tempo-alvo: 0:45]</a:t>
             </a:r>
           </a:p>
-          <a:p/>
+          <a:p>
+            <a:endParaRPr/>
+          </a:p>
           <a:p>
             <a:r>
               <a:t>Este é o slide central dos resultados. Primeiro os baselines (acurácia enganosa; regra com alta sensibilidade e precisão baixíssima). Depois o Random Forest, linha destacada: 60% dos acidentes com 46% de precisão e 43% dos incidentes graves. Fechar com o teste confirmando a ordem.</a:t>
@@ -840,7 +644,7 @@
             <a:spLocks noGrp="1"/>
           </p:cNvSpPr>
           <p:nvPr>
-            <p:ph type="sldNum" idx="5" sz="quarter"/>
+            <p:ph type="sldNum" sz="quarter" idx="5"/>
           </p:nvPr>
         </p:nvSpPr>
         <p:spPr/>
@@ -854,7 +658,7 @@
 </file>
 
 <file path=ppt/notesSlides/notesSlide14.xml><?xml version="1.0" encoding="utf-8"?>
-<p:notes xmlns:a="http://schemas.openxmlformats.org/drawingml/2006/main" xmlns:p="http://schemas.openxmlformats.org/presentationml/2006/main" xmlns:r="http://schemas.openxmlformats.org/officeDocument/2006/relationships">
+<p:notes xmlns:a="http://schemas.openxmlformats.org/drawingml/2006/main" xmlns:r="http://schemas.openxmlformats.org/officeDocument/2006/relationships" xmlns:p="http://schemas.openxmlformats.org/presentationml/2006/main">
   <p:cSld>
     <p:spTree>
       <p:nvGrpSpPr>
@@ -874,7 +678,7 @@
         <p:nvSpPr>
           <p:cNvPr id="2" name="Slide Image Placeholder 1"/>
           <p:cNvSpPr>
-            <a:spLocks noGrp="1"/>
+            <a:spLocks noGrp="1" noRot="1" noChangeAspect="1"/>
           </p:cNvSpPr>
           <p:nvPr>
             <p:ph type="sldImg" idx="2"/>
@@ -889,7 +693,7 @@
             <a:spLocks noGrp="1"/>
           </p:cNvSpPr>
           <p:nvPr>
-            <p:ph type="body" idx="3" sz="quarter"/>
+            <p:ph type="body" sz="quarter" idx="3"/>
           </p:nvPr>
         </p:nvSpPr>
         <p:spPr/>
@@ -901,7 +705,9 @@
               <a:t>[Integrante 1 ou 2 | tempo-alvo: 0:30]</a:t>
             </a:r>
           </a:p>
-          <a:p/>
+          <a:p>
+            <a:endParaRPr/>
+          </a:p>
           <a:p>
             <a:r>
               <a:t>Ler a diagonal do Random Forest (97%, 43%, 60%) e explicar o custo: 107 incidentes classificados acima do que são, 2,8% deles. Na Regressão Logística a coluna 'inc. grave' está quase vazia.</a:t>
@@ -916,7 +722,7 @@
             <a:spLocks noGrp="1"/>
           </p:cNvSpPr>
           <p:nvPr>
-            <p:ph type="sldNum" idx="5" sz="quarter"/>
+            <p:ph type="sldNum" sz="quarter" idx="5"/>
           </p:nvPr>
         </p:nvSpPr>
         <p:spPr/>
@@ -930,7 +736,7 @@
 </file>
 
 <file path=ppt/notesSlides/notesSlide15.xml><?xml version="1.0" encoding="utf-8"?>
-<p:notes xmlns:a="http://schemas.openxmlformats.org/drawingml/2006/main" xmlns:p="http://schemas.openxmlformats.org/presentationml/2006/main" xmlns:r="http://schemas.openxmlformats.org/officeDocument/2006/relationships">
+<p:notes xmlns:a="http://schemas.openxmlformats.org/drawingml/2006/main" xmlns:r="http://schemas.openxmlformats.org/officeDocument/2006/relationships" xmlns:p="http://schemas.openxmlformats.org/presentationml/2006/main">
   <p:cSld>
     <p:spTree>
       <p:nvGrpSpPr>
@@ -950,7 +756,7 @@
         <p:nvSpPr>
           <p:cNvPr id="2" name="Slide Image Placeholder 1"/>
           <p:cNvSpPr>
-            <a:spLocks noGrp="1"/>
+            <a:spLocks noGrp="1" noRot="1" noChangeAspect="1"/>
           </p:cNvSpPr>
           <p:nvPr>
             <p:ph type="sldImg" idx="2"/>
@@ -965,7 +771,7 @@
             <a:spLocks noGrp="1"/>
           </p:cNvSpPr>
           <p:nvPr>
-            <p:ph type="body" idx="3" sz="quarter"/>
+            <p:ph type="body" sz="quarter" idx="3"/>
           </p:nvPr>
         </p:nvSpPr>
         <p:spPr/>
@@ -977,7 +783,9 @@
               <a:t>[Integrante 1 ou 2 | tempo-alvo: 0:30]</a:t>
             </a:r>
           </a:p>
-          <a:p/>
+          <a:p>
+            <a:endParaRPr/>
+          </a:p>
           <a:p>
             <a:r>
               <a:t>As curvas mostram o desempenho sem depender do limiar de decisão. Ponto honesto: na sensibilidade da regra, o ganho de precisão é pequeno; o modelo vale mais na faixa intermediária. O ajuste de limiar é o próximo passo.</a:t>
@@ -992,7 +800,7 @@
             <a:spLocks noGrp="1"/>
           </p:cNvSpPr>
           <p:nvPr>
-            <p:ph type="sldNum" idx="5" sz="quarter"/>
+            <p:ph type="sldNum" sz="quarter" idx="5"/>
           </p:nvPr>
         </p:nvSpPr>
         <p:spPr/>
@@ -1006,7 +814,7 @@
 </file>
 
 <file path=ppt/notesSlides/notesSlide16.xml><?xml version="1.0" encoding="utf-8"?>
-<p:notes xmlns:a="http://schemas.openxmlformats.org/drawingml/2006/main" xmlns:p="http://schemas.openxmlformats.org/presentationml/2006/main" xmlns:r="http://schemas.openxmlformats.org/officeDocument/2006/relationships">
+<p:notes xmlns:a="http://schemas.openxmlformats.org/drawingml/2006/main" xmlns:r="http://schemas.openxmlformats.org/officeDocument/2006/relationships" xmlns:p="http://schemas.openxmlformats.org/presentationml/2006/main">
   <p:cSld>
     <p:spTree>
       <p:nvGrpSpPr>
@@ -1026,7 +834,7 @@
         <p:nvSpPr>
           <p:cNvPr id="2" name="Slide Image Placeholder 1"/>
           <p:cNvSpPr>
-            <a:spLocks noGrp="1"/>
+            <a:spLocks noGrp="1" noRot="1" noChangeAspect="1"/>
           </p:cNvSpPr>
           <p:nvPr>
             <p:ph type="sldImg" idx="2"/>
@@ -1041,7 +849,7 @@
             <a:spLocks noGrp="1"/>
           </p:cNvSpPr>
           <p:nvPr>
-            <p:ph type="body" idx="3" sz="quarter"/>
+            <p:ph type="body" sz="quarter" idx="3"/>
           </p:nvPr>
         </p:nvSpPr>
         <p:spPr/>
@@ -1053,7 +861,9 @@
               <a:t>[Integrante 1 ou 2 | tempo-alvo: 0:35]</a:t>
             </a:r>
           </a:p>
-          <a:p/>
+          <a:p>
+            <a:endParaRPr/>
+          </a:p>
           <a:p>
             <a:r>
               <a:t>Random Forest confirma a análise exploratória: operação, peso, fase, local, tipo. Calendário não serve. Na Regressão Logística, mostrar os maiores contrastes e explicar o sinal 'errado' de Cessna/Sikorsky/Embraer pela colinearidade: a taxa marginal deles já está explicada por operação, motor e peso.</a:t>
@@ -1068,7 +878,7 @@
             <a:spLocks noGrp="1"/>
           </p:cNvSpPr>
           <p:nvPr>
-            <p:ph type="sldNum" idx="5" sz="quarter"/>
+            <p:ph type="sldNum" sz="quarter" idx="5"/>
           </p:nvPr>
         </p:nvSpPr>
         <p:spPr/>
@@ -1082,7 +892,7 @@
 </file>
 
 <file path=ppt/notesSlides/notesSlide17.xml><?xml version="1.0" encoding="utf-8"?>
-<p:notes xmlns:a="http://schemas.openxmlformats.org/drawingml/2006/main" xmlns:p="http://schemas.openxmlformats.org/presentationml/2006/main" xmlns:r="http://schemas.openxmlformats.org/officeDocument/2006/relationships">
+<p:notes xmlns:a="http://schemas.openxmlformats.org/drawingml/2006/main" xmlns:r="http://schemas.openxmlformats.org/officeDocument/2006/relationships" xmlns:p="http://schemas.openxmlformats.org/presentationml/2006/main">
   <p:cSld>
     <p:spTree>
       <p:nvGrpSpPr>
@@ -1102,7 +912,7 @@
         <p:nvSpPr>
           <p:cNvPr id="2" name="Slide Image Placeholder 1"/>
           <p:cNvSpPr>
-            <a:spLocks noGrp="1"/>
+            <a:spLocks noGrp="1" noRot="1" noChangeAspect="1"/>
           </p:cNvSpPr>
           <p:nvPr>
             <p:ph type="sldImg" idx="2"/>
@@ -1117,7 +927,7 @@
             <a:spLocks noGrp="1"/>
           </p:cNvSpPr>
           <p:nvPr>
-            <p:ph type="body" idx="3" sz="quarter"/>
+            <p:ph type="body" sz="quarter" idx="3"/>
           </p:nvPr>
         </p:nvSpPr>
         <p:spPr/>
@@ -1129,7 +939,9 @@
               <a:t>[Integrante 3 (fechamento) | tempo-alvo: 0:40]</a:t>
             </a:r>
           </a:p>
-          <a:p/>
+          <a:p>
+            <a:endParaRPr/>
+          </a:p>
           <a:p>
             <a:r>
               <a:t>Resumir em quatro frases o que foi feito e o melhor resultado. Declarar as limitações antes que perguntem. Listar os próximos passos até 18/11. Encerrar agradecendo.</a:t>
@@ -1144,7 +956,7 @@
             <a:spLocks noGrp="1"/>
           </p:cNvSpPr>
           <p:nvPr>
-            <p:ph type="sldNum" idx="5" sz="quarter"/>
+            <p:ph type="sldNum" sz="quarter" idx="5"/>
           </p:nvPr>
         </p:nvSpPr>
         <p:spPr/>
@@ -1158,7 +970,7 @@
 </file>
 
 <file path=ppt/notesSlides/notesSlide2.xml><?xml version="1.0" encoding="utf-8"?>
-<p:notes xmlns:a="http://schemas.openxmlformats.org/drawingml/2006/main" xmlns:p="http://schemas.openxmlformats.org/presentationml/2006/main" xmlns:r="http://schemas.openxmlformats.org/officeDocument/2006/relationships">
+<p:notes xmlns:a="http://schemas.openxmlformats.org/drawingml/2006/main" xmlns:r="http://schemas.openxmlformats.org/officeDocument/2006/relationships" xmlns:p="http://schemas.openxmlformats.org/presentationml/2006/main">
   <p:cSld>
     <p:spTree>
       <p:nvGrpSpPr>
@@ -1178,7 +990,7 @@
         <p:nvSpPr>
           <p:cNvPr id="2" name="Slide Image Placeholder 1"/>
           <p:cNvSpPr>
-            <a:spLocks noGrp="1"/>
+            <a:spLocks noGrp="1" noRot="1" noChangeAspect="1"/>
           </p:cNvSpPr>
           <p:nvPr>
             <p:ph type="sldImg" idx="2"/>
@@ -1193,7 +1005,7 @@
             <a:spLocks noGrp="1"/>
           </p:cNvSpPr>
           <p:nvPr>
-            <p:ph type="body" idx="3" sz="quarter"/>
+            <p:ph type="body" sz="quarter" idx="3"/>
           </p:nvPr>
         </p:nvSpPr>
         <p:spPr/>
@@ -1205,7 +1017,9 @@
               <a:t>[Integrante 1 | tempo-alvo: 0:35]</a:t>
             </a:r>
           </a:p>
-          <a:p/>
+          <a:p>
+            <a:endParaRPr/>
+          </a:p>
           <a:p>
             <a:r>
               <a:t>Situar o setor (RBAC 121 e 135), a fonte (CENIPA) e a lacuna: análise retrospectiva, nenhum modelo que classifique a severidade de um evento individual. Terminar enunciando a pergunta do trabalho.</a:t>
@@ -1220,7 +1034,7 @@
             <a:spLocks noGrp="1"/>
           </p:cNvSpPr>
           <p:nvPr>
-            <p:ph type="sldNum" idx="5" sz="quarter"/>
+            <p:ph type="sldNum" sz="quarter" idx="5"/>
           </p:nvPr>
         </p:nvSpPr>
         <p:spPr/>
@@ -1234,7 +1048,7 @@
 </file>
 
 <file path=ppt/notesSlides/notesSlide3.xml><?xml version="1.0" encoding="utf-8"?>
-<p:notes xmlns:a="http://schemas.openxmlformats.org/drawingml/2006/main" xmlns:p="http://schemas.openxmlformats.org/presentationml/2006/main" xmlns:r="http://schemas.openxmlformats.org/officeDocument/2006/relationships">
+<p:notes xmlns:a="http://schemas.openxmlformats.org/drawingml/2006/main" xmlns:r="http://schemas.openxmlformats.org/officeDocument/2006/relationships" xmlns:p="http://schemas.openxmlformats.org/presentationml/2006/main">
   <p:cSld>
     <p:spTree>
       <p:nvGrpSpPr>
@@ -1254,7 +1068,7 @@
         <p:nvSpPr>
           <p:cNvPr id="2" name="Slide Image Placeholder 1"/>
           <p:cNvSpPr>
-            <a:spLocks noGrp="1"/>
+            <a:spLocks noGrp="1" noRot="1" noChangeAspect="1"/>
           </p:cNvSpPr>
           <p:nvPr>
             <p:ph type="sldImg" idx="2"/>
@@ -1269,7 +1083,7 @@
             <a:spLocks noGrp="1"/>
           </p:cNvSpPr>
           <p:nvPr>
-            <p:ph type="body" idx="3" sz="quarter"/>
+            <p:ph type="body" sz="quarter" idx="3"/>
           </p:nvPr>
         </p:nvSpPr>
         <p:spPr/>
@@ -1281,7 +1095,9 @@
               <a:t>[Integrante 1 | tempo-alvo: 0:40]</a:t>
             </a:r>
           </a:p>
-          <a:p/>
+          <a:p>
+            <a:endParaRPr/>
+          </a:p>
           <a:p>
             <a:r>
               <a:t>Ler o objetivo. Depois as três definições, com ênfase em 'a diferença entre incidente grave e acidente está apenas nas consequências'. Fechar com a justificativa de manter as três classes separadas em vez de agrupar incidente grave com incidente.</a:t>
@@ -1296,7 +1112,7 @@
             <a:spLocks noGrp="1"/>
           </p:cNvSpPr>
           <p:nvPr>
-            <p:ph type="sldNum" idx="5" sz="quarter"/>
+            <p:ph type="sldNum" sz="quarter" idx="5"/>
           </p:nvPr>
         </p:nvSpPr>
         <p:spPr/>
@@ -1310,7 +1126,7 @@
 </file>
 
 <file path=ppt/notesSlides/notesSlide4.xml><?xml version="1.0" encoding="utf-8"?>
-<p:notes xmlns:a="http://schemas.openxmlformats.org/drawingml/2006/main" xmlns:p="http://schemas.openxmlformats.org/presentationml/2006/main" xmlns:r="http://schemas.openxmlformats.org/officeDocument/2006/relationships">
+<p:notes xmlns:a="http://schemas.openxmlformats.org/drawingml/2006/main" xmlns:r="http://schemas.openxmlformats.org/officeDocument/2006/relationships" xmlns:p="http://schemas.openxmlformats.org/presentationml/2006/main">
   <p:cSld>
     <p:spTree>
       <p:nvGrpSpPr>
@@ -1330,7 +1146,7 @@
         <p:nvSpPr>
           <p:cNvPr id="2" name="Slide Image Placeholder 1"/>
           <p:cNvSpPr>
-            <a:spLocks noGrp="1"/>
+            <a:spLocks noGrp="1" noRot="1" noChangeAspect="1"/>
           </p:cNvSpPr>
           <p:nvPr>
             <p:ph type="sldImg" idx="2"/>
@@ -1345,7 +1161,7 @@
             <a:spLocks noGrp="1"/>
           </p:cNvSpPr>
           <p:nvPr>
-            <p:ph type="body" idx="3" sz="quarter"/>
+            <p:ph type="body" sz="quarter" idx="3"/>
           </p:nvPr>
         </p:nvSpPr>
         <p:spPr/>
@@ -1357,7 +1173,9 @@
               <a:t>[Integrante 1 | tempo-alvo: 0:35]</a:t>
             </a:r>
           </a:p>
-          <a:p/>
+          <a:p>
+            <a:endParaRPr/>
+          </a:p>
           <a:p>
             <a:r>
               <a:t>Um trabalho de séries temporais (Reinert) e dois descritivos sobre meteorologia (Soares; Barros e Balero). Destacar a última coluna: o que este trabalho faz que eles não fazem. Não ler a tabela inteira.</a:t>
@@ -1372,7 +1190,7 @@
             <a:spLocks noGrp="1"/>
           </p:cNvSpPr>
           <p:nvPr>
-            <p:ph type="sldNum" idx="5" sz="quarter"/>
+            <p:ph type="sldNum" sz="quarter" idx="5"/>
           </p:nvPr>
         </p:nvSpPr>
         <p:spPr/>
@@ -1386,7 +1204,7 @@
 </file>
 
 <file path=ppt/notesSlides/notesSlide5.xml><?xml version="1.0" encoding="utf-8"?>
-<p:notes xmlns:a="http://schemas.openxmlformats.org/drawingml/2006/main" xmlns:p="http://schemas.openxmlformats.org/presentationml/2006/main" xmlns:r="http://schemas.openxmlformats.org/officeDocument/2006/relationships">
+<p:notes xmlns:a="http://schemas.openxmlformats.org/drawingml/2006/main" xmlns:r="http://schemas.openxmlformats.org/officeDocument/2006/relationships" xmlns:p="http://schemas.openxmlformats.org/presentationml/2006/main">
   <p:cSld>
     <p:spTree>
       <p:nvGrpSpPr>
@@ -1406,7 +1224,7 @@
         <p:nvSpPr>
           <p:cNvPr id="2" name="Slide Image Placeholder 1"/>
           <p:cNvSpPr>
-            <a:spLocks noGrp="1"/>
+            <a:spLocks noGrp="1" noRot="1" noChangeAspect="1"/>
           </p:cNvSpPr>
           <p:nvPr>
             <p:ph type="sldImg" idx="2"/>
@@ -1421,7 +1239,7 @@
             <a:spLocks noGrp="1"/>
           </p:cNvSpPr>
           <p:nvPr>
-            <p:ph type="body" idx="3" sz="quarter"/>
+            <p:ph type="body" sz="quarter" idx="3"/>
           </p:nvPr>
         </p:nvSpPr>
         <p:spPr/>
@@ -1433,7 +1251,9 @@
               <a:t>[Integrante 2 | tempo-alvo: 0:35]</a:t>
             </a:r>
           </a:p>
-          <a:p/>
+          <a:p>
+            <a:endParaRPr/>
+          </a:p>
           <a:p>
             <a:r>
               <a:t>Funil de construção da base (três números). Depois o desbalanceamento: menos de 2% de acidentes. Justificar o escopo com os três motivos, em especial os 12 acidentes da operação regular.</a:t>
@@ -1448,7 +1268,7 @@
             <a:spLocks noGrp="1"/>
           </p:cNvSpPr>
           <p:nvPr>
-            <p:ph type="sldNum" idx="5" sz="quarter"/>
+            <p:ph type="sldNum" sz="quarter" idx="5"/>
           </p:nvPr>
         </p:nvSpPr>
         <p:spPr/>
@@ -1462,7 +1282,7 @@
 </file>
 
 <file path=ppt/notesSlides/notesSlide6.xml><?xml version="1.0" encoding="utf-8"?>
-<p:notes xmlns:a="http://schemas.openxmlformats.org/drawingml/2006/main" xmlns:p="http://schemas.openxmlformats.org/presentationml/2006/main" xmlns:r="http://schemas.openxmlformats.org/officeDocument/2006/relationships">
+<p:notes xmlns:a="http://schemas.openxmlformats.org/drawingml/2006/main" xmlns:r="http://schemas.openxmlformats.org/officeDocument/2006/relationships" xmlns:p="http://schemas.openxmlformats.org/presentationml/2006/main">
   <p:cSld>
     <p:spTree>
       <p:nvGrpSpPr>
@@ -1482,7 +1302,7 @@
         <p:nvSpPr>
           <p:cNvPr id="2" name="Slide Image Placeholder 1"/>
           <p:cNvSpPr>
-            <a:spLocks noGrp="1"/>
+            <a:spLocks noGrp="1" noRot="1" noChangeAspect="1"/>
           </p:cNvSpPr>
           <p:nvPr>
             <p:ph type="sldImg" idx="2"/>
@@ -1497,7 +1317,7 @@
             <a:spLocks noGrp="1"/>
           </p:cNvSpPr>
           <p:nvPr>
-            <p:ph type="body" idx="3" sz="quarter"/>
+            <p:ph type="body" sz="quarter" idx="3"/>
           </p:nvPr>
         </p:nvSpPr>
         <p:spPr/>
@@ -1509,7 +1329,9 @@
               <a:t>[Integrante 2 | tempo-alvo: 0:40]</a:t>
             </a:r>
           </a:p>
-          <a:p/>
+          <a:p>
+            <a:endParaRPr/>
+          </a:p>
           <a:p>
             <a:r>
               <a:t>Este é o achado metodológico central. Mostrar na tabela que relatório, fatores e recomendações existem em 61–68% dos acidentes, 44–45% dos incidentes graves e 0,1% dos incidentes: usar isso seria trapaça. Listar rapidamente o que ficou como preditor.</a:t>
@@ -1524,7 +1346,7 @@
             <a:spLocks noGrp="1"/>
           </p:cNvSpPr>
           <p:nvPr>
-            <p:ph type="sldNum" idx="5" sz="quarter"/>
+            <p:ph type="sldNum" sz="quarter" idx="5"/>
           </p:nvPr>
         </p:nvSpPr>
         <p:spPr/>
@@ -1538,7 +1360,7 @@
 </file>
 
 <file path=ppt/notesSlides/notesSlide7.xml><?xml version="1.0" encoding="utf-8"?>
-<p:notes xmlns:a="http://schemas.openxmlformats.org/drawingml/2006/main" xmlns:p="http://schemas.openxmlformats.org/presentationml/2006/main" xmlns:r="http://schemas.openxmlformats.org/officeDocument/2006/relationships">
+<p:notes xmlns:a="http://schemas.openxmlformats.org/drawingml/2006/main" xmlns:r="http://schemas.openxmlformats.org/officeDocument/2006/relationships" xmlns:p="http://schemas.openxmlformats.org/presentationml/2006/main">
   <p:cSld>
     <p:spTree>
       <p:nvGrpSpPr>
@@ -1558,7 +1380,7 @@
         <p:nvSpPr>
           <p:cNvPr id="2" name="Slide Image Placeholder 1"/>
           <p:cNvSpPr>
-            <a:spLocks noGrp="1"/>
+            <a:spLocks noGrp="1" noRot="1" noChangeAspect="1"/>
           </p:cNvSpPr>
           <p:nvPr>
             <p:ph type="sldImg" idx="2"/>
@@ -1573,7 +1395,7 @@
             <a:spLocks noGrp="1"/>
           </p:cNvSpPr>
           <p:nvPr>
-            <p:ph type="body" idx="3" sz="quarter"/>
+            <p:ph type="body" sz="quarter" idx="3"/>
           </p:nvPr>
         </p:nvSpPr>
         <p:spPr/>
@@ -1585,7 +1407,9 @@
               <a:t>[Integrante 2 | tempo-alvo: 0:45]</a:t>
             </a:r>
           </a:p>
-          <a:p/>
+          <a:p>
+            <a:endParaRPr/>
+          </a:p>
           <a:p>
             <a:r>
               <a:t>Percorrer o fluxo da esquerda para a direita. Explicar por que o número principal é a validação cruzada (18 acidentes no teste: cada erro move a sensibilidade em 5,6 pontos). Dizer que F1-macro é o critério de seleção e que acurácia não serve. Apresentar os dois baselines: todo modelo tem que bater a regra do tipo de operação.</a:t>
@@ -1600,7 +1424,7 @@
             <a:spLocks noGrp="1"/>
           </p:cNvSpPr>
           <p:nvPr>
-            <p:ph type="sldNum" idx="5" sz="quarter"/>
+            <p:ph type="sldNum" sz="quarter" idx="5"/>
           </p:nvPr>
         </p:nvSpPr>
         <p:spPr/>
@@ -1614,7 +1438,7 @@
 </file>
 
 <file path=ppt/notesSlides/notesSlide8.xml><?xml version="1.0" encoding="utf-8"?>
-<p:notes xmlns:a="http://schemas.openxmlformats.org/drawingml/2006/main" xmlns:p="http://schemas.openxmlformats.org/presentationml/2006/main" xmlns:r="http://schemas.openxmlformats.org/officeDocument/2006/relationships">
+<p:notes xmlns:a="http://schemas.openxmlformats.org/drawingml/2006/main" xmlns:r="http://schemas.openxmlformats.org/officeDocument/2006/relationships" xmlns:p="http://schemas.openxmlformats.org/presentationml/2006/main">
   <p:cSld>
     <p:spTree>
       <p:nvGrpSpPr>
@@ -1634,7 +1458,7 @@
         <p:nvSpPr>
           <p:cNvPr id="2" name="Slide Image Placeholder 1"/>
           <p:cNvSpPr>
-            <a:spLocks noGrp="1"/>
+            <a:spLocks noGrp="1" noRot="1" noChangeAspect="1"/>
           </p:cNvSpPr>
           <p:nvPr>
             <p:ph type="sldImg" idx="2"/>
@@ -1649,7 +1473,7 @@
             <a:spLocks noGrp="1"/>
           </p:cNvSpPr>
           <p:nvPr>
-            <p:ph type="body" idx="3" sz="quarter"/>
+            <p:ph type="body" sz="quarter" idx="3"/>
           </p:nvPr>
         </p:nvSpPr>
         <p:spPr/>
@@ -1661,7 +1485,9 @@
               <a:t>[Integrante 3 | tempo-alvo: 0:30]</a:t>
             </a:r>
           </a:p>
-          <a:p/>
+          <a:p>
+            <a:endParaRPr/>
+          </a:p>
           <a:p>
             <a:r>
               <a:t>O tipo de operação é o atributo que mais separa as classes: regular 0,28% de acidentes, táxi aéreo 11%. Aeronaves a pistão, monomotoras e helicópteros seguem o padrão. Avisar da colinearidade: esses atributos descrevem o mesmo subgrupo, o que vai aparecer na interpretação da Regressão Logística.</a:t>
@@ -1676,7 +1502,7 @@
             <a:spLocks noGrp="1"/>
           </p:cNvSpPr>
           <p:nvPr>
-            <p:ph type="sldNum" idx="5" sz="quarter"/>
+            <p:ph type="sldNum" sz="quarter" idx="5"/>
           </p:nvPr>
         </p:nvSpPr>
         <p:spPr/>
@@ -1690,7 +1516,7 @@
 </file>
 
 <file path=ppt/notesSlides/notesSlide9.xml><?xml version="1.0" encoding="utf-8"?>
-<p:notes xmlns:a="http://schemas.openxmlformats.org/drawingml/2006/main" xmlns:p="http://schemas.openxmlformats.org/presentationml/2006/main" xmlns:r="http://schemas.openxmlformats.org/officeDocument/2006/relationships">
+<p:notes xmlns:a="http://schemas.openxmlformats.org/drawingml/2006/main" xmlns:r="http://schemas.openxmlformats.org/officeDocument/2006/relationships" xmlns:p="http://schemas.openxmlformats.org/presentationml/2006/main">
   <p:cSld>
     <p:spTree>
       <p:nvGrpSpPr>
@@ -1710,7 +1536,7 @@
         <p:nvSpPr>
           <p:cNvPr id="2" name="Slide Image Placeholder 1"/>
           <p:cNvSpPr>
-            <a:spLocks noGrp="1"/>
+            <a:spLocks noGrp="1" noRot="1" noChangeAspect="1"/>
           </p:cNvSpPr>
           <p:nvPr>
             <p:ph type="sldImg" idx="2"/>
@@ -1725,7 +1551,7 @@
             <a:spLocks noGrp="1"/>
           </p:cNvSpPr>
           <p:nvPr>
-            <p:ph type="body" idx="3" sz="quarter"/>
+            <p:ph type="body" sz="quarter" idx="3"/>
           </p:nvPr>
         </p:nvSpPr>
         <p:spPr/>
@@ -1737,7 +1563,9 @@
               <a:t>[Integrante 3 | tempo-alvo: 0:30]</a:t>
             </a:r>
           </a:p>
-          <a:p/>
+          <a:p>
+            <a:endParaRPr/>
+          </a:p>
           <a:p>
             <a:r>
               <a:t>Mostrar que incidente grave e acidente vêm de tipos diferentes: tráfego aéreo gera 21 incidentes graves e nenhum acidente; falha do motor em voo gera 14 acidentes e nenhum incidente grave. Esse é o argumento empírico das três classes.</a:t>
@@ -1752,7 +1580,7 @@
             <a:spLocks noGrp="1"/>
           </p:cNvSpPr>
           <p:nvPr>
-            <p:ph type="sldNum" idx="5" sz="quarter"/>
+            <p:ph type="sldNum" sz="quarter" idx="5"/>
           </p:nvPr>
         </p:nvSpPr>
         <p:spPr/>
@@ -1803,10 +1631,9 @@
           <a:lstStyle/>
           <a:p>
             <a:r>
-              <a:rPr lang="en-US" smtClean="0"/>
+              <a:rPr lang="en-US"/>
               <a:t>Click to edit Master title style</a:t>
             </a:r>
-            <a:endParaRPr lang="en-US"/>
           </a:p>
         </p:txBody>
       </p:sp>
@@ -1922,10 +1749,9 @@
           </a:lstStyle>
           <a:p>
             <a:r>
-              <a:rPr lang="en-US" smtClean="0"/>
+              <a:rPr lang="en-US"/>
               <a:t>Click to edit Master subtitle style</a:t>
             </a:r>
-            <a:endParaRPr lang="en-US"/>
           </a:p>
         </p:txBody>
       </p:sp>
@@ -1946,7 +1772,7 @@
           <a:p>
             <a:fld id="{5BCAD085-E8A6-8845-BD4E-CB4CCA059FC4}" type="datetimeFigureOut">
               <a:rPr lang="en-US" smtClean="0"/>
-              <a:t>1/27/13</a:t>
+              <a:t>10/24/26</a:t>
             </a:fld>
             <a:endParaRPr lang="en-US"/>
           </a:p>
@@ -2040,10 +1866,9 @@
           <a:lstStyle/>
           <a:p>
             <a:r>
-              <a:rPr lang="en-US" smtClean="0"/>
+              <a:rPr lang="en-US"/>
               <a:t>Click to edit Master title style</a:t>
             </a:r>
-            <a:endParaRPr lang="en-US"/>
           </a:p>
         </p:txBody>
       </p:sp>
@@ -2064,38 +1889,37 @@
           <a:p>
             <a:pPr lvl="0"/>
             <a:r>
-              <a:rPr lang="en-US" smtClean="0"/>
+              <a:rPr lang="en-US"/>
               <a:t>Click to edit Master text styles</a:t>
             </a:r>
           </a:p>
           <a:p>
             <a:pPr lvl="1"/>
             <a:r>
-              <a:rPr lang="en-US" smtClean="0"/>
+              <a:rPr lang="en-US"/>
               <a:t>Second level</a:t>
             </a:r>
           </a:p>
           <a:p>
             <a:pPr lvl="2"/>
             <a:r>
-              <a:rPr lang="en-US" smtClean="0"/>
+              <a:rPr lang="en-US"/>
               <a:t>Third level</a:t>
             </a:r>
           </a:p>
           <a:p>
             <a:pPr lvl="3"/>
             <a:r>
-              <a:rPr lang="en-US" smtClean="0"/>
+              <a:rPr lang="en-US"/>
               <a:t>Fourth level</a:t>
             </a:r>
           </a:p>
           <a:p>
             <a:pPr lvl="4"/>
             <a:r>
-              <a:rPr lang="en-US" smtClean="0"/>
+              <a:rPr lang="en-US"/>
               <a:t>Fifth level</a:t>
             </a:r>
-            <a:endParaRPr lang="en-US"/>
           </a:p>
         </p:txBody>
       </p:sp>
@@ -2116,7 +1940,7 @@
           <a:p>
             <a:fld id="{5BCAD085-E8A6-8845-BD4E-CB4CCA059FC4}" type="datetimeFigureOut">
               <a:rPr lang="en-US" smtClean="0"/>
-              <a:t>1/27/13</a:t>
+              <a:t>10/24/26</a:t>
             </a:fld>
             <a:endParaRPr lang="en-US"/>
           </a:p>
@@ -2215,10 +2039,9 @@
           <a:lstStyle/>
           <a:p>
             <a:r>
-              <a:rPr lang="en-US" smtClean="0"/>
+              <a:rPr lang="en-US"/>
               <a:t>Click to edit Master title style</a:t>
             </a:r>
-            <a:endParaRPr lang="en-US"/>
           </a:p>
         </p:txBody>
       </p:sp>
@@ -2244,38 +2067,37 @@
           <a:p>
             <a:pPr lvl="0"/>
             <a:r>
-              <a:rPr lang="en-US" smtClean="0"/>
+              <a:rPr lang="en-US"/>
               <a:t>Click to edit Master text styles</a:t>
             </a:r>
           </a:p>
           <a:p>
             <a:pPr lvl="1"/>
             <a:r>
-              <a:rPr lang="en-US" smtClean="0"/>
+              <a:rPr lang="en-US"/>
               <a:t>Second level</a:t>
             </a:r>
           </a:p>
           <a:p>
             <a:pPr lvl="2"/>
             <a:r>
-              <a:rPr lang="en-US" smtClean="0"/>
+              <a:rPr lang="en-US"/>
               <a:t>Third level</a:t>
             </a:r>
           </a:p>
           <a:p>
             <a:pPr lvl="3"/>
             <a:r>
-              <a:rPr lang="en-US" smtClean="0"/>
+              <a:rPr lang="en-US"/>
               <a:t>Fourth level</a:t>
             </a:r>
           </a:p>
           <a:p>
             <a:pPr lvl="4"/>
             <a:r>
-              <a:rPr lang="en-US" smtClean="0"/>
+              <a:rPr lang="en-US"/>
               <a:t>Fifth level</a:t>
             </a:r>
-            <a:endParaRPr lang="en-US"/>
           </a:p>
         </p:txBody>
       </p:sp>
@@ -2296,7 +2118,7 @@
           <a:p>
             <a:fld id="{5BCAD085-E8A6-8845-BD4E-CB4CCA059FC4}" type="datetimeFigureOut">
               <a:rPr lang="en-US" smtClean="0"/>
-              <a:t>1/27/13</a:t>
+              <a:t>10/24/26</a:t>
             </a:fld>
             <a:endParaRPr lang="en-US"/>
           </a:p>
@@ -2390,10 +2212,9 @@
           <a:lstStyle/>
           <a:p>
             <a:r>
-              <a:rPr lang="en-US" smtClean="0"/>
+              <a:rPr lang="en-US"/>
               <a:t>Click to edit Master title style</a:t>
             </a:r>
-            <a:endParaRPr lang="en-US"/>
           </a:p>
         </p:txBody>
       </p:sp>
@@ -2414,38 +2235,37 @@
           <a:p>
             <a:pPr lvl="0"/>
             <a:r>
-              <a:rPr lang="en-US" smtClean="0"/>
+              <a:rPr lang="en-US"/>
               <a:t>Click to edit Master text styles</a:t>
             </a:r>
           </a:p>
           <a:p>
             <a:pPr lvl="1"/>
             <a:r>
-              <a:rPr lang="en-US" smtClean="0"/>
+              <a:rPr lang="en-US"/>
               <a:t>Second level</a:t>
             </a:r>
           </a:p>
           <a:p>
             <a:pPr lvl="2"/>
             <a:r>
-              <a:rPr lang="en-US" smtClean="0"/>
+              <a:rPr lang="en-US"/>
               <a:t>Third level</a:t>
             </a:r>
           </a:p>
           <a:p>
             <a:pPr lvl="3"/>
             <a:r>
-              <a:rPr lang="en-US" smtClean="0"/>
+              <a:rPr lang="en-US"/>
               <a:t>Fourth level</a:t>
             </a:r>
           </a:p>
           <a:p>
             <a:pPr lvl="4"/>
             <a:r>
-              <a:rPr lang="en-US" smtClean="0"/>
+              <a:rPr lang="en-US"/>
               <a:t>Fifth level</a:t>
             </a:r>
-            <a:endParaRPr lang="en-US"/>
           </a:p>
         </p:txBody>
       </p:sp>
@@ -2466,7 +2286,7 @@
           <a:p>
             <a:fld id="{5BCAD085-E8A6-8845-BD4E-CB4CCA059FC4}" type="datetimeFigureOut">
               <a:rPr lang="en-US" smtClean="0"/>
-              <a:t>1/27/13</a:t>
+              <a:t>10/24/26</a:t>
             </a:fld>
             <a:endParaRPr lang="en-US"/>
           </a:p>
@@ -2569,10 +2389,9 @@
           </a:lstStyle>
           <a:p>
             <a:r>
-              <a:rPr lang="en-US" smtClean="0"/>
+              <a:rPr lang="en-US"/>
               <a:t>Click to edit Master title style</a:t>
             </a:r>
-            <a:endParaRPr lang="en-US"/>
           </a:p>
         </p:txBody>
       </p:sp>
@@ -2689,7 +2508,7 @@
           <a:p>
             <a:pPr lvl="0"/>
             <a:r>
-              <a:rPr lang="en-US" smtClean="0"/>
+              <a:rPr lang="en-US"/>
               <a:t>Click to edit Master text styles</a:t>
             </a:r>
           </a:p>
@@ -2712,7 +2531,7 @@
           <a:p>
             <a:fld id="{5BCAD085-E8A6-8845-BD4E-CB4CCA059FC4}" type="datetimeFigureOut">
               <a:rPr lang="en-US" smtClean="0"/>
-              <a:t>1/27/13</a:t>
+              <a:t>10/24/26</a:t>
             </a:fld>
             <a:endParaRPr lang="en-US"/>
           </a:p>
@@ -2806,10 +2625,9 @@
           <a:lstStyle/>
           <a:p>
             <a:r>
-              <a:rPr lang="en-US" smtClean="0"/>
+              <a:rPr lang="en-US"/>
               <a:t>Click to edit Master title style</a:t>
             </a:r>
-            <a:endParaRPr lang="en-US"/>
           </a:p>
         </p:txBody>
       </p:sp>
@@ -2863,38 +2681,37 @@
           <a:p>
             <a:pPr lvl="0"/>
             <a:r>
-              <a:rPr lang="en-US" smtClean="0"/>
+              <a:rPr lang="en-US"/>
               <a:t>Click to edit Master text styles</a:t>
             </a:r>
           </a:p>
           <a:p>
             <a:pPr lvl="1"/>
             <a:r>
-              <a:rPr lang="en-US" smtClean="0"/>
+              <a:rPr lang="en-US"/>
               <a:t>Second level</a:t>
             </a:r>
           </a:p>
           <a:p>
             <a:pPr lvl="2"/>
             <a:r>
-              <a:rPr lang="en-US" smtClean="0"/>
+              <a:rPr lang="en-US"/>
               <a:t>Third level</a:t>
             </a:r>
           </a:p>
           <a:p>
             <a:pPr lvl="3"/>
             <a:r>
-              <a:rPr lang="en-US" smtClean="0"/>
+              <a:rPr lang="en-US"/>
               <a:t>Fourth level</a:t>
             </a:r>
           </a:p>
           <a:p>
             <a:pPr lvl="4"/>
             <a:r>
-              <a:rPr lang="en-US" smtClean="0"/>
+              <a:rPr lang="en-US"/>
               <a:t>Fifth level</a:t>
             </a:r>
-            <a:endParaRPr lang="en-US"/>
           </a:p>
         </p:txBody>
       </p:sp>
@@ -2948,38 +2765,37 @@
           <a:p>
             <a:pPr lvl="0"/>
             <a:r>
-              <a:rPr lang="en-US" smtClean="0"/>
+              <a:rPr lang="en-US"/>
               <a:t>Click to edit Master text styles</a:t>
             </a:r>
           </a:p>
           <a:p>
             <a:pPr lvl="1"/>
             <a:r>
-              <a:rPr lang="en-US" smtClean="0"/>
+              <a:rPr lang="en-US"/>
               <a:t>Second level</a:t>
             </a:r>
           </a:p>
           <a:p>
             <a:pPr lvl="2"/>
             <a:r>
-              <a:rPr lang="en-US" smtClean="0"/>
+              <a:rPr lang="en-US"/>
               <a:t>Third level</a:t>
             </a:r>
           </a:p>
           <a:p>
             <a:pPr lvl="3"/>
             <a:r>
-              <a:rPr lang="en-US" smtClean="0"/>
+              <a:rPr lang="en-US"/>
               <a:t>Fourth level</a:t>
             </a:r>
           </a:p>
           <a:p>
             <a:pPr lvl="4"/>
             <a:r>
-              <a:rPr lang="en-US" smtClean="0"/>
+              <a:rPr lang="en-US"/>
               <a:t>Fifth level</a:t>
             </a:r>
-            <a:endParaRPr lang="en-US"/>
           </a:p>
         </p:txBody>
       </p:sp>
@@ -3000,7 +2816,7 @@
           <a:p>
             <a:fld id="{5BCAD085-E8A6-8845-BD4E-CB4CCA059FC4}" type="datetimeFigureOut">
               <a:rPr lang="en-US" smtClean="0"/>
-              <a:t>1/27/13</a:t>
+              <a:t>10/24/26</a:t>
             </a:fld>
             <a:endParaRPr lang="en-US"/>
           </a:p>
@@ -3098,10 +2914,9 @@
           </a:lstStyle>
           <a:p>
             <a:r>
-              <a:rPr lang="en-US" smtClean="0"/>
+              <a:rPr lang="en-US"/>
               <a:t>Click to edit Master title style</a:t>
             </a:r>
-            <a:endParaRPr lang="en-US"/>
           </a:p>
         </p:txBody>
       </p:sp>
@@ -3164,7 +2979,7 @@
           <a:p>
             <a:pPr lvl="0"/>
             <a:r>
-              <a:rPr lang="en-US" smtClean="0"/>
+              <a:rPr lang="en-US"/>
               <a:t>Click to edit Master text styles</a:t>
             </a:r>
           </a:p>
@@ -3220,38 +3035,37 @@
           <a:p>
             <a:pPr lvl="0"/>
             <a:r>
-              <a:rPr lang="en-US" smtClean="0"/>
+              <a:rPr lang="en-US"/>
               <a:t>Click to edit Master text styles</a:t>
             </a:r>
           </a:p>
           <a:p>
             <a:pPr lvl="1"/>
             <a:r>
-              <a:rPr lang="en-US" smtClean="0"/>
+              <a:rPr lang="en-US"/>
               <a:t>Second level</a:t>
             </a:r>
           </a:p>
           <a:p>
             <a:pPr lvl="2"/>
             <a:r>
-              <a:rPr lang="en-US" smtClean="0"/>
+              <a:rPr lang="en-US"/>
               <a:t>Third level</a:t>
             </a:r>
           </a:p>
           <a:p>
             <a:pPr lvl="3"/>
             <a:r>
-              <a:rPr lang="en-US" smtClean="0"/>
+              <a:rPr lang="en-US"/>
               <a:t>Fourth level</a:t>
             </a:r>
           </a:p>
           <a:p>
             <a:pPr lvl="4"/>
             <a:r>
-              <a:rPr lang="en-US" smtClean="0"/>
+              <a:rPr lang="en-US"/>
               <a:t>Fifth level</a:t>
             </a:r>
-            <a:endParaRPr lang="en-US"/>
           </a:p>
         </p:txBody>
       </p:sp>
@@ -3314,7 +3128,7 @@
           <a:p>
             <a:pPr lvl="0"/>
             <a:r>
-              <a:rPr lang="en-US" smtClean="0"/>
+              <a:rPr lang="en-US"/>
               <a:t>Click to edit Master text styles</a:t>
             </a:r>
           </a:p>
@@ -3370,38 +3184,37 @@
           <a:p>
             <a:pPr lvl="0"/>
             <a:r>
-              <a:rPr lang="en-US" smtClean="0"/>
+              <a:rPr lang="en-US"/>
               <a:t>Click to edit Master text styles</a:t>
             </a:r>
           </a:p>
           <a:p>
             <a:pPr lvl="1"/>
             <a:r>
-              <a:rPr lang="en-US" smtClean="0"/>
+              <a:rPr lang="en-US"/>
               <a:t>Second level</a:t>
             </a:r>
           </a:p>
           <a:p>
             <a:pPr lvl="2"/>
             <a:r>
-              <a:rPr lang="en-US" smtClean="0"/>
+              <a:rPr lang="en-US"/>
               <a:t>Third level</a:t>
             </a:r>
           </a:p>
           <a:p>
             <a:pPr lvl="3"/>
             <a:r>
-              <a:rPr lang="en-US" smtClean="0"/>
+              <a:rPr lang="en-US"/>
               <a:t>Fourth level</a:t>
             </a:r>
           </a:p>
           <a:p>
             <a:pPr lvl="4"/>
             <a:r>
-              <a:rPr lang="en-US" smtClean="0"/>
+              <a:rPr lang="en-US"/>
               <a:t>Fifth level</a:t>
             </a:r>
-            <a:endParaRPr lang="en-US"/>
           </a:p>
         </p:txBody>
       </p:sp>
@@ -3422,7 +3235,7 @@
           <a:p>
             <a:fld id="{5BCAD085-E8A6-8845-BD4E-CB4CCA059FC4}" type="datetimeFigureOut">
               <a:rPr lang="en-US" smtClean="0"/>
-              <a:t>1/27/13</a:t>
+              <a:t>10/24/26</a:t>
             </a:fld>
             <a:endParaRPr lang="en-US"/>
           </a:p>
@@ -3516,10 +3329,9 @@
           <a:lstStyle/>
           <a:p>
             <a:r>
-              <a:rPr lang="en-US" smtClean="0"/>
+              <a:rPr lang="en-US"/>
               <a:t>Click to edit Master title style</a:t>
             </a:r>
-            <a:endParaRPr lang="en-US"/>
           </a:p>
         </p:txBody>
       </p:sp>
@@ -3540,7 +3352,7 @@
           <a:p>
             <a:fld id="{5BCAD085-E8A6-8845-BD4E-CB4CCA059FC4}" type="datetimeFigureOut">
               <a:rPr lang="en-US" smtClean="0"/>
-              <a:t>1/27/13</a:t>
+              <a:t>10/24/26</a:t>
             </a:fld>
             <a:endParaRPr lang="en-US"/>
           </a:p>
@@ -3635,7 +3447,7 @@
           <a:p>
             <a:fld id="{5BCAD085-E8A6-8845-BD4E-CB4CCA059FC4}" type="datetimeFigureOut">
               <a:rPr lang="en-US" smtClean="0"/>
-              <a:t>1/27/13</a:t>
+              <a:t>10/24/26</a:t>
             </a:fld>
             <a:endParaRPr lang="en-US"/>
           </a:p>
@@ -3738,10 +3550,9 @@
           </a:lstStyle>
           <a:p>
             <a:r>
-              <a:rPr lang="en-US" smtClean="0"/>
+              <a:rPr lang="en-US"/>
               <a:t>Click to edit Master title style</a:t>
             </a:r>
-            <a:endParaRPr lang="en-US"/>
           </a:p>
         </p:txBody>
       </p:sp>
@@ -3795,38 +3606,37 @@
           <a:p>
             <a:pPr lvl="0"/>
             <a:r>
-              <a:rPr lang="en-US" smtClean="0"/>
+              <a:rPr lang="en-US"/>
               <a:t>Click to edit Master text styles</a:t>
             </a:r>
           </a:p>
           <a:p>
             <a:pPr lvl="1"/>
             <a:r>
-              <a:rPr lang="en-US" smtClean="0"/>
+              <a:rPr lang="en-US"/>
               <a:t>Second level</a:t>
             </a:r>
           </a:p>
           <a:p>
             <a:pPr lvl="2"/>
             <a:r>
-              <a:rPr lang="en-US" smtClean="0"/>
+              <a:rPr lang="en-US"/>
               <a:t>Third level</a:t>
             </a:r>
           </a:p>
           <a:p>
             <a:pPr lvl="3"/>
             <a:r>
-              <a:rPr lang="en-US" smtClean="0"/>
+              <a:rPr lang="en-US"/>
               <a:t>Fourth level</a:t>
             </a:r>
           </a:p>
           <a:p>
             <a:pPr lvl="4"/>
             <a:r>
-              <a:rPr lang="en-US" smtClean="0"/>
+              <a:rPr lang="en-US"/>
               <a:t>Fifth level</a:t>
             </a:r>
-            <a:endParaRPr lang="en-US"/>
           </a:p>
         </p:txBody>
       </p:sp>
@@ -3889,7 +3699,7 @@
           <a:p>
             <a:pPr lvl="0"/>
             <a:r>
-              <a:rPr lang="en-US" smtClean="0"/>
+              <a:rPr lang="en-US"/>
               <a:t>Click to edit Master text styles</a:t>
             </a:r>
           </a:p>
@@ -3912,7 +3722,7 @@
           <a:p>
             <a:fld id="{5BCAD085-E8A6-8845-BD4E-CB4CCA059FC4}" type="datetimeFigureOut">
               <a:rPr lang="en-US" smtClean="0"/>
-              <a:t>1/27/13</a:t>
+              <a:t>10/24/26</a:t>
             </a:fld>
             <a:endParaRPr lang="en-US"/>
           </a:p>
@@ -4015,10 +3825,9 @@
           </a:lstStyle>
           <a:p>
             <a:r>
-              <a:rPr lang="en-US" smtClean="0"/>
+              <a:rPr lang="en-US"/>
               <a:t>Click to edit Master title style</a:t>
             </a:r>
-            <a:endParaRPr lang="en-US"/>
           </a:p>
         </p:txBody>
       </p:sp>
@@ -4142,7 +3951,7 @@
           <a:p>
             <a:pPr lvl="0"/>
             <a:r>
-              <a:rPr lang="en-US" smtClean="0"/>
+              <a:rPr lang="en-US"/>
               <a:t>Click to edit Master text styles</a:t>
             </a:r>
           </a:p>
@@ -4165,7 +3974,7 @@
           <a:p>
             <a:fld id="{5BCAD085-E8A6-8845-BD4E-CB4CCA059FC4}" type="datetimeFigureOut">
               <a:rPr lang="en-US" smtClean="0"/>
-              <a:t>1/27/13</a:t>
+              <a:t>10/24/26</a:t>
             </a:fld>
             <a:endParaRPr lang="en-US"/>
           </a:p>
@@ -4274,10 +4083,9 @@
           <a:lstStyle/>
           <a:p>
             <a:r>
-              <a:rPr lang="en-US" smtClean="0"/>
+              <a:rPr lang="en-US"/>
               <a:t>Click to edit Master title style</a:t>
             </a:r>
-            <a:endParaRPr lang="en-US"/>
           </a:p>
         </p:txBody>
       </p:sp>
@@ -4308,38 +4116,37 @@
           <a:p>
             <a:pPr lvl="0"/>
             <a:r>
-              <a:rPr lang="en-US" smtClean="0"/>
+              <a:rPr lang="en-US"/>
               <a:t>Click to edit Master text styles</a:t>
             </a:r>
           </a:p>
           <a:p>
             <a:pPr lvl="1"/>
             <a:r>
-              <a:rPr lang="en-US" smtClean="0"/>
+              <a:rPr lang="en-US"/>
               <a:t>Second level</a:t>
             </a:r>
           </a:p>
           <a:p>
             <a:pPr lvl="2"/>
             <a:r>
-              <a:rPr lang="en-US" smtClean="0"/>
+              <a:rPr lang="en-US"/>
               <a:t>Third level</a:t>
             </a:r>
           </a:p>
           <a:p>
             <a:pPr lvl="3"/>
             <a:r>
-              <a:rPr lang="en-US" smtClean="0"/>
+              <a:rPr lang="en-US"/>
               <a:t>Fourth level</a:t>
             </a:r>
           </a:p>
           <a:p>
             <a:pPr lvl="4"/>
             <a:r>
-              <a:rPr lang="en-US" smtClean="0"/>
+              <a:rPr lang="en-US"/>
               <a:t>Fifth level</a:t>
             </a:r>
-            <a:endParaRPr lang="en-US"/>
           </a:p>
         </p:txBody>
       </p:sp>
@@ -4378,7 +4185,7 @@
           <a:p>
             <a:fld id="{5BCAD085-E8A6-8845-BD4E-CB4CCA059FC4}" type="datetimeFigureOut">
               <a:rPr lang="en-US" smtClean="0"/>
-              <a:t>1/27/13</a:t>
+              <a:t>10/24/26</a:t>
             </a:fld>
             <a:endParaRPr lang="en-US"/>
           </a:p>
@@ -4737,7 +4544,7 @@
 </file>
 
 <file path=ppt/slides/slide1.xml><?xml version="1.0" encoding="utf-8"?>
-<p:sld xmlns:a="http://schemas.openxmlformats.org/drawingml/2006/main" xmlns:p="http://schemas.openxmlformats.org/presentationml/2006/main" xmlns:r="http://schemas.openxmlformats.org/officeDocument/2006/relationships">
+<p:sld xmlns:a="http://schemas.openxmlformats.org/drawingml/2006/main" xmlns:r="http://schemas.openxmlformats.org/officeDocument/2006/relationships" xmlns:p="http://schemas.openxmlformats.org/presentationml/2006/main">
   <p:cSld>
     <p:spTree>
       <p:nvGrpSpPr>
@@ -4745,7 +4552,14 @@
         <p:cNvGrpSpPr/>
         <p:nvPr/>
       </p:nvGrpSpPr>
-      <p:grpSpPr/>
+      <p:grpSpPr>
+        <a:xfrm>
+          <a:off x="0" y="0"/>
+          <a:ext cx="0" cy="0"/>
+          <a:chOff x="0" y="0"/>
+          <a:chExt cx="0" cy="0"/>
+        </a:xfrm>
+      </p:grpSpPr>
       <p:sp>
         <p:nvSpPr>
           <p:cNvPr id="2" name="Rectangle 1"/>
@@ -4786,6 +4600,7 @@
           <a:lstStyle/>
           <a:p>
             <a:pPr algn="ctr"/>
+            <a:endParaRPr/>
           </a:p>
         </p:txBody>
       </p:sp>
@@ -4806,7 +4621,7 @@
           <a:noFill/>
         </p:spPr>
         <p:txBody>
-          <a:bodyPr wrap="square" anchor="ctr" lIns="45720" rIns="45720" tIns="27432" bIns="27432">
+          <a:bodyPr wrap="square" lIns="45720" tIns="27432" rIns="45720" bIns="27432" anchor="ctr">
             <a:spAutoFit/>
           </a:bodyPr>
           <a:lstStyle/>
@@ -4833,7 +4648,7 @@
         <p:spPr>
           <a:xfrm>
             <a:off x="548640" y="2834640"/>
-            <a:ext cx="11094415" cy="548640"/>
+            <a:ext cx="11094415" cy="332399"/>
           </a:xfrm>
           <a:prstGeom prst="rect">
             <a:avLst/>
@@ -4841,20 +4656,20 @@
           <a:noFill/>
         </p:spPr>
         <p:txBody>
-          <a:bodyPr wrap="square" anchor="t" lIns="45720" rIns="45720" tIns="27432" bIns="27432">
+          <a:bodyPr wrap="square" lIns="45720" tIns="27432" rIns="45720" bIns="27432" anchor="t">
             <a:spAutoFit/>
           </a:bodyPr>
           <a:lstStyle/>
           <a:p>
             <a:pPr algn="l"/>
             <a:r>
-              <a:rPr sz="1800" b="0" i="0">
+              <a:rPr sz="1800" b="0" i="0" dirty="0">
                 <a:solidFill>
                   <a:srgbClr val="C9D6EE"/>
                 </a:solidFill>
                 <a:latin typeface="Calibri"/>
               </a:rPr>
-              <a:t>Relatório parcial · RP2 · 2026</a:t>
+              <a:t>RP2 · 2026</a:t>
             </a:r>
           </a:p>
         </p:txBody>
@@ -4876,14 +4691,14 @@
           <a:noFill/>
         </p:spPr>
         <p:txBody>
-          <a:bodyPr wrap="square" anchor="t" lIns="45720" rIns="45720" tIns="27432" bIns="27432">
+          <a:bodyPr wrap="square" lIns="45720" tIns="27432" rIns="45720" bIns="27432" anchor="t">
             <a:spAutoFit/>
           </a:bodyPr>
           <a:lstStyle/>
           <a:p>
             <a:pPr algn="l"/>
             <a:r>
-              <a:rPr sz="2200" b="1" i="0">
+              <a:rPr sz="2200" b="1" i="0" dirty="0">
                 <a:solidFill>
                   <a:srgbClr val="1A1A1A"/>
                 </a:solidFill>
@@ -4903,7 +4718,7 @@
         <p:spPr>
           <a:xfrm>
             <a:off x="548640" y="4754880"/>
-            <a:ext cx="11094415" cy="457200"/>
+            <a:ext cx="11094415" cy="301621"/>
           </a:xfrm>
           <a:prstGeom prst="rect">
             <a:avLst/>
@@ -4911,20 +4726,92 @@
           <a:noFill/>
         </p:spPr>
         <p:txBody>
-          <a:bodyPr wrap="square" anchor="t" lIns="45720" rIns="45720" tIns="27432" bIns="27432">
+          <a:bodyPr wrap="square" lIns="45720" tIns="27432" rIns="45720" bIns="27432" anchor="t">
             <a:spAutoFit/>
           </a:bodyPr>
           <a:lstStyle/>
           <a:p>
             <a:pPr algn="l"/>
             <a:r>
-              <a:rPr sz="1600" b="0" i="0">
+              <a:rPr sz="1600" b="0" i="0" dirty="0">
                 <a:solidFill>
                   <a:srgbClr val="595959"/>
                 </a:solidFill>
                 <a:latin typeface="Calibri"/>
               </a:rPr>
-              <a:t>Escola de Artes, Ciências e Humanidades – Universidade de São Paulo (EACH-USP)</a:t>
+              <a:t>Escola de Artes, </a:t>
+            </a:r>
+            <a:r>
+              <a:rPr sz="1600" b="0" i="0" dirty="0" err="1">
+                <a:solidFill>
+                  <a:srgbClr val="595959"/>
+                </a:solidFill>
+                <a:latin typeface="Calibri"/>
+              </a:rPr>
+              <a:t>Ciências</a:t>
+            </a:r>
+            <a:r>
+              <a:rPr sz="1600" b="0" i="0" dirty="0">
+                <a:solidFill>
+                  <a:srgbClr val="595959"/>
+                </a:solidFill>
+                <a:latin typeface="Calibri"/>
+              </a:rPr>
+              <a:t> e </a:t>
+            </a:r>
+            <a:r>
+              <a:rPr sz="1600" b="0" i="0" dirty="0" err="1">
+                <a:solidFill>
+                  <a:srgbClr val="595959"/>
+                </a:solidFill>
+                <a:latin typeface="Calibri"/>
+              </a:rPr>
+              <a:t>Humanidades</a:t>
+            </a:r>
+            <a:r>
+              <a:rPr sz="1600" b="0" i="0" dirty="0">
+                <a:solidFill>
+                  <a:srgbClr val="595959"/>
+                </a:solidFill>
+                <a:latin typeface="Calibri"/>
+              </a:rPr>
+              <a:t> </a:t>
+            </a:r>
+            <a:r>
+              <a:rPr lang="pt-BR" sz="1600" b="0" i="0" dirty="0">
+                <a:solidFill>
+                  <a:srgbClr val="595959"/>
+                </a:solidFill>
+                <a:latin typeface="Calibri"/>
+              </a:rPr>
+              <a:t>-</a:t>
+            </a:r>
+            <a:r>
+              <a:rPr sz="1600" b="0" i="0" dirty="0">
+                <a:solidFill>
+                  <a:srgbClr val="595959"/>
+                </a:solidFill>
+                <a:latin typeface="Calibri"/>
+              </a:rPr>
+              <a:t> </a:t>
+            </a:r>
+            <a:r>
+              <a:rPr sz="1600" b="0" i="0" dirty="0" err="1">
+                <a:solidFill>
+                  <a:srgbClr val="595959"/>
+                </a:solidFill>
+                <a:latin typeface="Calibri"/>
+              </a:rPr>
+              <a:t>Universidade</a:t>
+            </a:r>
+            <a:r>
+              <a:rPr sz="1600" b="0" i="0" dirty="0">
+                <a:solidFill>
+                  <a:srgbClr val="595959"/>
+                </a:solidFill>
+                <a:latin typeface="Calibri"/>
+              </a:rPr>
+              <a:t> de São Paulo (EACH-USP)</a:t>
             </a:r>
           </a:p>
         </p:txBody>
@@ -4946,7 +4833,7 @@
           <a:noFill/>
         </p:spPr>
         <p:txBody>
-          <a:bodyPr wrap="square" anchor="t" lIns="45720" rIns="45720" tIns="27432" bIns="27432">
+          <a:bodyPr wrap="square" lIns="45720" tIns="27432" rIns="45720" bIns="27432" anchor="t">
             <a:spAutoFit/>
           </a:bodyPr>
           <a:lstStyle/>
@@ -4973,7 +4860,7 @@
 </file>
 
 <file path=ppt/slides/slide10.xml><?xml version="1.0" encoding="utf-8"?>
-<p:sld xmlns:a="http://schemas.openxmlformats.org/drawingml/2006/main" xmlns:p="http://schemas.openxmlformats.org/presentationml/2006/main" xmlns:r="http://schemas.openxmlformats.org/officeDocument/2006/relationships">
+<p:sld xmlns:a="http://schemas.openxmlformats.org/drawingml/2006/main" xmlns:r="http://schemas.openxmlformats.org/officeDocument/2006/relationships" xmlns:p="http://schemas.openxmlformats.org/presentationml/2006/main">
   <p:cSld>
     <p:spTree>
       <p:nvGrpSpPr>
@@ -4981,7 +4868,14 @@
         <p:cNvGrpSpPr/>
         <p:nvPr/>
       </p:nvGrpSpPr>
-      <p:grpSpPr/>
+      <p:grpSpPr>
+        <a:xfrm>
+          <a:off x="0" y="0"/>
+          <a:ext cx="0" cy="0"/>
+          <a:chOff x="0" y="0"/>
+          <a:chExt cx="0" cy="0"/>
+        </a:xfrm>
+      </p:grpSpPr>
       <p:sp>
         <p:nvSpPr>
           <p:cNvPr id="2" name="Rectangle 1"/>
@@ -5022,6 +4916,7 @@
           <a:lstStyle/>
           <a:p>
             <a:pPr algn="ctr"/>
+            <a:endParaRPr/>
           </a:p>
         </p:txBody>
       </p:sp>
@@ -5042,7 +4937,7 @@
           <a:noFill/>
         </p:spPr>
         <p:txBody>
-          <a:bodyPr wrap="square" anchor="ctr" lIns="45720" rIns="45720" tIns="27432" bIns="27432">
+          <a:bodyPr wrap="square" lIns="45720" tIns="27432" rIns="45720" bIns="27432" anchor="ctr">
             <a:spAutoFit/>
           </a:bodyPr>
           <a:lstStyle/>
@@ -5077,7 +4972,7 @@
           <a:noFill/>
         </p:spPr>
         <p:txBody>
-          <a:bodyPr wrap="square" anchor="t" lIns="45720" rIns="45720" tIns="27432" bIns="27432">
+          <a:bodyPr wrap="square" lIns="45720" tIns="27432" rIns="45720" bIns="27432" anchor="t">
             <a:spAutoFit/>
           </a:bodyPr>
           <a:lstStyle/>
@@ -5112,7 +5007,7 @@
           <a:noFill/>
         </p:spPr>
         <p:txBody>
-          <a:bodyPr wrap="square" anchor="t" lIns="45720" rIns="45720" tIns="27432" bIns="27432">
+          <a:bodyPr wrap="square" lIns="45720" tIns="27432" rIns="45720" bIns="27432" anchor="t">
             <a:spAutoFit/>
           </a:bodyPr>
           <a:lstStyle/>
@@ -5147,7 +5042,7 @@
           <a:noFill/>
         </p:spPr>
         <p:txBody>
-          <a:bodyPr wrap="square" anchor="t" lIns="45720" rIns="45720" tIns="27432" bIns="27432">
+          <a:bodyPr wrap="square" lIns="45720" tIns="27432" rIns="45720" bIns="27432" anchor="t">
             <a:spAutoFit/>
           </a:bodyPr>
           <a:lstStyle/>
@@ -5174,7 +5069,7 @@
           <p:nvPr/>
         </p:nvPicPr>
         <p:blipFill>
-          <a:blip r:embed="rId2"/>
+          <a:blip r:embed="rId3"/>
           <a:stretch>
             <a:fillRect/>
           </a:stretch>
@@ -5354,7 +5249,7 @@
           <a:noFill/>
         </p:spPr>
         <p:txBody>
-          <a:bodyPr wrap="square" anchor="t" lIns="45720" rIns="45720" tIns="27432" bIns="27432">
+          <a:bodyPr wrap="square" lIns="45720" tIns="27432" rIns="45720" bIns="27432" anchor="t">
             <a:spAutoFit/>
           </a:bodyPr>
           <a:lstStyle/>
@@ -5381,7 +5276,7 @@
 </file>
 
 <file path=ppt/slides/slide11.xml><?xml version="1.0" encoding="utf-8"?>
-<p:sld xmlns:a="http://schemas.openxmlformats.org/drawingml/2006/main" xmlns:p="http://schemas.openxmlformats.org/presentationml/2006/main" xmlns:r="http://schemas.openxmlformats.org/officeDocument/2006/relationships">
+<p:sld xmlns:a="http://schemas.openxmlformats.org/drawingml/2006/main" xmlns:r="http://schemas.openxmlformats.org/officeDocument/2006/relationships" xmlns:p="http://schemas.openxmlformats.org/presentationml/2006/main">
   <p:cSld>
     <p:spTree>
       <p:nvGrpSpPr>
@@ -5389,7 +5284,14 @@
         <p:cNvGrpSpPr/>
         <p:nvPr/>
       </p:nvGrpSpPr>
-      <p:grpSpPr/>
+      <p:grpSpPr>
+        <a:xfrm>
+          <a:off x="0" y="0"/>
+          <a:ext cx="0" cy="0"/>
+          <a:chOff x="0" y="0"/>
+          <a:chExt cx="0" cy="0"/>
+        </a:xfrm>
+      </p:grpSpPr>
       <p:sp>
         <p:nvSpPr>
           <p:cNvPr id="2" name="Rectangle 1"/>
@@ -5430,6 +5332,7 @@
           <a:lstStyle/>
           <a:p>
             <a:pPr algn="ctr"/>
+            <a:endParaRPr/>
           </a:p>
         </p:txBody>
       </p:sp>
@@ -5450,7 +5353,7 @@
           <a:noFill/>
         </p:spPr>
         <p:txBody>
-          <a:bodyPr wrap="square" anchor="ctr" lIns="45720" rIns="45720" tIns="27432" bIns="27432">
+          <a:bodyPr wrap="square" lIns="45720" tIns="27432" rIns="45720" bIns="27432" anchor="ctr">
             <a:spAutoFit/>
           </a:bodyPr>
           <a:lstStyle/>
@@ -5485,7 +5388,7 @@
           <a:noFill/>
         </p:spPr>
         <p:txBody>
-          <a:bodyPr wrap="square" anchor="t" lIns="45720" rIns="45720" tIns="27432" bIns="27432">
+          <a:bodyPr wrap="square" lIns="45720" tIns="27432" rIns="45720" bIns="27432" anchor="t">
             <a:spAutoFit/>
           </a:bodyPr>
           <a:lstStyle/>
@@ -5520,7 +5423,7 @@
           <a:noFill/>
         </p:spPr>
         <p:txBody>
-          <a:bodyPr wrap="square" anchor="t" lIns="45720" rIns="45720" tIns="27432" bIns="27432">
+          <a:bodyPr wrap="square" lIns="45720" tIns="27432" rIns="45720" bIns="27432" anchor="t">
             <a:spAutoFit/>
           </a:bodyPr>
           <a:lstStyle/>
@@ -5555,7 +5458,7 @@
           <a:noFill/>
         </p:spPr>
         <p:txBody>
-          <a:bodyPr wrap="square" anchor="t" lIns="45720" rIns="45720" tIns="27432" bIns="27432">
+          <a:bodyPr wrap="square" lIns="45720" tIns="27432" rIns="45720" bIns="27432" anchor="t">
             <a:spAutoFit/>
           </a:bodyPr>
           <a:lstStyle/>
@@ -5582,7 +5485,7 @@
           <p:nvPr/>
         </p:nvPicPr>
         <p:blipFill>
-          <a:blip r:embed="rId2"/>
+          <a:blip r:embed="rId3"/>
           <a:stretch>
             <a:fillRect/>
           </a:stretch>
@@ -5764,7 +5667,7 @@
           <a:noFill/>
         </p:spPr>
         <p:txBody>
-          <a:bodyPr wrap="square" anchor="t" lIns="45720" rIns="45720" tIns="27432" bIns="27432">
+          <a:bodyPr wrap="square" lIns="45720" tIns="27432" rIns="45720" bIns="27432" anchor="t">
             <a:spAutoFit/>
           </a:bodyPr>
           <a:lstStyle/>
@@ -5791,7 +5694,7 @@
 </file>
 
 <file path=ppt/slides/slide12.xml><?xml version="1.0" encoding="utf-8"?>
-<p:sld xmlns:a="http://schemas.openxmlformats.org/drawingml/2006/main" xmlns:p="http://schemas.openxmlformats.org/presentationml/2006/main" xmlns:r="http://schemas.openxmlformats.org/officeDocument/2006/relationships">
+<p:sld xmlns:a="http://schemas.openxmlformats.org/drawingml/2006/main" xmlns:r="http://schemas.openxmlformats.org/officeDocument/2006/relationships" xmlns:p="http://schemas.openxmlformats.org/presentationml/2006/main">
   <p:cSld>
     <p:spTree>
       <p:nvGrpSpPr>
@@ -5799,7 +5702,14 @@
         <p:cNvGrpSpPr/>
         <p:nvPr/>
       </p:nvGrpSpPr>
-      <p:grpSpPr/>
+      <p:grpSpPr>
+        <a:xfrm>
+          <a:off x="0" y="0"/>
+          <a:ext cx="0" cy="0"/>
+          <a:chOff x="0" y="0"/>
+          <a:chExt cx="0" cy="0"/>
+        </a:xfrm>
+      </p:grpSpPr>
       <p:sp>
         <p:nvSpPr>
           <p:cNvPr id="2" name="Rectangle 1"/>
@@ -5840,6 +5750,7 @@
           <a:lstStyle/>
           <a:p>
             <a:pPr algn="ctr"/>
+            <a:endParaRPr/>
           </a:p>
         </p:txBody>
       </p:sp>
@@ -5860,7 +5771,7 @@
           <a:noFill/>
         </p:spPr>
         <p:txBody>
-          <a:bodyPr wrap="square" anchor="ctr" lIns="45720" rIns="45720" tIns="27432" bIns="27432">
+          <a:bodyPr wrap="square" lIns="45720" tIns="27432" rIns="45720" bIns="27432" anchor="ctr">
             <a:spAutoFit/>
           </a:bodyPr>
           <a:lstStyle/>
@@ -5895,7 +5806,7 @@
           <a:noFill/>
         </p:spPr>
         <p:txBody>
-          <a:bodyPr wrap="square" anchor="t" lIns="45720" rIns="45720" tIns="27432" bIns="27432">
+          <a:bodyPr wrap="square" lIns="45720" tIns="27432" rIns="45720" bIns="27432" anchor="t">
             <a:spAutoFit/>
           </a:bodyPr>
           <a:lstStyle/>
@@ -5930,7 +5841,7 @@
           <a:noFill/>
         </p:spPr>
         <p:txBody>
-          <a:bodyPr wrap="square" anchor="t" lIns="45720" rIns="45720" tIns="27432" bIns="27432">
+          <a:bodyPr wrap="square" lIns="45720" tIns="27432" rIns="45720" bIns="27432" anchor="t">
             <a:spAutoFit/>
           </a:bodyPr>
           <a:lstStyle/>
@@ -5965,7 +5876,7 @@
           <a:noFill/>
         </p:spPr>
         <p:txBody>
-          <a:bodyPr wrap="square" anchor="t" lIns="45720" rIns="45720" tIns="27432" bIns="27432">
+          <a:bodyPr wrap="square" lIns="45720" tIns="27432" rIns="45720" bIns="27432" anchor="t">
             <a:spAutoFit/>
           </a:bodyPr>
           <a:lstStyle/>
@@ -6002,14 +5913,62 @@
                 <a:tableStyleId>{5C22544A-7EE6-4342-B048-85BDC9FD1C3A}</a:tableStyleId>
               </a:tblPr>
               <a:tblGrid>
-                <a:gridCol w="2199754"/>
-                <a:gridCol w="1912830"/>
-                <a:gridCol w="1721547"/>
-                <a:gridCol w="1052056"/>
-                <a:gridCol w="1052056"/>
-                <a:gridCol w="1052056"/>
-                <a:gridCol w="1052056"/>
-                <a:gridCol w="1052056"/>
+                <a:gridCol w="2199754">
+                  <a:extLst>
+                    <a:ext uri="{9D8B030D-6E8A-4147-A177-3AD203B41FA5}">
+                      <a16:colId xmlns:a16="http://schemas.microsoft.com/office/drawing/2014/main" val="20000"/>
+                    </a:ext>
+                  </a:extLst>
+                </a:gridCol>
+                <a:gridCol w="1912830">
+                  <a:extLst>
+                    <a:ext uri="{9D8B030D-6E8A-4147-A177-3AD203B41FA5}">
+                      <a16:colId xmlns:a16="http://schemas.microsoft.com/office/drawing/2014/main" val="20001"/>
+                    </a:ext>
+                  </a:extLst>
+                </a:gridCol>
+                <a:gridCol w="1721547">
+                  <a:extLst>
+                    <a:ext uri="{9D8B030D-6E8A-4147-A177-3AD203B41FA5}">
+                      <a16:colId xmlns:a16="http://schemas.microsoft.com/office/drawing/2014/main" val="20002"/>
+                    </a:ext>
+                  </a:extLst>
+                </a:gridCol>
+                <a:gridCol w="1052056">
+                  <a:extLst>
+                    <a:ext uri="{9D8B030D-6E8A-4147-A177-3AD203B41FA5}">
+                      <a16:colId xmlns:a16="http://schemas.microsoft.com/office/drawing/2014/main" val="20003"/>
+                    </a:ext>
+                  </a:extLst>
+                </a:gridCol>
+                <a:gridCol w="1052056">
+                  <a:extLst>
+                    <a:ext uri="{9D8B030D-6E8A-4147-A177-3AD203B41FA5}">
+                      <a16:colId xmlns:a16="http://schemas.microsoft.com/office/drawing/2014/main" val="20004"/>
+                    </a:ext>
+                  </a:extLst>
+                </a:gridCol>
+                <a:gridCol w="1052056">
+                  <a:extLst>
+                    <a:ext uri="{9D8B030D-6E8A-4147-A177-3AD203B41FA5}">
+                      <a16:colId xmlns:a16="http://schemas.microsoft.com/office/drawing/2014/main" val="20005"/>
+                    </a:ext>
+                  </a:extLst>
+                </a:gridCol>
+                <a:gridCol w="1052056">
+                  <a:extLst>
+                    <a:ext uri="{9D8B030D-6E8A-4147-A177-3AD203B41FA5}">
+                      <a16:colId xmlns:a16="http://schemas.microsoft.com/office/drawing/2014/main" val="20006"/>
+                    </a:ext>
+                  </a:extLst>
+                </a:gridCol>
+                <a:gridCol w="1052056">
+                  <a:extLst>
+                    <a:ext uri="{9D8B030D-6E8A-4147-A177-3AD203B41FA5}">
+                      <a16:colId xmlns:a16="http://schemas.microsoft.com/office/drawing/2014/main" val="20007"/>
+                    </a:ext>
+                  </a:extLst>
+                </a:gridCol>
               </a:tblGrid>
               <a:tr h="329184">
                 <a:tc>
@@ -6196,6 +6155,11 @@
                     </a:solidFill>
                   </a:tcPr>
                 </a:tc>
+                <a:extLst>
+                  <a:ext uri="{0D108BD9-81ED-4DB2-BD59-A6C34878D82A}">
+                    <a16:rowId xmlns:a16="http://schemas.microsoft.com/office/drawing/2014/main" val="10000"/>
+                  </a:ext>
+                </a:extLst>
               </a:tr>
               <a:tr h="329184">
                 <a:tc>
@@ -6382,6 +6346,11 @@
                     </a:solidFill>
                   </a:tcPr>
                 </a:tc>
+                <a:extLst>
+                  <a:ext uri="{0D108BD9-81ED-4DB2-BD59-A6C34878D82A}">
+                    <a16:rowId xmlns:a16="http://schemas.microsoft.com/office/drawing/2014/main" val="10001"/>
+                  </a:ext>
+                </a:extLst>
               </a:tr>
               <a:tr h="329184">
                 <a:tc>
@@ -6390,6 +6359,21 @@
                     <a:lstStyle/>
                     <a:p>
                       <a:pPr algn="l"/>
+                      <a:endParaRPr/>
+                    </a:p>
+                  </a:txBody>
+                  <a:tcPr marL="54864" marR="54864" marT="18288" marB="18288" anchor="ctr">
+                    <a:solidFill>
+                      <a:srgbClr val="F2F2F2"/>
+                    </a:solidFill>
+                  </a:tcPr>
+                </a:tc>
+                <a:tc>
+                  <a:txBody>
+                    <a:bodyPr/>
+                    <a:lstStyle/>
+                    <a:p>
+                      <a:pPr algn="ctr"/>
                       <a:r>
                         <a:rPr sz="1300" b="0" i="0">
                           <a:solidFill>
@@ -6397,7 +6381,7 @@
                           </a:solidFill>
                           <a:latin typeface="Calibri"/>
                         </a:rPr>
-                        <a:t/>
+                        <a:t>Pesos de classe</a:t>
                       </a:r>
                     </a:p>
                   </a:txBody>
@@ -6420,7 +6404,7 @@
                           </a:solidFill>
                           <a:latin typeface="Calibri"/>
                         </a:rPr>
-                        <a:t>Pesos de classe</a:t>
+                        <a:t>0,483 ± 0,013</a:t>
                       </a:r>
                     </a:p>
                   </a:txBody>
@@ -6443,7 +6427,7 @@
                           </a:solidFill>
                           <a:latin typeface="Calibri"/>
                         </a:rPr>
-                        <a:t>0,483 ± 0,013</a:t>
+                        <a:t>71,2</a:t>
                       </a:r>
                     </a:p>
                   </a:txBody>
@@ -6466,7 +6450,7 @@
                           </a:solidFill>
                           <a:latin typeface="Calibri"/>
                         </a:rPr>
-                        <a:t>71,2</a:t>
+                        <a:t>17,7</a:t>
                       </a:r>
                     </a:p>
                   </a:txBody>
@@ -6489,7 +6473,7 @@
                           </a:solidFill>
                           <a:latin typeface="Calibri"/>
                         </a:rPr>
-                        <a:t>17,7</a:t>
+                        <a:t>48,1</a:t>
                       </a:r>
                     </a:p>
                   </a:txBody>
@@ -6512,7 +6496,7 @@
                           </a:solidFill>
                           <a:latin typeface="Calibri"/>
                         </a:rPr>
-                        <a:t>48,1</a:t>
+                        <a:t>14,9</a:t>
                       </a:r>
                     </a:p>
                   </a:txBody>
@@ -6535,7 +6519,7 @@
                           </a:solidFill>
                           <a:latin typeface="Calibri"/>
                         </a:rPr>
-                        <a:t>14,9</a:t>
+                        <a:t>0,931</a:t>
                       </a:r>
                     </a:p>
                   </a:txBody>
@@ -6545,29 +6529,11 @@
                     </a:solidFill>
                   </a:tcPr>
                 </a:tc>
-                <a:tc>
-                  <a:txBody>
-                    <a:bodyPr/>
-                    <a:lstStyle/>
-                    <a:p>
-                      <a:pPr algn="ctr"/>
-                      <a:r>
-                        <a:rPr sz="1300" b="0" i="0">
-                          <a:solidFill>
-                            <a:srgbClr val="1A1A1A"/>
-                          </a:solidFill>
-                          <a:latin typeface="Calibri"/>
-                        </a:rPr>
-                        <a:t>0,931</a:t>
-                      </a:r>
-                    </a:p>
-                  </a:txBody>
-                  <a:tcPr marL="54864" marR="54864" marT="18288" marB="18288" anchor="ctr">
-                    <a:solidFill>
-                      <a:srgbClr val="F2F2F2"/>
-                    </a:solidFill>
-                  </a:tcPr>
-                </a:tc>
+                <a:extLst>
+                  <a:ext uri="{0D108BD9-81ED-4DB2-BD59-A6C34878D82A}">
+                    <a16:rowId xmlns:a16="http://schemas.microsoft.com/office/drawing/2014/main" val="10002"/>
+                  </a:ext>
+                </a:extLst>
               </a:tr>
               <a:tr h="329184">
                 <a:tc>
@@ -6576,6 +6542,21 @@
                     <a:lstStyle/>
                     <a:p>
                       <a:pPr algn="l"/>
+                      <a:endParaRPr/>
+                    </a:p>
+                  </a:txBody>
+                  <a:tcPr marL="54864" marR="54864" marT="18288" marB="18288" anchor="ctr">
+                    <a:solidFill>
+                      <a:srgbClr val="FFFFFF"/>
+                    </a:solidFill>
+                  </a:tcPr>
+                </a:tc>
+                <a:tc>
+                  <a:txBody>
+                    <a:bodyPr/>
+                    <a:lstStyle/>
+                    <a:p>
+                      <a:pPr algn="ctr"/>
                       <a:r>
                         <a:rPr sz="1300" b="0" i="0">
                           <a:solidFill>
@@ -6583,7 +6564,7 @@
                           </a:solidFill>
                           <a:latin typeface="Calibri"/>
                         </a:rPr>
-                        <a:t/>
+                        <a:t>SMOTENC</a:t>
                       </a:r>
                     </a:p>
                   </a:txBody>
@@ -6606,7 +6587,7 @@
                           </a:solidFill>
                           <a:latin typeface="Calibri"/>
                         </a:rPr>
-                        <a:t>SMOTENC</a:t>
+                        <a:t>0,513 ± 0,022</a:t>
                       </a:r>
                     </a:p>
                   </a:txBody>
@@ -6629,7 +6610,7 @@
                           </a:solidFill>
                           <a:latin typeface="Calibri"/>
                         </a:rPr>
-                        <a:t>0,513 ± 0,022</a:t>
+                        <a:t>64,4</a:t>
                       </a:r>
                     </a:p>
                   </a:txBody>
@@ -6652,7 +6633,7 @@
                           </a:solidFill>
                           <a:latin typeface="Calibri"/>
                         </a:rPr>
-                        <a:t>64,4</a:t>
+                        <a:t>22,8</a:t>
                       </a:r>
                     </a:p>
                   </a:txBody>
@@ -6675,7 +6656,7 @@
                           </a:solidFill>
                           <a:latin typeface="Calibri"/>
                         </a:rPr>
-                        <a:t>22,8</a:t>
+                        <a:t>49,4</a:t>
                       </a:r>
                     </a:p>
                   </a:txBody>
@@ -6698,7 +6679,7 @@
                           </a:solidFill>
                           <a:latin typeface="Calibri"/>
                         </a:rPr>
-                        <a:t>49,4</a:t>
+                        <a:t>16,2</a:t>
                       </a:r>
                     </a:p>
                   </a:txBody>
@@ -6721,7 +6702,7 @@
                           </a:solidFill>
                           <a:latin typeface="Calibri"/>
                         </a:rPr>
-                        <a:t>16,2</a:t>
+                        <a:t>0,931</a:t>
                       </a:r>
                     </a:p>
                   </a:txBody>
@@ -6731,29 +6712,11 @@
                     </a:solidFill>
                   </a:tcPr>
                 </a:tc>
-                <a:tc>
-                  <a:txBody>
-                    <a:bodyPr/>
-                    <a:lstStyle/>
-                    <a:p>
-                      <a:pPr algn="ctr"/>
-                      <a:r>
-                        <a:rPr sz="1300" b="0" i="0">
-                          <a:solidFill>
-                            <a:srgbClr val="1A1A1A"/>
-                          </a:solidFill>
-                          <a:latin typeface="Calibri"/>
-                        </a:rPr>
-                        <a:t>0,931</a:t>
-                      </a:r>
-                    </a:p>
-                  </a:txBody>
-                  <a:tcPr marL="54864" marR="54864" marT="18288" marB="18288" anchor="ctr">
-                    <a:solidFill>
-                      <a:srgbClr val="FFFFFF"/>
-                    </a:solidFill>
-                  </a:tcPr>
-                </a:tc>
+                <a:extLst>
+                  <a:ext uri="{0D108BD9-81ED-4DB2-BD59-A6C34878D82A}">
+                    <a16:rowId xmlns:a16="http://schemas.microsoft.com/office/drawing/2014/main" val="10003"/>
+                  </a:ext>
+                </a:extLst>
               </a:tr>
               <a:tr h="329184">
                 <a:tc>
@@ -6762,6 +6725,21 @@
                     <a:lstStyle/>
                     <a:p>
                       <a:pPr algn="l"/>
+                      <a:endParaRPr/>
+                    </a:p>
+                  </a:txBody>
+                  <a:tcPr marL="54864" marR="54864" marT="18288" marB="18288" anchor="ctr">
+                    <a:solidFill>
+                      <a:srgbClr val="F2F2F2"/>
+                    </a:solidFill>
+                  </a:tcPr>
+                </a:tc>
+                <a:tc>
+                  <a:txBody>
+                    <a:bodyPr/>
+                    <a:lstStyle/>
+                    <a:p>
+                      <a:pPr algn="ctr"/>
                       <a:r>
                         <a:rPr sz="1300" b="0" i="0">
                           <a:solidFill>
@@ -6769,7 +6747,7 @@
                           </a:solidFill>
                           <a:latin typeface="Calibri"/>
                         </a:rPr>
-                        <a:t/>
+                        <a:t>SMOTENC + pesos</a:t>
                       </a:r>
                     </a:p>
                   </a:txBody>
@@ -6792,7 +6770,7 @@
                           </a:solidFill>
                           <a:latin typeface="Calibri"/>
                         </a:rPr>
-                        <a:t>SMOTENC + pesos</a:t>
+                        <a:t>0,513 ± 0,022</a:t>
                       </a:r>
                     </a:p>
                   </a:txBody>
@@ -6815,7 +6793,7 @@
                           </a:solidFill>
                           <a:latin typeface="Calibri"/>
                         </a:rPr>
-                        <a:t>0,513 ± 0,022</a:t>
+                        <a:t>64,4</a:t>
                       </a:r>
                     </a:p>
                   </a:txBody>
@@ -6838,7 +6816,7 @@
                           </a:solidFill>
                           <a:latin typeface="Calibri"/>
                         </a:rPr>
-                        <a:t>64,4</a:t>
+                        <a:t>22,8</a:t>
                       </a:r>
                     </a:p>
                   </a:txBody>
@@ -6861,7 +6839,7 @@
                           </a:solidFill>
                           <a:latin typeface="Calibri"/>
                         </a:rPr>
-                        <a:t>22,8</a:t>
+                        <a:t>49,4</a:t>
                       </a:r>
                     </a:p>
                   </a:txBody>
@@ -6884,7 +6862,7 @@
                           </a:solidFill>
                           <a:latin typeface="Calibri"/>
                         </a:rPr>
-                        <a:t>49,4</a:t>
+                        <a:t>16,2</a:t>
                       </a:r>
                     </a:p>
                   </a:txBody>
@@ -6907,7 +6885,7 @@
                           </a:solidFill>
                           <a:latin typeface="Calibri"/>
                         </a:rPr>
-                        <a:t>16,2</a:t>
+                        <a:t>0,931</a:t>
                       </a:r>
                     </a:p>
                   </a:txBody>
@@ -6917,29 +6895,11 @@
                     </a:solidFill>
                   </a:tcPr>
                 </a:tc>
-                <a:tc>
-                  <a:txBody>
-                    <a:bodyPr/>
-                    <a:lstStyle/>
-                    <a:p>
-                      <a:pPr algn="ctr"/>
-                      <a:r>
-                        <a:rPr sz="1300" b="0" i="0">
-                          <a:solidFill>
-                            <a:srgbClr val="1A1A1A"/>
-                          </a:solidFill>
-                          <a:latin typeface="Calibri"/>
-                        </a:rPr>
-                        <a:t>0,931</a:t>
-                      </a:r>
-                    </a:p>
-                  </a:txBody>
-                  <a:tcPr marL="54864" marR="54864" marT="18288" marB="18288" anchor="ctr">
-                    <a:solidFill>
-                      <a:srgbClr val="F2F2F2"/>
-                    </a:solidFill>
-                  </a:tcPr>
-                </a:tc>
+                <a:extLst>
+                  <a:ext uri="{0D108BD9-81ED-4DB2-BD59-A6C34878D82A}">
+                    <a16:rowId xmlns:a16="http://schemas.microsoft.com/office/drawing/2014/main" val="10004"/>
+                  </a:ext>
+                </a:extLst>
               </a:tr>
               <a:tr h="329184">
                 <a:tc>
@@ -7126,6 +7086,11 @@
                     </a:solidFill>
                   </a:tcPr>
                 </a:tc>
+                <a:extLst>
+                  <a:ext uri="{0D108BD9-81ED-4DB2-BD59-A6C34878D82A}">
+                    <a16:rowId xmlns:a16="http://schemas.microsoft.com/office/drawing/2014/main" val="10005"/>
+                  </a:ext>
+                </a:extLst>
               </a:tr>
               <a:tr h="329184">
                 <a:tc>
@@ -7134,6 +7099,21 @@
                     <a:lstStyle/>
                     <a:p>
                       <a:pPr algn="l"/>
+                      <a:endParaRPr/>
+                    </a:p>
+                  </a:txBody>
+                  <a:tcPr marL="54864" marR="54864" marT="18288" marB="18288" anchor="ctr">
+                    <a:solidFill>
+                      <a:srgbClr val="F2F2F2"/>
+                    </a:solidFill>
+                  </a:tcPr>
+                </a:tc>
+                <a:tc>
+                  <a:txBody>
+                    <a:bodyPr/>
+                    <a:lstStyle/>
+                    <a:p>
+                      <a:pPr algn="ctr"/>
                       <a:r>
                         <a:rPr sz="1300" b="0" i="0">
                           <a:solidFill>
@@ -7141,7 +7121,7 @@
                           </a:solidFill>
                           <a:latin typeface="Calibri"/>
                         </a:rPr>
-                        <a:t/>
+                        <a:t>Pesos de classe</a:t>
                       </a:r>
                     </a:p>
                   </a:txBody>
@@ -7164,7 +7144,7 @@
                           </a:solidFill>
                           <a:latin typeface="Calibri"/>
                         </a:rPr>
-                        <a:t>Pesos de classe</a:t>
+                        <a:t>0,622 ± 0,020</a:t>
                       </a:r>
                     </a:p>
                   </a:txBody>
@@ -7187,7 +7167,7 @@
                           </a:solidFill>
                           <a:latin typeface="Calibri"/>
                         </a:rPr>
-                        <a:t>0,622 ± 0,020</a:t>
+                        <a:t>63,0</a:t>
                       </a:r>
                     </a:p>
                   </a:txBody>
@@ -7210,7 +7190,7 @@
                           </a:solidFill>
                           <a:latin typeface="Calibri"/>
                         </a:rPr>
-                        <a:t>63,0</a:t>
+                        <a:t>43,4</a:t>
                       </a:r>
                     </a:p>
                   </a:txBody>
@@ -7233,7 +7213,7 @@
                           </a:solidFill>
                           <a:latin typeface="Calibri"/>
                         </a:rPr>
-                        <a:t>43,4</a:t>
+                        <a:t>37,0</a:t>
                       </a:r>
                     </a:p>
                   </a:txBody>
@@ -7256,7 +7236,7 @@
                           </a:solidFill>
                           <a:latin typeface="Calibri"/>
                         </a:rPr>
-                        <a:t>37,0</a:t>
+                        <a:t>37,5</a:t>
                       </a:r>
                     </a:p>
                   </a:txBody>
@@ -7279,7 +7259,7 @@
                           </a:solidFill>
                           <a:latin typeface="Calibri"/>
                         </a:rPr>
-                        <a:t>37,5</a:t>
+                        <a:t>0,953</a:t>
                       </a:r>
                     </a:p>
                   </a:txBody>
@@ -7289,29 +7269,11 @@
                     </a:solidFill>
                   </a:tcPr>
                 </a:tc>
-                <a:tc>
-                  <a:txBody>
-                    <a:bodyPr/>
-                    <a:lstStyle/>
-                    <a:p>
-                      <a:pPr algn="ctr"/>
-                      <a:r>
-                        <a:rPr sz="1300" b="0" i="0">
-                          <a:solidFill>
-                            <a:srgbClr val="1A1A1A"/>
-                          </a:solidFill>
-                          <a:latin typeface="Calibri"/>
-                        </a:rPr>
-                        <a:t>0,953</a:t>
-                      </a:r>
-                    </a:p>
-                  </a:txBody>
-                  <a:tcPr marL="54864" marR="54864" marT="18288" marB="18288" anchor="ctr">
-                    <a:solidFill>
-                      <a:srgbClr val="F2F2F2"/>
-                    </a:solidFill>
-                  </a:tcPr>
-                </a:tc>
+                <a:extLst>
+                  <a:ext uri="{0D108BD9-81ED-4DB2-BD59-A6C34878D82A}">
+                    <a16:rowId xmlns:a16="http://schemas.microsoft.com/office/drawing/2014/main" val="10006"/>
+                  </a:ext>
+                </a:extLst>
               </a:tr>
               <a:tr h="329184">
                 <a:tc>
@@ -7320,6 +7282,21 @@
                     <a:lstStyle/>
                     <a:p>
                       <a:pPr algn="l"/>
+                      <a:endParaRPr/>
+                    </a:p>
+                  </a:txBody>
+                  <a:tcPr marL="54864" marR="54864" marT="18288" marB="18288" anchor="ctr">
+                    <a:solidFill>
+                      <a:srgbClr val="FDEBD3"/>
+                    </a:solidFill>
+                  </a:tcPr>
+                </a:tc>
+                <a:tc>
+                  <a:txBody>
+                    <a:bodyPr/>
+                    <a:lstStyle/>
+                    <a:p>
+                      <a:pPr algn="ctr"/>
                       <a:r>
                         <a:rPr sz="1300" b="0" i="0">
                           <a:solidFill>
@@ -7327,7 +7304,7 @@
                           </a:solidFill>
                           <a:latin typeface="Calibri"/>
                         </a:rPr>
-                        <a:t/>
+                        <a:t>SMOTENC†</a:t>
                       </a:r>
                     </a:p>
                   </a:txBody>
@@ -7350,7 +7327,7 @@
                           </a:solidFill>
                           <a:latin typeface="Calibri"/>
                         </a:rPr>
-                        <a:t>SMOTENC†</a:t>
+                        <a:t>0,623 ± 0,009</a:t>
                       </a:r>
                     </a:p>
                   </a:txBody>
@@ -7373,7 +7350,7 @@
                           </a:solidFill>
                           <a:latin typeface="Calibri"/>
                         </a:rPr>
-                        <a:t>0,623 ± 0,009</a:t>
+                        <a:t>60,3</a:t>
                       </a:r>
                     </a:p>
                   </a:txBody>
@@ -7396,7 +7373,7 @@
                           </a:solidFill>
                           <a:latin typeface="Calibri"/>
                         </a:rPr>
-                        <a:t>60,3</a:t>
+                        <a:t>45,8</a:t>
                       </a:r>
                     </a:p>
                   </a:txBody>
@@ -7419,7 +7396,7 @@
                           </a:solidFill>
                           <a:latin typeface="Calibri"/>
                         </a:rPr>
-                        <a:t>45,8</a:t>
+                        <a:t>43,2</a:t>
                       </a:r>
                     </a:p>
                   </a:txBody>
@@ -7442,7 +7419,7 @@
                           </a:solidFill>
                           <a:latin typeface="Calibri"/>
                         </a:rPr>
-                        <a:t>43,2</a:t>
+                        <a:t>33,0</a:t>
                       </a:r>
                     </a:p>
                   </a:txBody>
@@ -7465,7 +7442,7 @@
                           </a:solidFill>
                           <a:latin typeface="Calibri"/>
                         </a:rPr>
-                        <a:t>33,0</a:t>
+                        <a:t>0,945</a:t>
                       </a:r>
                     </a:p>
                   </a:txBody>
@@ -7475,29 +7452,11 @@
                     </a:solidFill>
                   </a:tcPr>
                 </a:tc>
-                <a:tc>
-                  <a:txBody>
-                    <a:bodyPr/>
-                    <a:lstStyle/>
-                    <a:p>
-                      <a:pPr algn="ctr"/>
-                      <a:r>
-                        <a:rPr sz="1300" b="0" i="0">
-                          <a:solidFill>
-                            <a:srgbClr val="1A1A1A"/>
-                          </a:solidFill>
-                          <a:latin typeface="Calibri"/>
-                        </a:rPr>
-                        <a:t>0,945</a:t>
-                      </a:r>
-                    </a:p>
-                  </a:txBody>
-                  <a:tcPr marL="54864" marR="54864" marT="18288" marB="18288" anchor="ctr">
-                    <a:solidFill>
-                      <a:srgbClr val="FDEBD3"/>
-                    </a:solidFill>
-                  </a:tcPr>
-                </a:tc>
+                <a:extLst>
+                  <a:ext uri="{0D108BD9-81ED-4DB2-BD59-A6C34878D82A}">
+                    <a16:rowId xmlns:a16="http://schemas.microsoft.com/office/drawing/2014/main" val="10007"/>
+                  </a:ext>
+                </a:extLst>
               </a:tr>
               <a:tr h="329184">
                 <a:tc>
@@ -7506,6 +7465,21 @@
                     <a:lstStyle/>
                     <a:p>
                       <a:pPr algn="l"/>
+                      <a:endParaRPr/>
+                    </a:p>
+                  </a:txBody>
+                  <a:tcPr marL="54864" marR="54864" marT="18288" marB="18288" anchor="ctr">
+                    <a:solidFill>
+                      <a:srgbClr val="F2F2F2"/>
+                    </a:solidFill>
+                  </a:tcPr>
+                </a:tc>
+                <a:tc>
+                  <a:txBody>
+                    <a:bodyPr/>
+                    <a:lstStyle/>
+                    <a:p>
+                      <a:pPr algn="ctr"/>
                       <a:r>
                         <a:rPr sz="1300" b="0" i="0">
                           <a:solidFill>
@@ -7513,7 +7487,7 @@
                           </a:solidFill>
                           <a:latin typeface="Calibri"/>
                         </a:rPr>
-                        <a:t/>
+                        <a:t>SMOTENC + pesos</a:t>
                       </a:r>
                     </a:p>
                   </a:txBody>
@@ -7536,7 +7510,7 @@
                           </a:solidFill>
                           <a:latin typeface="Calibri"/>
                         </a:rPr>
-                        <a:t>SMOTENC + pesos</a:t>
+                        <a:t>0,623 ± 0,009</a:t>
                       </a:r>
                     </a:p>
                   </a:txBody>
@@ -7559,7 +7533,7 @@
                           </a:solidFill>
                           <a:latin typeface="Calibri"/>
                         </a:rPr>
-                        <a:t>0,623 ± 0,009</a:t>
+                        <a:t>60,3</a:t>
                       </a:r>
                     </a:p>
                   </a:txBody>
@@ -7582,7 +7556,7 @@
                           </a:solidFill>
                           <a:latin typeface="Calibri"/>
                         </a:rPr>
-                        <a:t>60,3</a:t>
+                        <a:t>45,8</a:t>
                       </a:r>
                     </a:p>
                   </a:txBody>
@@ -7605,7 +7579,7 @@
                           </a:solidFill>
                           <a:latin typeface="Calibri"/>
                         </a:rPr>
-                        <a:t>45,8</a:t>
+                        <a:t>43,2</a:t>
                       </a:r>
                     </a:p>
                   </a:txBody>
@@ -7628,7 +7602,7 @@
                           </a:solidFill>
                           <a:latin typeface="Calibri"/>
                         </a:rPr>
-                        <a:t>43,2</a:t>
+                        <a:t>33,0</a:t>
                       </a:r>
                     </a:p>
                   </a:txBody>
@@ -7651,7 +7625,7 @@
                           </a:solidFill>
                           <a:latin typeface="Calibri"/>
                         </a:rPr>
-                        <a:t>33,0</a:t>
+                        <a:t>0,945</a:t>
                       </a:r>
                     </a:p>
                   </a:txBody>
@@ -7661,29 +7635,11 @@
                     </a:solidFill>
                   </a:tcPr>
                 </a:tc>
-                <a:tc>
-                  <a:txBody>
-                    <a:bodyPr/>
-                    <a:lstStyle/>
-                    <a:p>
-                      <a:pPr algn="ctr"/>
-                      <a:r>
-                        <a:rPr sz="1300" b="0" i="0">
-                          <a:solidFill>
-                            <a:srgbClr val="1A1A1A"/>
-                          </a:solidFill>
-                          <a:latin typeface="Calibri"/>
-                        </a:rPr>
-                        <a:t>0,945</a:t>
-                      </a:r>
-                    </a:p>
-                  </a:txBody>
-                  <a:tcPr marL="54864" marR="54864" marT="18288" marB="18288" anchor="ctr">
-                    <a:solidFill>
-                      <a:srgbClr val="F2F2F2"/>
-                    </a:solidFill>
-                  </a:tcPr>
-                </a:tc>
+                <a:extLst>
+                  <a:ext uri="{0D108BD9-81ED-4DB2-BD59-A6C34878D82A}">
+                    <a16:rowId xmlns:a16="http://schemas.microsoft.com/office/drawing/2014/main" val="10008"/>
+                  </a:ext>
+                </a:extLst>
               </a:tr>
             </a:tbl>
           </a:graphicData>
@@ -7831,7 +7787,7 @@
           <a:noFill/>
         </p:spPr>
         <p:txBody>
-          <a:bodyPr wrap="square" anchor="t" lIns="45720" rIns="45720" tIns="27432" bIns="27432">
+          <a:bodyPr wrap="square" lIns="45720" tIns="27432" rIns="45720" bIns="27432" anchor="t">
             <a:spAutoFit/>
           </a:bodyPr>
           <a:lstStyle/>
@@ -7858,7 +7814,7 @@
 </file>
 
 <file path=ppt/slides/slide13.xml><?xml version="1.0" encoding="utf-8"?>
-<p:sld xmlns:a="http://schemas.openxmlformats.org/drawingml/2006/main" xmlns:p="http://schemas.openxmlformats.org/presentationml/2006/main" xmlns:r="http://schemas.openxmlformats.org/officeDocument/2006/relationships">
+<p:sld xmlns:a="http://schemas.openxmlformats.org/drawingml/2006/main" xmlns:r="http://schemas.openxmlformats.org/officeDocument/2006/relationships" xmlns:p="http://schemas.openxmlformats.org/presentationml/2006/main">
   <p:cSld>
     <p:spTree>
       <p:nvGrpSpPr>
@@ -7866,7 +7822,14 @@
         <p:cNvGrpSpPr/>
         <p:nvPr/>
       </p:nvGrpSpPr>
-      <p:grpSpPr/>
+      <p:grpSpPr>
+        <a:xfrm>
+          <a:off x="0" y="0"/>
+          <a:ext cx="0" cy="0"/>
+          <a:chOff x="0" y="0"/>
+          <a:chExt cx="0" cy="0"/>
+        </a:xfrm>
+      </p:grpSpPr>
       <p:sp>
         <p:nvSpPr>
           <p:cNvPr id="2" name="Rectangle 1"/>
@@ -7907,6 +7870,7 @@
           <a:lstStyle/>
           <a:p>
             <a:pPr algn="ctr"/>
+            <a:endParaRPr/>
           </a:p>
         </p:txBody>
       </p:sp>
@@ -7927,7 +7891,7 @@
           <a:noFill/>
         </p:spPr>
         <p:txBody>
-          <a:bodyPr wrap="square" anchor="ctr" lIns="45720" rIns="45720" tIns="27432" bIns="27432">
+          <a:bodyPr wrap="square" lIns="45720" tIns="27432" rIns="45720" bIns="27432" anchor="ctr">
             <a:spAutoFit/>
           </a:bodyPr>
           <a:lstStyle/>
@@ -7962,7 +7926,7 @@
           <a:noFill/>
         </p:spPr>
         <p:txBody>
-          <a:bodyPr wrap="square" anchor="t" lIns="45720" rIns="45720" tIns="27432" bIns="27432">
+          <a:bodyPr wrap="square" lIns="45720" tIns="27432" rIns="45720" bIns="27432" anchor="t">
             <a:spAutoFit/>
           </a:bodyPr>
           <a:lstStyle/>
@@ -7997,7 +7961,7 @@
           <a:noFill/>
         </p:spPr>
         <p:txBody>
-          <a:bodyPr wrap="square" anchor="t" lIns="45720" rIns="45720" tIns="27432" bIns="27432">
+          <a:bodyPr wrap="square" lIns="45720" tIns="27432" rIns="45720" bIns="27432" anchor="t">
             <a:spAutoFit/>
           </a:bodyPr>
           <a:lstStyle/>
@@ -8032,7 +7996,7 @@
           <a:noFill/>
         </p:spPr>
         <p:txBody>
-          <a:bodyPr wrap="square" anchor="t" lIns="45720" rIns="45720" tIns="27432" bIns="27432">
+          <a:bodyPr wrap="square" lIns="45720" tIns="27432" rIns="45720" bIns="27432" anchor="t">
             <a:spAutoFit/>
           </a:bodyPr>
           <a:lstStyle/>
@@ -8069,15 +8033,69 @@
                 <a:tableStyleId>{5C22544A-7EE6-4342-B048-85BDC9FD1C3A}</a:tableStyleId>
               </a:tblPr>
               <a:tblGrid>
-                <a:gridCol w="2971718"/>
-                <a:gridCol w="990572"/>
-                <a:gridCol w="990572"/>
-                <a:gridCol w="990572"/>
-                <a:gridCol w="990572"/>
-                <a:gridCol w="990572"/>
-                <a:gridCol w="1089630"/>
-                <a:gridCol w="1089630"/>
-                <a:gridCol w="990572"/>
+                <a:gridCol w="2971718">
+                  <a:extLst>
+                    <a:ext uri="{9D8B030D-6E8A-4147-A177-3AD203B41FA5}">
+                      <a16:colId xmlns:a16="http://schemas.microsoft.com/office/drawing/2014/main" val="20000"/>
+                    </a:ext>
+                  </a:extLst>
+                </a:gridCol>
+                <a:gridCol w="990572">
+                  <a:extLst>
+                    <a:ext uri="{9D8B030D-6E8A-4147-A177-3AD203B41FA5}">
+                      <a16:colId xmlns:a16="http://schemas.microsoft.com/office/drawing/2014/main" val="20001"/>
+                    </a:ext>
+                  </a:extLst>
+                </a:gridCol>
+                <a:gridCol w="990572">
+                  <a:extLst>
+                    <a:ext uri="{9D8B030D-6E8A-4147-A177-3AD203B41FA5}">
+                      <a16:colId xmlns:a16="http://schemas.microsoft.com/office/drawing/2014/main" val="20002"/>
+                    </a:ext>
+                  </a:extLst>
+                </a:gridCol>
+                <a:gridCol w="990572">
+                  <a:extLst>
+                    <a:ext uri="{9D8B030D-6E8A-4147-A177-3AD203B41FA5}">
+                      <a16:colId xmlns:a16="http://schemas.microsoft.com/office/drawing/2014/main" val="20003"/>
+                    </a:ext>
+                  </a:extLst>
+                </a:gridCol>
+                <a:gridCol w="990572">
+                  <a:extLst>
+                    <a:ext uri="{9D8B030D-6E8A-4147-A177-3AD203B41FA5}">
+                      <a16:colId xmlns:a16="http://schemas.microsoft.com/office/drawing/2014/main" val="20004"/>
+                    </a:ext>
+                  </a:extLst>
+                </a:gridCol>
+                <a:gridCol w="990572">
+                  <a:extLst>
+                    <a:ext uri="{9D8B030D-6E8A-4147-A177-3AD203B41FA5}">
+                      <a16:colId xmlns:a16="http://schemas.microsoft.com/office/drawing/2014/main" val="20005"/>
+                    </a:ext>
+                  </a:extLst>
+                </a:gridCol>
+                <a:gridCol w="1089630">
+                  <a:extLst>
+                    <a:ext uri="{9D8B030D-6E8A-4147-A177-3AD203B41FA5}">
+                      <a16:colId xmlns:a16="http://schemas.microsoft.com/office/drawing/2014/main" val="20006"/>
+                    </a:ext>
+                  </a:extLst>
+                </a:gridCol>
+                <a:gridCol w="1089630">
+                  <a:extLst>
+                    <a:ext uri="{9D8B030D-6E8A-4147-A177-3AD203B41FA5}">
+                      <a16:colId xmlns:a16="http://schemas.microsoft.com/office/drawing/2014/main" val="20007"/>
+                    </a:ext>
+                  </a:extLst>
+                </a:gridCol>
+                <a:gridCol w="990572">
+                  <a:extLst>
+                    <a:ext uri="{9D8B030D-6E8A-4147-A177-3AD203B41FA5}">
+                      <a16:colId xmlns:a16="http://schemas.microsoft.com/office/drawing/2014/main" val="20008"/>
+                    </a:ext>
+                  </a:extLst>
+                </a:gridCol>
               </a:tblGrid>
               <a:tr h="274320">
                 <a:tc>
@@ -8287,6 +8305,11 @@
                     </a:solidFill>
                   </a:tcPr>
                 </a:tc>
+                <a:extLst>
+                  <a:ext uri="{0D108BD9-81ED-4DB2-BD59-A6C34878D82A}">
+                    <a16:rowId xmlns:a16="http://schemas.microsoft.com/office/drawing/2014/main" val="10000"/>
+                  </a:ext>
+                </a:extLst>
               </a:tr>
               <a:tr h="274320">
                 <a:tc gridSpan="9">
@@ -8318,15 +8341,7 @@
                     <a:lstStyle/>
                     <a:p>
                       <a:pPr algn="l"/>
-                      <a:r>
-                        <a:rPr sz="1200" b="0" i="0">
-                          <a:solidFill>
-                            <a:srgbClr val="1A1A1A"/>
-                          </a:solidFill>
-                          <a:latin typeface="Calibri"/>
-                        </a:rPr>
-                        <a:t/>
-                      </a:r>
+                      <a:endParaRPr/>
                     </a:p>
                   </a:txBody>
                   <a:tcPr marL="54864" marR="54864" marT="18288" marB="18288" anchor="ctr">
@@ -8341,15 +8356,7 @@
                     <a:lstStyle/>
                     <a:p>
                       <a:pPr algn="l"/>
-                      <a:r>
-                        <a:rPr sz="1200" b="0" i="0">
-                          <a:solidFill>
-                            <a:srgbClr val="1A1A1A"/>
-                          </a:solidFill>
-                          <a:latin typeface="Calibri"/>
-                        </a:rPr>
-                        <a:t/>
-                      </a:r>
+                      <a:endParaRPr/>
                     </a:p>
                   </a:txBody>
                   <a:tcPr marL="54864" marR="54864" marT="18288" marB="18288" anchor="ctr">
@@ -8364,15 +8371,7 @@
                     <a:lstStyle/>
                     <a:p>
                       <a:pPr algn="l"/>
-                      <a:r>
-                        <a:rPr sz="1200" b="0" i="0">
-                          <a:solidFill>
-                            <a:srgbClr val="1A1A1A"/>
-                          </a:solidFill>
-                          <a:latin typeface="Calibri"/>
-                        </a:rPr>
-                        <a:t/>
-                      </a:r>
+                      <a:endParaRPr/>
                     </a:p>
                   </a:txBody>
                   <a:tcPr marL="54864" marR="54864" marT="18288" marB="18288" anchor="ctr">
@@ -8387,15 +8386,7 @@
                     <a:lstStyle/>
                     <a:p>
                       <a:pPr algn="l"/>
-                      <a:r>
-                        <a:rPr sz="1200" b="0" i="0">
-                          <a:solidFill>
-                            <a:srgbClr val="1A1A1A"/>
-                          </a:solidFill>
-                          <a:latin typeface="Calibri"/>
-                        </a:rPr>
-                        <a:t/>
-                      </a:r>
+                      <a:endParaRPr/>
                     </a:p>
                   </a:txBody>
                   <a:tcPr marL="54864" marR="54864" marT="18288" marB="18288" anchor="ctr">
@@ -8410,15 +8401,7 @@
                     <a:lstStyle/>
                     <a:p>
                       <a:pPr algn="l"/>
-                      <a:r>
-                        <a:rPr sz="1200" b="0" i="0">
-                          <a:solidFill>
-                            <a:srgbClr val="1A1A1A"/>
-                          </a:solidFill>
-                          <a:latin typeface="Calibri"/>
-                        </a:rPr>
-                        <a:t/>
-                      </a:r>
+                      <a:endParaRPr/>
                     </a:p>
                   </a:txBody>
                   <a:tcPr marL="54864" marR="54864" marT="18288" marB="18288" anchor="ctr">
@@ -8433,15 +8416,7 @@
                     <a:lstStyle/>
                     <a:p>
                       <a:pPr algn="l"/>
-                      <a:r>
-                        <a:rPr sz="1200" b="0" i="0">
-                          <a:solidFill>
-                            <a:srgbClr val="1A1A1A"/>
-                          </a:solidFill>
-                          <a:latin typeface="Calibri"/>
-                        </a:rPr>
-                        <a:t/>
-                      </a:r>
+                      <a:endParaRPr/>
                     </a:p>
                   </a:txBody>
                   <a:tcPr marL="54864" marR="54864" marT="18288" marB="18288" anchor="ctr">
@@ -8456,15 +8431,7 @@
                     <a:lstStyle/>
                     <a:p>
                       <a:pPr algn="l"/>
-                      <a:r>
-                        <a:rPr sz="1200" b="0" i="0">
-                          <a:solidFill>
-                            <a:srgbClr val="1A1A1A"/>
-                          </a:solidFill>
-                          <a:latin typeface="Calibri"/>
-                        </a:rPr>
-                        <a:t/>
-                      </a:r>
+                      <a:endParaRPr/>
                     </a:p>
                   </a:txBody>
                   <a:tcPr marL="54864" marR="54864" marT="18288" marB="18288" anchor="ctr">
@@ -8479,15 +8446,7 @@
                     <a:lstStyle/>
                     <a:p>
                       <a:pPr algn="l"/>
-                      <a:r>
-                        <a:rPr sz="1200" b="0" i="0">
-                          <a:solidFill>
-                            <a:srgbClr val="1A1A1A"/>
-                          </a:solidFill>
-                          <a:latin typeface="Calibri"/>
-                        </a:rPr>
-                        <a:t/>
-                      </a:r>
+                      <a:endParaRPr/>
                     </a:p>
                   </a:txBody>
                   <a:tcPr marL="54864" marR="54864" marT="18288" marB="18288" anchor="ctr">
@@ -8496,6 +8455,11 @@
                     </a:solidFill>
                   </a:tcPr>
                 </a:tc>
+                <a:extLst>
+                  <a:ext uri="{0D108BD9-81ED-4DB2-BD59-A6C34878D82A}">
+                    <a16:rowId xmlns:a16="http://schemas.microsoft.com/office/drawing/2014/main" val="10001"/>
+                  </a:ext>
+                </a:extLst>
               </a:tr>
               <a:tr h="274320">
                 <a:tc>
@@ -8705,6 +8669,11 @@
                     </a:solidFill>
                   </a:tcPr>
                 </a:tc>
+                <a:extLst>
+                  <a:ext uri="{0D108BD9-81ED-4DB2-BD59-A6C34878D82A}">
+                    <a16:rowId xmlns:a16="http://schemas.microsoft.com/office/drawing/2014/main" val="10002"/>
+                  </a:ext>
+                </a:extLst>
               </a:tr>
               <a:tr h="274320">
                 <a:tc>
@@ -8914,6 +8883,11 @@
                     </a:solidFill>
                   </a:tcPr>
                 </a:tc>
+                <a:extLst>
+                  <a:ext uri="{0D108BD9-81ED-4DB2-BD59-A6C34878D82A}">
+                    <a16:rowId xmlns:a16="http://schemas.microsoft.com/office/drawing/2014/main" val="10003"/>
+                  </a:ext>
+                </a:extLst>
               </a:tr>
               <a:tr h="274320">
                 <a:tc>
@@ -9123,6 +9097,11 @@
                     </a:solidFill>
                   </a:tcPr>
                 </a:tc>
+                <a:extLst>
+                  <a:ext uri="{0D108BD9-81ED-4DB2-BD59-A6C34878D82A}">
+                    <a16:rowId xmlns:a16="http://schemas.microsoft.com/office/drawing/2014/main" val="10004"/>
+                  </a:ext>
+                </a:extLst>
               </a:tr>
               <a:tr h="274320">
                 <a:tc>
@@ -9332,6 +9311,11 @@
                     </a:solidFill>
                   </a:tcPr>
                 </a:tc>
+                <a:extLst>
+                  <a:ext uri="{0D108BD9-81ED-4DB2-BD59-A6C34878D82A}">
+                    <a16:rowId xmlns:a16="http://schemas.microsoft.com/office/drawing/2014/main" val="10005"/>
+                  </a:ext>
+                </a:extLst>
               </a:tr>
               <a:tr h="274320">
                 <a:tc gridSpan="9">
@@ -9363,15 +9347,7 @@
                     <a:lstStyle/>
                     <a:p>
                       <a:pPr algn="l"/>
-                      <a:r>
-                        <a:rPr sz="1200" b="0" i="0">
-                          <a:solidFill>
-                            <a:srgbClr val="1A1A1A"/>
-                          </a:solidFill>
-                          <a:latin typeface="Calibri"/>
-                        </a:rPr>
-                        <a:t/>
-                      </a:r>
+                      <a:endParaRPr/>
                     </a:p>
                   </a:txBody>
                   <a:tcPr marL="54864" marR="54864" marT="18288" marB="18288" anchor="ctr">
@@ -9386,15 +9362,7 @@
                     <a:lstStyle/>
                     <a:p>
                       <a:pPr algn="l"/>
-                      <a:r>
-                        <a:rPr sz="1200" b="0" i="0">
-                          <a:solidFill>
-                            <a:srgbClr val="1A1A1A"/>
-                          </a:solidFill>
-                          <a:latin typeface="Calibri"/>
-                        </a:rPr>
-                        <a:t/>
-                      </a:r>
+                      <a:endParaRPr/>
                     </a:p>
                   </a:txBody>
                   <a:tcPr marL="54864" marR="54864" marT="18288" marB="18288" anchor="ctr">
@@ -9409,15 +9377,7 @@
                     <a:lstStyle/>
                     <a:p>
                       <a:pPr algn="l"/>
-                      <a:r>
-                        <a:rPr sz="1200" b="0" i="0">
-                          <a:solidFill>
-                            <a:srgbClr val="1A1A1A"/>
-                          </a:solidFill>
-                          <a:latin typeface="Calibri"/>
-                        </a:rPr>
-                        <a:t/>
-                      </a:r>
+                      <a:endParaRPr/>
                     </a:p>
                   </a:txBody>
                   <a:tcPr marL="54864" marR="54864" marT="18288" marB="18288" anchor="ctr">
@@ -9432,15 +9392,7 @@
                     <a:lstStyle/>
                     <a:p>
                       <a:pPr algn="l"/>
-                      <a:r>
-                        <a:rPr sz="1200" b="0" i="0">
-                          <a:solidFill>
-                            <a:srgbClr val="1A1A1A"/>
-                          </a:solidFill>
-                          <a:latin typeface="Calibri"/>
-                        </a:rPr>
-                        <a:t/>
-                      </a:r>
+                      <a:endParaRPr/>
                     </a:p>
                   </a:txBody>
                   <a:tcPr marL="54864" marR="54864" marT="18288" marB="18288" anchor="ctr">
@@ -9455,15 +9407,7 @@
                     <a:lstStyle/>
                     <a:p>
                       <a:pPr algn="l"/>
-                      <a:r>
-                        <a:rPr sz="1200" b="0" i="0">
-                          <a:solidFill>
-                            <a:srgbClr val="1A1A1A"/>
-                          </a:solidFill>
-                          <a:latin typeface="Calibri"/>
-                        </a:rPr>
-                        <a:t/>
-                      </a:r>
+                      <a:endParaRPr/>
                     </a:p>
                   </a:txBody>
                   <a:tcPr marL="54864" marR="54864" marT="18288" marB="18288" anchor="ctr">
@@ -9478,15 +9422,7 @@
                     <a:lstStyle/>
                     <a:p>
                       <a:pPr algn="l"/>
-                      <a:r>
-                        <a:rPr sz="1200" b="0" i="0">
-                          <a:solidFill>
-                            <a:srgbClr val="1A1A1A"/>
-                          </a:solidFill>
-                          <a:latin typeface="Calibri"/>
-                        </a:rPr>
-                        <a:t/>
-                      </a:r>
+                      <a:endParaRPr/>
                     </a:p>
                   </a:txBody>
                   <a:tcPr marL="54864" marR="54864" marT="18288" marB="18288" anchor="ctr">
@@ -9501,15 +9437,7 @@
                     <a:lstStyle/>
                     <a:p>
                       <a:pPr algn="l"/>
-                      <a:r>
-                        <a:rPr sz="1200" b="0" i="0">
-                          <a:solidFill>
-                            <a:srgbClr val="1A1A1A"/>
-                          </a:solidFill>
-                          <a:latin typeface="Calibri"/>
-                        </a:rPr>
-                        <a:t/>
-                      </a:r>
+                      <a:endParaRPr/>
                     </a:p>
                   </a:txBody>
                   <a:tcPr marL="54864" marR="54864" marT="18288" marB="18288" anchor="ctr">
@@ -9524,15 +9452,7 @@
                     <a:lstStyle/>
                     <a:p>
                       <a:pPr algn="l"/>
-                      <a:r>
-                        <a:rPr sz="1200" b="0" i="0">
-                          <a:solidFill>
-                            <a:srgbClr val="1A1A1A"/>
-                          </a:solidFill>
-                          <a:latin typeface="Calibri"/>
-                        </a:rPr>
-                        <a:t/>
-                      </a:r>
+                      <a:endParaRPr/>
                     </a:p>
                   </a:txBody>
                   <a:tcPr marL="54864" marR="54864" marT="18288" marB="18288" anchor="ctr">
@@ -9541,6 +9461,11 @@
                     </a:solidFill>
                   </a:tcPr>
                 </a:tc>
+                <a:extLst>
+                  <a:ext uri="{0D108BD9-81ED-4DB2-BD59-A6C34878D82A}">
+                    <a16:rowId xmlns:a16="http://schemas.microsoft.com/office/drawing/2014/main" val="10006"/>
+                  </a:ext>
+                </a:extLst>
               </a:tr>
               <a:tr h="274320">
                 <a:tc>
@@ -9750,6 +9675,11 @@
                     </a:solidFill>
                   </a:tcPr>
                 </a:tc>
+                <a:extLst>
+                  <a:ext uri="{0D108BD9-81ED-4DB2-BD59-A6C34878D82A}">
+                    <a16:rowId xmlns:a16="http://schemas.microsoft.com/office/drawing/2014/main" val="10007"/>
+                  </a:ext>
+                </a:extLst>
               </a:tr>
               <a:tr h="274320">
                 <a:tc>
@@ -9959,6 +9889,11 @@
                     </a:solidFill>
                   </a:tcPr>
                 </a:tc>
+                <a:extLst>
+                  <a:ext uri="{0D108BD9-81ED-4DB2-BD59-A6C34878D82A}">
+                    <a16:rowId xmlns:a16="http://schemas.microsoft.com/office/drawing/2014/main" val="10008"/>
+                  </a:ext>
+                </a:extLst>
               </a:tr>
               <a:tr h="274320">
                 <a:tc>
@@ -10168,6 +10103,11 @@
                     </a:solidFill>
                   </a:tcPr>
                 </a:tc>
+                <a:extLst>
+                  <a:ext uri="{0D108BD9-81ED-4DB2-BD59-A6C34878D82A}">
+                    <a16:rowId xmlns:a16="http://schemas.microsoft.com/office/drawing/2014/main" val="10009"/>
+                  </a:ext>
+                </a:extLst>
               </a:tr>
               <a:tr h="274320">
                 <a:tc>
@@ -10377,6 +10317,11 @@
                     </a:solidFill>
                   </a:tcPr>
                 </a:tc>
+                <a:extLst>
+                  <a:ext uri="{0D108BD9-81ED-4DB2-BD59-A6C34878D82A}">
+                    <a16:rowId xmlns:a16="http://schemas.microsoft.com/office/drawing/2014/main" val="10010"/>
+                  </a:ext>
+                </a:extLst>
               </a:tr>
             </a:tbl>
           </a:graphicData>
@@ -10542,7 +10487,7 @@
           <a:noFill/>
         </p:spPr>
         <p:txBody>
-          <a:bodyPr wrap="square" anchor="t" lIns="45720" rIns="45720" tIns="27432" bIns="27432">
+          <a:bodyPr wrap="square" lIns="45720" tIns="27432" rIns="45720" bIns="27432" anchor="t">
             <a:spAutoFit/>
           </a:bodyPr>
           <a:lstStyle/>
@@ -10569,7 +10514,7 @@
 </file>
 
 <file path=ppt/slides/slide14.xml><?xml version="1.0" encoding="utf-8"?>
-<p:sld xmlns:a="http://schemas.openxmlformats.org/drawingml/2006/main" xmlns:p="http://schemas.openxmlformats.org/presentationml/2006/main" xmlns:r="http://schemas.openxmlformats.org/officeDocument/2006/relationships">
+<p:sld xmlns:a="http://schemas.openxmlformats.org/drawingml/2006/main" xmlns:r="http://schemas.openxmlformats.org/officeDocument/2006/relationships" xmlns:p="http://schemas.openxmlformats.org/presentationml/2006/main">
   <p:cSld>
     <p:spTree>
       <p:nvGrpSpPr>
@@ -10577,7 +10522,14 @@
         <p:cNvGrpSpPr/>
         <p:nvPr/>
       </p:nvGrpSpPr>
-      <p:grpSpPr/>
+      <p:grpSpPr>
+        <a:xfrm>
+          <a:off x="0" y="0"/>
+          <a:ext cx="0" cy="0"/>
+          <a:chOff x="0" y="0"/>
+          <a:chExt cx="0" cy="0"/>
+        </a:xfrm>
+      </p:grpSpPr>
       <p:sp>
         <p:nvSpPr>
           <p:cNvPr id="2" name="Rectangle 1"/>
@@ -10618,6 +10570,7 @@
           <a:lstStyle/>
           <a:p>
             <a:pPr algn="ctr"/>
+            <a:endParaRPr/>
           </a:p>
         </p:txBody>
       </p:sp>
@@ -10638,7 +10591,7 @@
           <a:noFill/>
         </p:spPr>
         <p:txBody>
-          <a:bodyPr wrap="square" anchor="ctr" lIns="45720" rIns="45720" tIns="27432" bIns="27432">
+          <a:bodyPr wrap="square" lIns="45720" tIns="27432" rIns="45720" bIns="27432" anchor="ctr">
             <a:spAutoFit/>
           </a:bodyPr>
           <a:lstStyle/>
@@ -10673,7 +10626,7 @@
           <a:noFill/>
         </p:spPr>
         <p:txBody>
-          <a:bodyPr wrap="square" anchor="t" lIns="45720" rIns="45720" tIns="27432" bIns="27432">
+          <a:bodyPr wrap="square" lIns="45720" tIns="27432" rIns="45720" bIns="27432" anchor="t">
             <a:spAutoFit/>
           </a:bodyPr>
           <a:lstStyle/>
@@ -10708,7 +10661,7 @@
           <a:noFill/>
         </p:spPr>
         <p:txBody>
-          <a:bodyPr wrap="square" anchor="t" lIns="45720" rIns="45720" tIns="27432" bIns="27432">
+          <a:bodyPr wrap="square" lIns="45720" tIns="27432" rIns="45720" bIns="27432" anchor="t">
             <a:spAutoFit/>
           </a:bodyPr>
           <a:lstStyle/>
@@ -10743,7 +10696,7 @@
           <a:noFill/>
         </p:spPr>
         <p:txBody>
-          <a:bodyPr wrap="square" anchor="t" lIns="45720" rIns="45720" tIns="27432" bIns="27432">
+          <a:bodyPr wrap="square" lIns="45720" tIns="27432" rIns="45720" bIns="27432" anchor="t">
             <a:spAutoFit/>
           </a:bodyPr>
           <a:lstStyle/>
@@ -10770,7 +10723,7 @@
           <p:nvPr/>
         </p:nvPicPr>
         <p:blipFill>
-          <a:blip r:embed="rId2"/>
+          <a:blip r:embed="rId3"/>
           <a:stretch>
             <a:fillRect/>
           </a:stretch>
@@ -10909,7 +10862,7 @@
           <a:noFill/>
         </p:spPr>
         <p:txBody>
-          <a:bodyPr wrap="square" anchor="t" lIns="45720" rIns="45720" tIns="27432" bIns="27432">
+          <a:bodyPr wrap="square" lIns="45720" tIns="27432" rIns="45720" bIns="27432" anchor="t">
             <a:spAutoFit/>
           </a:bodyPr>
           <a:lstStyle/>
@@ -10936,7 +10889,7 @@
 </file>
 
 <file path=ppt/slides/slide15.xml><?xml version="1.0" encoding="utf-8"?>
-<p:sld xmlns:a="http://schemas.openxmlformats.org/drawingml/2006/main" xmlns:p="http://schemas.openxmlformats.org/presentationml/2006/main" xmlns:r="http://schemas.openxmlformats.org/officeDocument/2006/relationships">
+<p:sld xmlns:a="http://schemas.openxmlformats.org/drawingml/2006/main" xmlns:r="http://schemas.openxmlformats.org/officeDocument/2006/relationships" xmlns:p="http://schemas.openxmlformats.org/presentationml/2006/main">
   <p:cSld>
     <p:spTree>
       <p:nvGrpSpPr>
@@ -10944,7 +10897,14 @@
         <p:cNvGrpSpPr/>
         <p:nvPr/>
       </p:nvGrpSpPr>
-      <p:grpSpPr/>
+      <p:grpSpPr>
+        <a:xfrm>
+          <a:off x="0" y="0"/>
+          <a:ext cx="0" cy="0"/>
+          <a:chOff x="0" y="0"/>
+          <a:chExt cx="0" cy="0"/>
+        </a:xfrm>
+      </p:grpSpPr>
       <p:sp>
         <p:nvSpPr>
           <p:cNvPr id="2" name="Rectangle 1"/>
@@ -10985,6 +10945,7 @@
           <a:lstStyle/>
           <a:p>
             <a:pPr algn="ctr"/>
+            <a:endParaRPr/>
           </a:p>
         </p:txBody>
       </p:sp>
@@ -11005,7 +10966,7 @@
           <a:noFill/>
         </p:spPr>
         <p:txBody>
-          <a:bodyPr wrap="square" anchor="ctr" lIns="45720" rIns="45720" tIns="27432" bIns="27432">
+          <a:bodyPr wrap="square" lIns="45720" tIns="27432" rIns="45720" bIns="27432" anchor="ctr">
             <a:spAutoFit/>
           </a:bodyPr>
           <a:lstStyle/>
@@ -11040,7 +11001,7 @@
           <a:noFill/>
         </p:spPr>
         <p:txBody>
-          <a:bodyPr wrap="square" anchor="t" lIns="45720" rIns="45720" tIns="27432" bIns="27432">
+          <a:bodyPr wrap="square" lIns="45720" tIns="27432" rIns="45720" bIns="27432" anchor="t">
             <a:spAutoFit/>
           </a:bodyPr>
           <a:lstStyle/>
@@ -11075,7 +11036,7 @@
           <a:noFill/>
         </p:spPr>
         <p:txBody>
-          <a:bodyPr wrap="square" anchor="t" lIns="45720" rIns="45720" tIns="27432" bIns="27432">
+          <a:bodyPr wrap="square" lIns="45720" tIns="27432" rIns="45720" bIns="27432" anchor="t">
             <a:spAutoFit/>
           </a:bodyPr>
           <a:lstStyle/>
@@ -11110,7 +11071,7 @@
           <a:noFill/>
         </p:spPr>
         <p:txBody>
-          <a:bodyPr wrap="square" anchor="t" lIns="45720" rIns="45720" tIns="27432" bIns="27432">
+          <a:bodyPr wrap="square" lIns="45720" tIns="27432" rIns="45720" bIns="27432" anchor="t">
             <a:spAutoFit/>
           </a:bodyPr>
           <a:lstStyle/>
@@ -11137,7 +11098,7 @@
           <p:nvPr/>
         </p:nvPicPr>
         <p:blipFill>
-          <a:blip r:embed="rId2"/>
+          <a:blip r:embed="rId3"/>
           <a:stretch>
             <a:fillRect/>
           </a:stretch>
@@ -11328,7 +11289,7 @@
           <a:noFill/>
         </p:spPr>
         <p:txBody>
-          <a:bodyPr wrap="square" anchor="t" lIns="45720" rIns="45720" tIns="27432" bIns="27432">
+          <a:bodyPr wrap="square" lIns="45720" tIns="27432" rIns="45720" bIns="27432" anchor="t">
             <a:spAutoFit/>
           </a:bodyPr>
           <a:lstStyle/>
@@ -11355,7 +11316,7 @@
 </file>
 
 <file path=ppt/slides/slide16.xml><?xml version="1.0" encoding="utf-8"?>
-<p:sld xmlns:a="http://schemas.openxmlformats.org/drawingml/2006/main" xmlns:p="http://schemas.openxmlformats.org/presentationml/2006/main" xmlns:r="http://schemas.openxmlformats.org/officeDocument/2006/relationships">
+<p:sld xmlns:a="http://schemas.openxmlformats.org/drawingml/2006/main" xmlns:r="http://schemas.openxmlformats.org/officeDocument/2006/relationships" xmlns:p="http://schemas.openxmlformats.org/presentationml/2006/main">
   <p:cSld>
     <p:spTree>
       <p:nvGrpSpPr>
@@ -11363,7 +11324,14 @@
         <p:cNvGrpSpPr/>
         <p:nvPr/>
       </p:nvGrpSpPr>
-      <p:grpSpPr/>
+      <p:grpSpPr>
+        <a:xfrm>
+          <a:off x="0" y="0"/>
+          <a:ext cx="0" cy="0"/>
+          <a:chOff x="0" y="0"/>
+          <a:chExt cx="0" cy="0"/>
+        </a:xfrm>
+      </p:grpSpPr>
       <p:sp>
         <p:nvSpPr>
           <p:cNvPr id="2" name="Rectangle 1"/>
@@ -11404,6 +11372,7 @@
           <a:lstStyle/>
           <a:p>
             <a:pPr algn="ctr"/>
+            <a:endParaRPr/>
           </a:p>
         </p:txBody>
       </p:sp>
@@ -11424,7 +11393,7 @@
           <a:noFill/>
         </p:spPr>
         <p:txBody>
-          <a:bodyPr wrap="square" anchor="ctr" lIns="45720" rIns="45720" tIns="27432" bIns="27432">
+          <a:bodyPr wrap="square" lIns="45720" tIns="27432" rIns="45720" bIns="27432" anchor="ctr">
             <a:spAutoFit/>
           </a:bodyPr>
           <a:lstStyle/>
@@ -11459,7 +11428,7 @@
           <a:noFill/>
         </p:spPr>
         <p:txBody>
-          <a:bodyPr wrap="square" anchor="t" lIns="45720" rIns="45720" tIns="27432" bIns="27432">
+          <a:bodyPr wrap="square" lIns="45720" tIns="27432" rIns="45720" bIns="27432" anchor="t">
             <a:spAutoFit/>
           </a:bodyPr>
           <a:lstStyle/>
@@ -11494,7 +11463,7 @@
           <a:noFill/>
         </p:spPr>
         <p:txBody>
-          <a:bodyPr wrap="square" anchor="t" lIns="45720" rIns="45720" tIns="27432" bIns="27432">
+          <a:bodyPr wrap="square" lIns="45720" tIns="27432" rIns="45720" bIns="27432" anchor="t">
             <a:spAutoFit/>
           </a:bodyPr>
           <a:lstStyle/>
@@ -11529,7 +11498,7 @@
           <a:noFill/>
         </p:spPr>
         <p:txBody>
-          <a:bodyPr wrap="square" anchor="t" lIns="45720" rIns="45720" tIns="27432" bIns="27432">
+          <a:bodyPr wrap="square" lIns="45720" tIns="27432" rIns="45720" bIns="27432" anchor="t">
             <a:spAutoFit/>
           </a:bodyPr>
           <a:lstStyle/>
@@ -11556,7 +11525,7 @@
           <p:nvPr/>
         </p:nvPicPr>
         <p:blipFill>
-          <a:blip r:embed="rId2"/>
+          <a:blip r:embed="rId3"/>
           <a:stretch>
             <a:fillRect/>
           </a:stretch>
@@ -11731,7 +11700,7 @@
           <a:noFill/>
         </p:spPr>
         <p:txBody>
-          <a:bodyPr wrap="square" anchor="t" lIns="45720" rIns="45720" tIns="27432" bIns="27432">
+          <a:bodyPr wrap="square" lIns="45720" tIns="27432" rIns="45720" bIns="27432" anchor="t">
             <a:spAutoFit/>
           </a:bodyPr>
           <a:lstStyle/>
@@ -11758,7 +11727,7 @@
 </file>
 
 <file path=ppt/slides/slide17.xml><?xml version="1.0" encoding="utf-8"?>
-<p:sld xmlns:a="http://schemas.openxmlformats.org/drawingml/2006/main" xmlns:p="http://schemas.openxmlformats.org/presentationml/2006/main" xmlns:r="http://schemas.openxmlformats.org/officeDocument/2006/relationships">
+<p:sld xmlns:a="http://schemas.openxmlformats.org/drawingml/2006/main" xmlns:r="http://schemas.openxmlformats.org/officeDocument/2006/relationships" xmlns:p="http://schemas.openxmlformats.org/presentationml/2006/main">
   <p:cSld>
     <p:spTree>
       <p:nvGrpSpPr>
@@ -11766,7 +11735,14 @@
         <p:cNvGrpSpPr/>
         <p:nvPr/>
       </p:nvGrpSpPr>
-      <p:grpSpPr/>
+      <p:grpSpPr>
+        <a:xfrm>
+          <a:off x="0" y="0"/>
+          <a:ext cx="0" cy="0"/>
+          <a:chOff x="0" y="0"/>
+          <a:chExt cx="0" cy="0"/>
+        </a:xfrm>
+      </p:grpSpPr>
       <p:sp>
         <p:nvSpPr>
           <p:cNvPr id="2" name="Rectangle 1"/>
@@ -11807,6 +11783,7 @@
           <a:lstStyle/>
           <a:p>
             <a:pPr algn="ctr"/>
+            <a:endParaRPr/>
           </a:p>
         </p:txBody>
       </p:sp>
@@ -11827,7 +11804,7 @@
           <a:noFill/>
         </p:spPr>
         <p:txBody>
-          <a:bodyPr wrap="square" anchor="ctr" lIns="45720" rIns="45720" tIns="27432" bIns="27432">
+          <a:bodyPr wrap="square" lIns="45720" tIns="27432" rIns="45720" bIns="27432" anchor="ctr">
             <a:spAutoFit/>
           </a:bodyPr>
           <a:lstStyle/>
@@ -11862,7 +11839,7 @@
           <a:noFill/>
         </p:spPr>
         <p:txBody>
-          <a:bodyPr wrap="square" anchor="t" lIns="45720" rIns="45720" tIns="27432" bIns="27432">
+          <a:bodyPr wrap="square" lIns="45720" tIns="27432" rIns="45720" bIns="27432" anchor="t">
             <a:spAutoFit/>
           </a:bodyPr>
           <a:lstStyle/>
@@ -11897,7 +11874,7 @@
           <a:noFill/>
         </p:spPr>
         <p:txBody>
-          <a:bodyPr wrap="square" anchor="t" lIns="45720" rIns="45720" tIns="27432" bIns="27432">
+          <a:bodyPr wrap="square" lIns="45720" tIns="27432" rIns="45720" bIns="27432" anchor="t">
             <a:spAutoFit/>
           </a:bodyPr>
           <a:lstStyle/>
@@ -11932,7 +11909,7 @@
           <a:noFill/>
         </p:spPr>
         <p:txBody>
-          <a:bodyPr wrap="square" anchor="t" lIns="45720" rIns="45720" tIns="27432" bIns="27432">
+          <a:bodyPr wrap="square" lIns="45720" tIns="27432" rIns="45720" bIns="27432" anchor="t">
             <a:spAutoFit/>
           </a:bodyPr>
           <a:lstStyle/>
@@ -12289,7 +12266,7 @@
 </file>
 
 <file path=ppt/slides/slide2.xml><?xml version="1.0" encoding="utf-8"?>
-<p:sld xmlns:a="http://schemas.openxmlformats.org/drawingml/2006/main" xmlns:p="http://schemas.openxmlformats.org/presentationml/2006/main" xmlns:r="http://schemas.openxmlformats.org/officeDocument/2006/relationships">
+<p:sld xmlns:a="http://schemas.openxmlformats.org/drawingml/2006/main" xmlns:r="http://schemas.openxmlformats.org/officeDocument/2006/relationships" xmlns:p="http://schemas.openxmlformats.org/presentationml/2006/main">
   <p:cSld>
     <p:spTree>
       <p:nvGrpSpPr>
@@ -12297,7 +12274,14 @@
         <p:cNvGrpSpPr/>
         <p:nvPr/>
       </p:nvGrpSpPr>
-      <p:grpSpPr/>
+      <p:grpSpPr>
+        <a:xfrm>
+          <a:off x="0" y="0"/>
+          <a:ext cx="0" cy="0"/>
+          <a:chOff x="0" y="0"/>
+          <a:chExt cx="0" cy="0"/>
+        </a:xfrm>
+      </p:grpSpPr>
       <p:sp>
         <p:nvSpPr>
           <p:cNvPr id="2" name="Rectangle 1"/>
@@ -12338,6 +12322,7 @@
           <a:lstStyle/>
           <a:p>
             <a:pPr algn="ctr"/>
+            <a:endParaRPr/>
           </a:p>
         </p:txBody>
       </p:sp>
@@ -12358,7 +12343,7 @@
           <a:noFill/>
         </p:spPr>
         <p:txBody>
-          <a:bodyPr wrap="square" anchor="ctr" lIns="45720" rIns="45720" tIns="27432" bIns="27432">
+          <a:bodyPr wrap="square" lIns="45720" tIns="27432" rIns="45720" bIns="27432" anchor="ctr">
             <a:spAutoFit/>
           </a:bodyPr>
           <a:lstStyle/>
@@ -12393,7 +12378,7 @@
           <a:noFill/>
         </p:spPr>
         <p:txBody>
-          <a:bodyPr wrap="square" anchor="t" lIns="45720" rIns="45720" tIns="27432" bIns="27432">
+          <a:bodyPr wrap="square" lIns="45720" tIns="27432" rIns="45720" bIns="27432" anchor="t">
             <a:spAutoFit/>
           </a:bodyPr>
           <a:lstStyle/>
@@ -12428,7 +12413,7 @@
           <a:noFill/>
         </p:spPr>
         <p:txBody>
-          <a:bodyPr wrap="square" anchor="t" lIns="45720" rIns="45720" tIns="27432" bIns="27432">
+          <a:bodyPr wrap="square" lIns="45720" tIns="27432" rIns="45720" bIns="27432" anchor="t">
             <a:spAutoFit/>
           </a:bodyPr>
           <a:lstStyle/>
@@ -12463,7 +12448,7 @@
           <a:noFill/>
         </p:spPr>
         <p:txBody>
-          <a:bodyPr wrap="square" anchor="t" lIns="45720" rIns="45720" tIns="27432" bIns="27432">
+          <a:bodyPr wrap="square" lIns="45720" tIns="27432" rIns="45720" bIns="27432" anchor="t">
             <a:spAutoFit/>
           </a:bodyPr>
           <a:lstStyle/>
@@ -12692,7 +12677,7 @@
 </file>
 
 <file path=ppt/slides/slide3.xml><?xml version="1.0" encoding="utf-8"?>
-<p:sld xmlns:a="http://schemas.openxmlformats.org/drawingml/2006/main" xmlns:p="http://schemas.openxmlformats.org/presentationml/2006/main" xmlns:r="http://schemas.openxmlformats.org/officeDocument/2006/relationships">
+<p:sld xmlns:a="http://schemas.openxmlformats.org/drawingml/2006/main" xmlns:r="http://schemas.openxmlformats.org/officeDocument/2006/relationships" xmlns:p="http://schemas.openxmlformats.org/presentationml/2006/main">
   <p:cSld>
     <p:spTree>
       <p:nvGrpSpPr>
@@ -12700,7 +12685,14 @@
         <p:cNvGrpSpPr/>
         <p:nvPr/>
       </p:nvGrpSpPr>
-      <p:grpSpPr/>
+      <p:grpSpPr>
+        <a:xfrm>
+          <a:off x="0" y="0"/>
+          <a:ext cx="0" cy="0"/>
+          <a:chOff x="0" y="0"/>
+          <a:chExt cx="0" cy="0"/>
+        </a:xfrm>
+      </p:grpSpPr>
       <p:sp>
         <p:nvSpPr>
           <p:cNvPr id="2" name="Rectangle 1"/>
@@ -12741,6 +12733,7 @@
           <a:lstStyle/>
           <a:p>
             <a:pPr algn="ctr"/>
+            <a:endParaRPr/>
           </a:p>
         </p:txBody>
       </p:sp>
@@ -12761,7 +12754,7 @@
           <a:noFill/>
         </p:spPr>
         <p:txBody>
-          <a:bodyPr wrap="square" anchor="ctr" lIns="45720" rIns="45720" tIns="27432" bIns="27432">
+          <a:bodyPr wrap="square" lIns="45720" tIns="27432" rIns="45720" bIns="27432" anchor="ctr">
             <a:spAutoFit/>
           </a:bodyPr>
           <a:lstStyle/>
@@ -12796,7 +12789,7 @@
           <a:noFill/>
         </p:spPr>
         <p:txBody>
-          <a:bodyPr wrap="square" anchor="t" lIns="45720" rIns="45720" tIns="27432" bIns="27432">
+          <a:bodyPr wrap="square" lIns="45720" tIns="27432" rIns="45720" bIns="27432" anchor="t">
             <a:spAutoFit/>
           </a:bodyPr>
           <a:lstStyle/>
@@ -12831,7 +12824,7 @@
           <a:noFill/>
         </p:spPr>
         <p:txBody>
-          <a:bodyPr wrap="square" anchor="t" lIns="45720" rIns="45720" tIns="27432" bIns="27432">
+          <a:bodyPr wrap="square" lIns="45720" tIns="27432" rIns="45720" bIns="27432" anchor="t">
             <a:spAutoFit/>
           </a:bodyPr>
           <a:lstStyle/>
@@ -12866,7 +12859,7 @@
           <a:noFill/>
         </p:spPr>
         <p:txBody>
-          <a:bodyPr wrap="square" anchor="t" lIns="45720" rIns="45720" tIns="27432" bIns="27432">
+          <a:bodyPr wrap="square" lIns="45720" tIns="27432" rIns="45720" bIns="27432" anchor="t">
             <a:spAutoFit/>
           </a:bodyPr>
           <a:lstStyle/>
@@ -13033,6 +13026,7 @@
           <a:lstStyle/>
           <a:p>
             <a:pPr algn="ctr"/>
+            <a:endParaRPr/>
           </a:p>
         </p:txBody>
       </p:sp>
@@ -13053,7 +13047,7 @@
           <a:noFill/>
         </p:spPr>
         <p:txBody>
-          <a:bodyPr wrap="square" anchor="t" lIns="45720" rIns="45720" tIns="27432" bIns="27432">
+          <a:bodyPr wrap="square" lIns="45720" tIns="27432" rIns="45720" bIns="27432" anchor="t">
             <a:spAutoFit/>
           </a:bodyPr>
           <a:lstStyle/>
@@ -13163,6 +13157,7 @@
           <a:lstStyle/>
           <a:p>
             <a:pPr algn="ctr"/>
+            <a:endParaRPr/>
           </a:p>
         </p:txBody>
       </p:sp>
@@ -13183,7 +13178,7 @@
           <a:noFill/>
         </p:spPr>
         <p:txBody>
-          <a:bodyPr wrap="square" anchor="t" lIns="45720" rIns="45720" tIns="27432" bIns="27432">
+          <a:bodyPr wrap="square" lIns="45720" tIns="27432" rIns="45720" bIns="27432" anchor="t">
             <a:spAutoFit/>
           </a:bodyPr>
           <a:lstStyle/>
@@ -13293,6 +13288,7 @@
           <a:lstStyle/>
           <a:p>
             <a:pPr algn="ctr"/>
+            <a:endParaRPr/>
           </a:p>
         </p:txBody>
       </p:sp>
@@ -13313,7 +13309,7 @@
           <a:noFill/>
         </p:spPr>
         <p:txBody>
-          <a:bodyPr wrap="square" anchor="t" lIns="45720" rIns="45720" tIns="27432" bIns="27432">
+          <a:bodyPr wrap="square" lIns="45720" tIns="27432" rIns="45720" bIns="27432" anchor="t">
             <a:spAutoFit/>
           </a:bodyPr>
           <a:lstStyle/>
@@ -13348,7 +13344,7 @@
           <a:noFill/>
         </p:spPr>
         <p:txBody>
-          <a:bodyPr wrap="square" anchor="t" lIns="45720" rIns="45720" tIns="27432" bIns="27432">
+          <a:bodyPr wrap="square" lIns="45720" tIns="27432" rIns="45720" bIns="27432" anchor="t">
             <a:spAutoFit/>
           </a:bodyPr>
           <a:lstStyle/>
@@ -13375,7 +13371,7 @@
 </file>
 
 <file path=ppt/slides/slide4.xml><?xml version="1.0" encoding="utf-8"?>
-<p:sld xmlns:a="http://schemas.openxmlformats.org/drawingml/2006/main" xmlns:p="http://schemas.openxmlformats.org/presentationml/2006/main" xmlns:r="http://schemas.openxmlformats.org/officeDocument/2006/relationships">
+<p:sld xmlns:a="http://schemas.openxmlformats.org/drawingml/2006/main" xmlns:r="http://schemas.openxmlformats.org/officeDocument/2006/relationships" xmlns:p="http://schemas.openxmlformats.org/presentationml/2006/main">
   <p:cSld>
     <p:spTree>
       <p:nvGrpSpPr>
@@ -13383,7 +13379,14 @@
         <p:cNvGrpSpPr/>
         <p:nvPr/>
       </p:nvGrpSpPr>
-      <p:grpSpPr/>
+      <p:grpSpPr>
+        <a:xfrm>
+          <a:off x="0" y="0"/>
+          <a:ext cx="0" cy="0"/>
+          <a:chOff x="0" y="0"/>
+          <a:chExt cx="0" cy="0"/>
+        </a:xfrm>
+      </p:grpSpPr>
       <p:sp>
         <p:nvSpPr>
           <p:cNvPr id="2" name="Rectangle 1"/>
@@ -13424,6 +13427,7 @@
           <a:lstStyle/>
           <a:p>
             <a:pPr algn="ctr"/>
+            <a:endParaRPr/>
           </a:p>
         </p:txBody>
       </p:sp>
@@ -13444,7 +13448,7 @@
           <a:noFill/>
         </p:spPr>
         <p:txBody>
-          <a:bodyPr wrap="square" anchor="ctr" lIns="45720" rIns="45720" tIns="27432" bIns="27432">
+          <a:bodyPr wrap="square" lIns="45720" tIns="27432" rIns="45720" bIns="27432" anchor="ctr">
             <a:spAutoFit/>
           </a:bodyPr>
           <a:lstStyle/>
@@ -13479,7 +13483,7 @@
           <a:noFill/>
         </p:spPr>
         <p:txBody>
-          <a:bodyPr wrap="square" anchor="t" lIns="45720" rIns="45720" tIns="27432" bIns="27432">
+          <a:bodyPr wrap="square" lIns="45720" tIns="27432" rIns="45720" bIns="27432" anchor="t">
             <a:spAutoFit/>
           </a:bodyPr>
           <a:lstStyle/>
@@ -13514,7 +13518,7 @@
           <a:noFill/>
         </p:spPr>
         <p:txBody>
-          <a:bodyPr wrap="square" anchor="t" lIns="45720" rIns="45720" tIns="27432" bIns="27432">
+          <a:bodyPr wrap="square" lIns="45720" tIns="27432" rIns="45720" bIns="27432" anchor="t">
             <a:spAutoFit/>
           </a:bodyPr>
           <a:lstStyle/>
@@ -13549,7 +13553,7 @@
           <a:noFill/>
         </p:spPr>
         <p:txBody>
-          <a:bodyPr wrap="square" anchor="t" lIns="45720" rIns="45720" tIns="27432" bIns="27432">
+          <a:bodyPr wrap="square" lIns="45720" tIns="27432" rIns="45720" bIns="27432" anchor="t">
             <a:spAutoFit/>
           </a:bodyPr>
           <a:lstStyle/>
@@ -13586,10 +13590,34 @@
                 <a:tableStyleId>{5C22544A-7EE6-4342-B048-85BDC9FD1C3A}</a:tableStyleId>
               </a:tblPr>
               <a:tblGrid>
-                <a:gridCol w="1584916"/>
-                <a:gridCol w="2575489"/>
-                <a:gridCol w="2773603"/>
-                <a:gridCol w="4160405"/>
+                <a:gridCol w="1584916">
+                  <a:extLst>
+                    <a:ext uri="{9D8B030D-6E8A-4147-A177-3AD203B41FA5}">
+                      <a16:colId xmlns:a16="http://schemas.microsoft.com/office/drawing/2014/main" val="20000"/>
+                    </a:ext>
+                  </a:extLst>
+                </a:gridCol>
+                <a:gridCol w="2575489">
+                  <a:extLst>
+                    <a:ext uri="{9D8B030D-6E8A-4147-A177-3AD203B41FA5}">
+                      <a16:colId xmlns:a16="http://schemas.microsoft.com/office/drawing/2014/main" val="20001"/>
+                    </a:ext>
+                  </a:extLst>
+                </a:gridCol>
+                <a:gridCol w="2773603">
+                  <a:extLst>
+                    <a:ext uri="{9D8B030D-6E8A-4147-A177-3AD203B41FA5}">
+                      <a16:colId xmlns:a16="http://schemas.microsoft.com/office/drawing/2014/main" val="20002"/>
+                    </a:ext>
+                  </a:extLst>
+                </a:gridCol>
+                <a:gridCol w="4160405">
+                  <a:extLst>
+                    <a:ext uri="{9D8B030D-6E8A-4147-A177-3AD203B41FA5}">
+                      <a16:colId xmlns:a16="http://schemas.microsoft.com/office/drawing/2014/main" val="20003"/>
+                    </a:ext>
+                  </a:extLst>
+                </a:gridCol>
               </a:tblGrid>
               <a:tr h="868680">
                 <a:tc>
@@ -13684,6 +13712,11 @@
                     </a:solidFill>
                   </a:tcPr>
                 </a:tc>
+                <a:extLst>
+                  <a:ext uri="{0D108BD9-81ED-4DB2-BD59-A6C34878D82A}">
+                    <a16:rowId xmlns:a16="http://schemas.microsoft.com/office/drawing/2014/main" val="10000"/>
+                  </a:ext>
+                </a:extLst>
               </a:tr>
               <a:tr h="868680">
                 <a:tc>
@@ -13778,6 +13811,11 @@
                     </a:solidFill>
                   </a:tcPr>
                 </a:tc>
+                <a:extLst>
+                  <a:ext uri="{0D108BD9-81ED-4DB2-BD59-A6C34878D82A}">
+                    <a16:rowId xmlns:a16="http://schemas.microsoft.com/office/drawing/2014/main" val="10001"/>
+                  </a:ext>
+                </a:extLst>
               </a:tr>
               <a:tr h="868680">
                 <a:tc>
@@ -13872,6 +13910,11 @@
                     </a:solidFill>
                   </a:tcPr>
                 </a:tc>
+                <a:extLst>
+                  <a:ext uri="{0D108BD9-81ED-4DB2-BD59-A6C34878D82A}">
+                    <a16:rowId xmlns:a16="http://schemas.microsoft.com/office/drawing/2014/main" val="10002"/>
+                  </a:ext>
+                </a:extLst>
               </a:tr>
               <a:tr h="868680">
                 <a:tc>
@@ -13966,6 +14009,11 @@
                     </a:solidFill>
                   </a:tcPr>
                 </a:tc>
+                <a:extLst>
+                  <a:ext uri="{0D108BD9-81ED-4DB2-BD59-A6C34878D82A}">
+                    <a16:rowId xmlns:a16="http://schemas.microsoft.com/office/drawing/2014/main" val="10003"/>
+                  </a:ext>
+                </a:extLst>
               </a:tr>
             </a:tbl>
           </a:graphicData>
@@ -13988,7 +14036,7 @@
           <a:noFill/>
         </p:spPr>
         <p:txBody>
-          <a:bodyPr wrap="square" anchor="t" lIns="45720" rIns="45720" tIns="27432" bIns="27432">
+          <a:bodyPr wrap="square" lIns="45720" tIns="27432" rIns="45720" bIns="27432" anchor="t">
             <a:spAutoFit/>
           </a:bodyPr>
           <a:lstStyle/>
@@ -14015,7 +14063,7 @@
 </file>
 
 <file path=ppt/slides/slide5.xml><?xml version="1.0" encoding="utf-8"?>
-<p:sld xmlns:a="http://schemas.openxmlformats.org/drawingml/2006/main" xmlns:p="http://schemas.openxmlformats.org/presentationml/2006/main" xmlns:r="http://schemas.openxmlformats.org/officeDocument/2006/relationships">
+<p:sld xmlns:a="http://schemas.openxmlformats.org/drawingml/2006/main" xmlns:r="http://schemas.openxmlformats.org/officeDocument/2006/relationships" xmlns:p="http://schemas.openxmlformats.org/presentationml/2006/main">
   <p:cSld>
     <p:spTree>
       <p:nvGrpSpPr>
@@ -14023,7 +14071,14 @@
         <p:cNvGrpSpPr/>
         <p:nvPr/>
       </p:nvGrpSpPr>
-      <p:grpSpPr/>
+      <p:grpSpPr>
+        <a:xfrm>
+          <a:off x="0" y="0"/>
+          <a:ext cx="0" cy="0"/>
+          <a:chOff x="0" y="0"/>
+          <a:chExt cx="0" cy="0"/>
+        </a:xfrm>
+      </p:grpSpPr>
       <p:sp>
         <p:nvSpPr>
           <p:cNvPr id="2" name="Rectangle 1"/>
@@ -14064,6 +14119,7 @@
           <a:lstStyle/>
           <a:p>
             <a:pPr algn="ctr"/>
+            <a:endParaRPr/>
           </a:p>
         </p:txBody>
       </p:sp>
@@ -14084,7 +14140,7 @@
           <a:noFill/>
         </p:spPr>
         <p:txBody>
-          <a:bodyPr wrap="square" anchor="ctr" lIns="45720" rIns="45720" tIns="27432" bIns="27432">
+          <a:bodyPr wrap="square" lIns="45720" tIns="27432" rIns="45720" bIns="27432" anchor="ctr">
             <a:spAutoFit/>
           </a:bodyPr>
           <a:lstStyle/>
@@ -14119,7 +14175,7 @@
           <a:noFill/>
         </p:spPr>
         <p:txBody>
-          <a:bodyPr wrap="square" anchor="t" lIns="45720" rIns="45720" tIns="27432" bIns="27432">
+          <a:bodyPr wrap="square" lIns="45720" tIns="27432" rIns="45720" bIns="27432" anchor="t">
             <a:spAutoFit/>
           </a:bodyPr>
           <a:lstStyle/>
@@ -14154,7 +14210,7 @@
           <a:noFill/>
         </p:spPr>
         <p:txBody>
-          <a:bodyPr wrap="square" anchor="t" lIns="45720" rIns="45720" tIns="27432" bIns="27432">
+          <a:bodyPr wrap="square" lIns="45720" tIns="27432" rIns="45720" bIns="27432" anchor="t">
             <a:spAutoFit/>
           </a:bodyPr>
           <a:lstStyle/>
@@ -14189,7 +14245,7 @@
           <a:noFill/>
         </p:spPr>
         <p:txBody>
-          <a:bodyPr wrap="square" anchor="t" lIns="45720" rIns="45720" tIns="27432" bIns="27432">
+          <a:bodyPr wrap="square" lIns="45720" tIns="27432" rIns="45720" bIns="27432" anchor="t">
             <a:spAutoFit/>
           </a:bodyPr>
           <a:lstStyle/>
@@ -14247,6 +14303,7 @@
           <a:lstStyle/>
           <a:p>
             <a:pPr algn="ctr"/>
+            <a:endParaRPr/>
           </a:p>
         </p:txBody>
       </p:sp>
@@ -14267,7 +14324,7 @@
           <a:noFill/>
         </p:spPr>
         <p:txBody>
-          <a:bodyPr wrap="square" anchor="t" lIns="45720" rIns="45720" tIns="27432" bIns="27432">
+          <a:bodyPr wrap="square" lIns="45720" tIns="27432" rIns="45720" bIns="27432" anchor="t">
             <a:spAutoFit/>
           </a:bodyPr>
           <a:lstStyle/>
@@ -14302,7 +14359,7 @@
           <a:noFill/>
         </p:spPr>
         <p:txBody>
-          <a:bodyPr wrap="square" anchor="t" lIns="45720" rIns="45720" tIns="27432" bIns="27432">
+          <a:bodyPr wrap="square" lIns="45720" tIns="27432" rIns="45720" bIns="27432" anchor="t">
             <a:spAutoFit/>
           </a:bodyPr>
           <a:lstStyle/>
@@ -14337,7 +14394,7 @@
           <a:noFill/>
         </p:spPr>
         <p:txBody>
-          <a:bodyPr wrap="square" anchor="t" lIns="45720" rIns="45720" tIns="27432" bIns="27432">
+          <a:bodyPr wrap="square" lIns="45720" tIns="27432" rIns="45720" bIns="27432" anchor="t">
             <a:spAutoFit/>
           </a:bodyPr>
           <a:lstStyle/>
@@ -14395,6 +14452,7 @@
           <a:lstStyle/>
           <a:p>
             <a:pPr algn="ctr"/>
+            <a:endParaRPr/>
           </a:p>
         </p:txBody>
       </p:sp>
@@ -14415,7 +14473,7 @@
           <a:noFill/>
         </p:spPr>
         <p:txBody>
-          <a:bodyPr wrap="square" anchor="t" lIns="45720" rIns="45720" tIns="27432" bIns="27432">
+          <a:bodyPr wrap="square" lIns="45720" tIns="27432" rIns="45720" bIns="27432" anchor="t">
             <a:spAutoFit/>
           </a:bodyPr>
           <a:lstStyle/>
@@ -14450,7 +14508,7 @@
           <a:noFill/>
         </p:spPr>
         <p:txBody>
-          <a:bodyPr wrap="square" anchor="t" lIns="45720" rIns="45720" tIns="27432" bIns="27432">
+          <a:bodyPr wrap="square" lIns="45720" tIns="27432" rIns="45720" bIns="27432" anchor="t">
             <a:spAutoFit/>
           </a:bodyPr>
           <a:lstStyle/>
@@ -14485,7 +14543,7 @@
           <a:noFill/>
         </p:spPr>
         <p:txBody>
-          <a:bodyPr wrap="square" anchor="t" lIns="45720" rIns="45720" tIns="27432" bIns="27432">
+          <a:bodyPr wrap="square" lIns="45720" tIns="27432" rIns="45720" bIns="27432" anchor="t">
             <a:spAutoFit/>
           </a:bodyPr>
           <a:lstStyle/>
@@ -14543,6 +14601,7 @@
           <a:lstStyle/>
           <a:p>
             <a:pPr algn="ctr"/>
+            <a:endParaRPr/>
           </a:p>
         </p:txBody>
       </p:sp>
@@ -14563,7 +14622,7 @@
           <a:noFill/>
         </p:spPr>
         <p:txBody>
-          <a:bodyPr wrap="square" anchor="t" lIns="45720" rIns="45720" tIns="27432" bIns="27432">
+          <a:bodyPr wrap="square" lIns="45720" tIns="27432" rIns="45720" bIns="27432" anchor="t">
             <a:spAutoFit/>
           </a:bodyPr>
           <a:lstStyle/>
@@ -14598,7 +14657,7 @@
           <a:noFill/>
         </p:spPr>
         <p:txBody>
-          <a:bodyPr wrap="square" anchor="t" lIns="45720" rIns="45720" tIns="27432" bIns="27432">
+          <a:bodyPr wrap="square" lIns="45720" tIns="27432" rIns="45720" bIns="27432" anchor="t">
             <a:spAutoFit/>
           </a:bodyPr>
           <a:lstStyle/>
@@ -14757,7 +14816,7 @@
 </file>
 
 <file path=ppt/slides/slide6.xml><?xml version="1.0" encoding="utf-8"?>
-<p:sld xmlns:a="http://schemas.openxmlformats.org/drawingml/2006/main" xmlns:p="http://schemas.openxmlformats.org/presentationml/2006/main" xmlns:r="http://schemas.openxmlformats.org/officeDocument/2006/relationships">
+<p:sld xmlns:a="http://schemas.openxmlformats.org/drawingml/2006/main" xmlns:r="http://schemas.openxmlformats.org/officeDocument/2006/relationships" xmlns:p="http://schemas.openxmlformats.org/presentationml/2006/main">
   <p:cSld>
     <p:spTree>
       <p:nvGrpSpPr>
@@ -14765,7 +14824,14 @@
         <p:cNvGrpSpPr/>
         <p:nvPr/>
       </p:nvGrpSpPr>
-      <p:grpSpPr/>
+      <p:grpSpPr>
+        <a:xfrm>
+          <a:off x="0" y="0"/>
+          <a:ext cx="0" cy="0"/>
+          <a:chOff x="0" y="0"/>
+          <a:chExt cx="0" cy="0"/>
+        </a:xfrm>
+      </p:grpSpPr>
       <p:sp>
         <p:nvSpPr>
           <p:cNvPr id="2" name="Rectangle 1"/>
@@ -14806,6 +14872,7 @@
           <a:lstStyle/>
           <a:p>
             <a:pPr algn="ctr"/>
+            <a:endParaRPr/>
           </a:p>
         </p:txBody>
       </p:sp>
@@ -14826,7 +14893,7 @@
           <a:noFill/>
         </p:spPr>
         <p:txBody>
-          <a:bodyPr wrap="square" anchor="ctr" lIns="45720" rIns="45720" tIns="27432" bIns="27432">
+          <a:bodyPr wrap="square" lIns="45720" tIns="27432" rIns="45720" bIns="27432" anchor="ctr">
             <a:spAutoFit/>
           </a:bodyPr>
           <a:lstStyle/>
@@ -14861,7 +14928,7 @@
           <a:noFill/>
         </p:spPr>
         <p:txBody>
-          <a:bodyPr wrap="square" anchor="t" lIns="45720" rIns="45720" tIns="27432" bIns="27432">
+          <a:bodyPr wrap="square" lIns="45720" tIns="27432" rIns="45720" bIns="27432" anchor="t">
             <a:spAutoFit/>
           </a:bodyPr>
           <a:lstStyle/>
@@ -14896,7 +14963,7 @@
           <a:noFill/>
         </p:spPr>
         <p:txBody>
-          <a:bodyPr wrap="square" anchor="t" lIns="45720" rIns="45720" tIns="27432" bIns="27432">
+          <a:bodyPr wrap="square" lIns="45720" tIns="27432" rIns="45720" bIns="27432" anchor="t">
             <a:spAutoFit/>
           </a:bodyPr>
           <a:lstStyle/>
@@ -14931,7 +14998,7 @@
           <a:noFill/>
         </p:spPr>
         <p:txBody>
-          <a:bodyPr wrap="square" anchor="t" lIns="45720" rIns="45720" tIns="27432" bIns="27432">
+          <a:bodyPr wrap="square" lIns="45720" tIns="27432" rIns="45720" bIns="27432" anchor="t">
             <a:spAutoFit/>
           </a:bodyPr>
           <a:lstStyle/>
@@ -14968,10 +15035,34 @@
                 <a:tableStyleId>{5C22544A-7EE6-4342-B048-85BDC9FD1C3A}</a:tableStyleId>
               </a:tblPr>
               <a:tblGrid>
-                <a:gridCol w="3141617"/>
-                <a:gridCol w="1127760"/>
-                <a:gridCol w="1208314"/>
-                <a:gridCol w="1288868"/>
+                <a:gridCol w="3141617">
+                  <a:extLst>
+                    <a:ext uri="{9D8B030D-6E8A-4147-A177-3AD203B41FA5}">
+                      <a16:colId xmlns:a16="http://schemas.microsoft.com/office/drawing/2014/main" val="20000"/>
+                    </a:ext>
+                  </a:extLst>
+                </a:gridCol>
+                <a:gridCol w="1127760">
+                  <a:extLst>
+                    <a:ext uri="{9D8B030D-6E8A-4147-A177-3AD203B41FA5}">
+                      <a16:colId xmlns:a16="http://schemas.microsoft.com/office/drawing/2014/main" val="20001"/>
+                    </a:ext>
+                  </a:extLst>
+                </a:gridCol>
+                <a:gridCol w="1208314">
+                  <a:extLst>
+                    <a:ext uri="{9D8B030D-6E8A-4147-A177-3AD203B41FA5}">
+                      <a16:colId xmlns:a16="http://schemas.microsoft.com/office/drawing/2014/main" val="20002"/>
+                    </a:ext>
+                  </a:extLst>
+                </a:gridCol>
+                <a:gridCol w="1288868">
+                  <a:extLst>
+                    <a:ext uri="{9D8B030D-6E8A-4147-A177-3AD203B41FA5}">
+                      <a16:colId xmlns:a16="http://schemas.microsoft.com/office/drawing/2014/main" val="20003"/>
+                    </a:ext>
+                  </a:extLst>
+                </a:gridCol>
               </a:tblGrid>
               <a:tr h="411480">
                 <a:tc>
@@ -15066,6 +15157,11 @@
                     </a:solidFill>
                   </a:tcPr>
                 </a:tc>
+                <a:extLst>
+                  <a:ext uri="{0D108BD9-81ED-4DB2-BD59-A6C34878D82A}">
+                    <a16:rowId xmlns:a16="http://schemas.microsoft.com/office/drawing/2014/main" val="10000"/>
+                  </a:ext>
+                </a:extLst>
               </a:tr>
               <a:tr h="411480">
                 <a:tc>
@@ -15160,6 +15256,11 @@
                     </a:solidFill>
                   </a:tcPr>
                 </a:tc>
+                <a:extLst>
+                  <a:ext uri="{0D108BD9-81ED-4DB2-BD59-A6C34878D82A}">
+                    <a16:rowId xmlns:a16="http://schemas.microsoft.com/office/drawing/2014/main" val="10001"/>
+                  </a:ext>
+                </a:extLst>
               </a:tr>
               <a:tr h="411480">
                 <a:tc>
@@ -15254,6 +15355,11 @@
                     </a:solidFill>
                   </a:tcPr>
                 </a:tc>
+                <a:extLst>
+                  <a:ext uri="{0D108BD9-81ED-4DB2-BD59-A6C34878D82A}">
+                    <a16:rowId xmlns:a16="http://schemas.microsoft.com/office/drawing/2014/main" val="10002"/>
+                  </a:ext>
+                </a:extLst>
               </a:tr>
               <a:tr h="411480">
                 <a:tc>
@@ -15348,6 +15454,11 @@
                     </a:solidFill>
                   </a:tcPr>
                 </a:tc>
+                <a:extLst>
+                  <a:ext uri="{0D108BD9-81ED-4DB2-BD59-A6C34878D82A}">
+                    <a16:rowId xmlns:a16="http://schemas.microsoft.com/office/drawing/2014/main" val="10003"/>
+                  </a:ext>
+                </a:extLst>
               </a:tr>
               <a:tr h="411480">
                 <a:tc>
@@ -15442,6 +15553,11 @@
                     </a:solidFill>
                   </a:tcPr>
                 </a:tc>
+                <a:extLst>
+                  <a:ext uri="{0D108BD9-81ED-4DB2-BD59-A6C34878D82A}">
+                    <a16:rowId xmlns:a16="http://schemas.microsoft.com/office/drawing/2014/main" val="10004"/>
+                  </a:ext>
+                </a:extLst>
               </a:tr>
               <a:tr h="411480">
                 <a:tc>
@@ -15536,6 +15652,11 @@
                     </a:solidFill>
                   </a:tcPr>
                 </a:tc>
+                <a:extLst>
+                  <a:ext uri="{0D108BD9-81ED-4DB2-BD59-A6C34878D82A}">
+                    <a16:rowId xmlns:a16="http://schemas.microsoft.com/office/drawing/2014/main" val="10005"/>
+                  </a:ext>
+                </a:extLst>
               </a:tr>
             </a:tbl>
           </a:graphicData>
@@ -15558,7 +15679,7 @@
           <a:noFill/>
         </p:spPr>
         <p:txBody>
-          <a:bodyPr wrap="square" anchor="t" lIns="45720" rIns="45720" tIns="27432" bIns="27432">
+          <a:bodyPr wrap="square" lIns="45720" tIns="27432" rIns="45720" bIns="27432" anchor="t">
             <a:spAutoFit/>
           </a:bodyPr>
           <a:lstStyle/>
@@ -15692,7 +15813,7 @@
 </file>
 
 <file path=ppt/slides/slide7.xml><?xml version="1.0" encoding="utf-8"?>
-<p:sld xmlns:a="http://schemas.openxmlformats.org/drawingml/2006/main" xmlns:p="http://schemas.openxmlformats.org/presentationml/2006/main" xmlns:r="http://schemas.openxmlformats.org/officeDocument/2006/relationships">
+<p:sld xmlns:a="http://schemas.openxmlformats.org/drawingml/2006/main" xmlns:r="http://schemas.openxmlformats.org/officeDocument/2006/relationships" xmlns:p="http://schemas.openxmlformats.org/presentationml/2006/main">
   <p:cSld>
     <p:spTree>
       <p:nvGrpSpPr>
@@ -15700,7 +15821,14 @@
         <p:cNvGrpSpPr/>
         <p:nvPr/>
       </p:nvGrpSpPr>
-      <p:grpSpPr/>
+      <p:grpSpPr>
+        <a:xfrm>
+          <a:off x="0" y="0"/>
+          <a:ext cx="0" cy="0"/>
+          <a:chOff x="0" y="0"/>
+          <a:chExt cx="0" cy="0"/>
+        </a:xfrm>
+      </p:grpSpPr>
       <p:sp>
         <p:nvSpPr>
           <p:cNvPr id="2" name="Rectangle 1"/>
@@ -15741,6 +15869,7 @@
           <a:lstStyle/>
           <a:p>
             <a:pPr algn="ctr"/>
+            <a:endParaRPr/>
           </a:p>
         </p:txBody>
       </p:sp>
@@ -15761,7 +15890,7 @@
           <a:noFill/>
         </p:spPr>
         <p:txBody>
-          <a:bodyPr wrap="square" anchor="ctr" lIns="45720" rIns="45720" tIns="27432" bIns="27432">
+          <a:bodyPr wrap="square" lIns="45720" tIns="27432" rIns="45720" bIns="27432" anchor="ctr">
             <a:spAutoFit/>
           </a:bodyPr>
           <a:lstStyle/>
@@ -15796,7 +15925,7 @@
           <a:noFill/>
         </p:spPr>
         <p:txBody>
-          <a:bodyPr wrap="square" anchor="t" lIns="45720" rIns="45720" tIns="27432" bIns="27432">
+          <a:bodyPr wrap="square" lIns="45720" tIns="27432" rIns="45720" bIns="27432" anchor="t">
             <a:spAutoFit/>
           </a:bodyPr>
           <a:lstStyle/>
@@ -15831,7 +15960,7 @@
           <a:noFill/>
         </p:spPr>
         <p:txBody>
-          <a:bodyPr wrap="square" anchor="t" lIns="45720" rIns="45720" tIns="27432" bIns="27432">
+          <a:bodyPr wrap="square" lIns="45720" tIns="27432" rIns="45720" bIns="27432" anchor="t">
             <a:spAutoFit/>
           </a:bodyPr>
           <a:lstStyle/>
@@ -15866,7 +15995,7 @@
           <a:noFill/>
         </p:spPr>
         <p:txBody>
-          <a:bodyPr wrap="square" anchor="t" lIns="45720" rIns="45720" tIns="27432" bIns="27432">
+          <a:bodyPr wrap="square" lIns="45720" tIns="27432" rIns="45720" bIns="27432" anchor="t">
             <a:spAutoFit/>
           </a:bodyPr>
           <a:lstStyle/>
@@ -15924,6 +16053,7 @@
           <a:lstStyle/>
           <a:p>
             <a:pPr algn="ctr"/>
+            <a:endParaRPr/>
           </a:p>
         </p:txBody>
       </p:sp>
@@ -15944,7 +16074,7 @@
           <a:noFill/>
         </p:spPr>
         <p:txBody>
-          <a:bodyPr wrap="square" anchor="ctr" lIns="45720" rIns="45720" tIns="27432" bIns="27432">
+          <a:bodyPr wrap="square" lIns="45720" tIns="27432" rIns="45720" bIns="27432" anchor="ctr">
             <a:spAutoFit/>
           </a:bodyPr>
           <a:lstStyle/>
@@ -15980,7 +16110,7 @@
           <a:noFill/>
         </p:spPr>
         <p:txBody>
-          <a:bodyPr wrap="square" anchor="t" lIns="45720" rIns="45720" tIns="27432" bIns="27432">
+          <a:bodyPr wrap="square" lIns="45720" tIns="27432" rIns="45720" bIns="27432" anchor="t">
             <a:spAutoFit/>
           </a:bodyPr>
           <a:lstStyle/>
@@ -16038,6 +16168,7 @@
           <a:lstStyle/>
           <a:p>
             <a:pPr algn="ctr"/>
+            <a:endParaRPr/>
           </a:p>
         </p:txBody>
       </p:sp>
@@ -16058,7 +16189,7 @@
           <a:noFill/>
         </p:spPr>
         <p:txBody>
-          <a:bodyPr wrap="square" anchor="ctr" lIns="45720" rIns="45720" tIns="27432" bIns="27432">
+          <a:bodyPr wrap="square" lIns="45720" tIns="27432" rIns="45720" bIns="27432" anchor="ctr">
             <a:spAutoFit/>
           </a:bodyPr>
           <a:lstStyle/>
@@ -16094,7 +16225,7 @@
           <a:noFill/>
         </p:spPr>
         <p:txBody>
-          <a:bodyPr wrap="square" anchor="t" lIns="45720" rIns="45720" tIns="27432" bIns="27432">
+          <a:bodyPr wrap="square" lIns="45720" tIns="27432" rIns="45720" bIns="27432" anchor="t">
             <a:spAutoFit/>
           </a:bodyPr>
           <a:lstStyle/>
@@ -16152,6 +16283,7 @@
           <a:lstStyle/>
           <a:p>
             <a:pPr algn="ctr"/>
+            <a:endParaRPr/>
           </a:p>
         </p:txBody>
       </p:sp>
@@ -16172,7 +16304,7 @@
           <a:noFill/>
         </p:spPr>
         <p:txBody>
-          <a:bodyPr wrap="square" anchor="ctr" lIns="45720" rIns="45720" tIns="27432" bIns="27432">
+          <a:bodyPr wrap="square" lIns="45720" tIns="27432" rIns="45720" bIns="27432" anchor="ctr">
             <a:spAutoFit/>
           </a:bodyPr>
           <a:lstStyle/>
@@ -16208,7 +16340,7 @@
           <a:noFill/>
         </p:spPr>
         <p:txBody>
-          <a:bodyPr wrap="square" anchor="t" lIns="45720" rIns="45720" tIns="27432" bIns="27432">
+          <a:bodyPr wrap="square" lIns="45720" tIns="27432" rIns="45720" bIns="27432" anchor="t">
             <a:spAutoFit/>
           </a:bodyPr>
           <a:lstStyle/>
@@ -16266,6 +16398,7 @@
           <a:lstStyle/>
           <a:p>
             <a:pPr algn="ctr"/>
+            <a:endParaRPr/>
           </a:p>
         </p:txBody>
       </p:sp>
@@ -16286,7 +16419,7 @@
           <a:noFill/>
         </p:spPr>
         <p:txBody>
-          <a:bodyPr wrap="square" anchor="ctr" lIns="45720" rIns="45720" tIns="27432" bIns="27432">
+          <a:bodyPr wrap="square" lIns="45720" tIns="27432" rIns="45720" bIns="27432" anchor="ctr">
             <a:spAutoFit/>
           </a:bodyPr>
           <a:lstStyle/>
@@ -16322,7 +16455,7 @@
           <a:noFill/>
         </p:spPr>
         <p:txBody>
-          <a:bodyPr wrap="square" anchor="t" lIns="45720" rIns="45720" tIns="27432" bIns="27432">
+          <a:bodyPr wrap="square" lIns="45720" tIns="27432" rIns="45720" bIns="27432" anchor="t">
             <a:spAutoFit/>
           </a:bodyPr>
           <a:lstStyle/>
@@ -16649,7 +16782,7 @@
 </file>
 
 <file path=ppt/slides/slide8.xml><?xml version="1.0" encoding="utf-8"?>
-<p:sld xmlns:a="http://schemas.openxmlformats.org/drawingml/2006/main" xmlns:p="http://schemas.openxmlformats.org/presentationml/2006/main" xmlns:r="http://schemas.openxmlformats.org/officeDocument/2006/relationships">
+<p:sld xmlns:a="http://schemas.openxmlformats.org/drawingml/2006/main" xmlns:r="http://schemas.openxmlformats.org/officeDocument/2006/relationships" xmlns:p="http://schemas.openxmlformats.org/presentationml/2006/main">
   <p:cSld>
     <p:spTree>
       <p:nvGrpSpPr>
@@ -16657,7 +16790,14 @@
         <p:cNvGrpSpPr/>
         <p:nvPr/>
       </p:nvGrpSpPr>
-      <p:grpSpPr/>
+      <p:grpSpPr>
+        <a:xfrm>
+          <a:off x="0" y="0"/>
+          <a:ext cx="0" cy="0"/>
+          <a:chOff x="0" y="0"/>
+          <a:chExt cx="0" cy="0"/>
+        </a:xfrm>
+      </p:grpSpPr>
       <p:sp>
         <p:nvSpPr>
           <p:cNvPr id="2" name="Rectangle 1"/>
@@ -16698,6 +16838,7 @@
           <a:lstStyle/>
           <a:p>
             <a:pPr algn="ctr"/>
+            <a:endParaRPr/>
           </a:p>
         </p:txBody>
       </p:sp>
@@ -16718,7 +16859,7 @@
           <a:noFill/>
         </p:spPr>
         <p:txBody>
-          <a:bodyPr wrap="square" anchor="ctr" lIns="45720" rIns="45720" tIns="27432" bIns="27432">
+          <a:bodyPr wrap="square" lIns="45720" tIns="27432" rIns="45720" bIns="27432" anchor="ctr">
             <a:spAutoFit/>
           </a:bodyPr>
           <a:lstStyle/>
@@ -16753,7 +16894,7 @@
           <a:noFill/>
         </p:spPr>
         <p:txBody>
-          <a:bodyPr wrap="square" anchor="t" lIns="45720" rIns="45720" tIns="27432" bIns="27432">
+          <a:bodyPr wrap="square" lIns="45720" tIns="27432" rIns="45720" bIns="27432" anchor="t">
             <a:spAutoFit/>
           </a:bodyPr>
           <a:lstStyle/>
@@ -16788,7 +16929,7 @@
           <a:noFill/>
         </p:spPr>
         <p:txBody>
-          <a:bodyPr wrap="square" anchor="t" lIns="45720" rIns="45720" tIns="27432" bIns="27432">
+          <a:bodyPr wrap="square" lIns="45720" tIns="27432" rIns="45720" bIns="27432" anchor="t">
             <a:spAutoFit/>
           </a:bodyPr>
           <a:lstStyle/>
@@ -16823,7 +16964,7 @@
           <a:noFill/>
         </p:spPr>
         <p:txBody>
-          <a:bodyPr wrap="square" anchor="t" lIns="45720" rIns="45720" tIns="27432" bIns="27432">
+          <a:bodyPr wrap="square" lIns="45720" tIns="27432" rIns="45720" bIns="27432" anchor="t">
             <a:spAutoFit/>
           </a:bodyPr>
           <a:lstStyle/>
@@ -16860,12 +17001,48 @@
                 <a:tableStyleId>{5C22544A-7EE6-4342-B048-85BDC9FD1C3A}</a:tableStyleId>
               </a:tblPr>
               <a:tblGrid>
-                <a:gridCol w="1985554"/>
-                <a:gridCol w="992777"/>
-                <a:gridCol w="916409"/>
-                <a:gridCol w="916409"/>
-                <a:gridCol w="1069144"/>
-                <a:gridCol w="1069144"/>
+                <a:gridCol w="1985554">
+                  <a:extLst>
+                    <a:ext uri="{9D8B030D-6E8A-4147-A177-3AD203B41FA5}">
+                      <a16:colId xmlns:a16="http://schemas.microsoft.com/office/drawing/2014/main" val="20000"/>
+                    </a:ext>
+                  </a:extLst>
+                </a:gridCol>
+                <a:gridCol w="992777">
+                  <a:extLst>
+                    <a:ext uri="{9D8B030D-6E8A-4147-A177-3AD203B41FA5}">
+                      <a16:colId xmlns:a16="http://schemas.microsoft.com/office/drawing/2014/main" val="20001"/>
+                    </a:ext>
+                  </a:extLst>
+                </a:gridCol>
+                <a:gridCol w="916409">
+                  <a:extLst>
+                    <a:ext uri="{9D8B030D-6E8A-4147-A177-3AD203B41FA5}">
+                      <a16:colId xmlns:a16="http://schemas.microsoft.com/office/drawing/2014/main" val="20002"/>
+                    </a:ext>
+                  </a:extLst>
+                </a:gridCol>
+                <a:gridCol w="916409">
+                  <a:extLst>
+                    <a:ext uri="{9D8B030D-6E8A-4147-A177-3AD203B41FA5}">
+                      <a16:colId xmlns:a16="http://schemas.microsoft.com/office/drawing/2014/main" val="20003"/>
+                    </a:ext>
+                  </a:extLst>
+                </a:gridCol>
+                <a:gridCol w="1069144">
+                  <a:extLst>
+                    <a:ext uri="{9D8B030D-6E8A-4147-A177-3AD203B41FA5}">
+                      <a16:colId xmlns:a16="http://schemas.microsoft.com/office/drawing/2014/main" val="20004"/>
+                    </a:ext>
+                  </a:extLst>
+                </a:gridCol>
+                <a:gridCol w="1069144">
+                  <a:extLst>
+                    <a:ext uri="{9D8B030D-6E8A-4147-A177-3AD203B41FA5}">
+                      <a16:colId xmlns:a16="http://schemas.microsoft.com/office/drawing/2014/main" val="20005"/>
+                    </a:ext>
+                  </a:extLst>
+                </a:gridCol>
               </a:tblGrid>
               <a:tr h="260603">
                 <a:tc>
@@ -17006,6 +17183,11 @@
                     </a:solidFill>
                   </a:tcPr>
                 </a:tc>
+                <a:extLst>
+                  <a:ext uri="{0D108BD9-81ED-4DB2-BD59-A6C34878D82A}">
+                    <a16:rowId xmlns:a16="http://schemas.microsoft.com/office/drawing/2014/main" val="10000"/>
+                  </a:ext>
+                </a:extLst>
               </a:tr>
               <a:tr h="260603">
                 <a:tc gridSpan="6">
@@ -17037,15 +17219,7 @@
                     <a:lstStyle/>
                     <a:p>
                       <a:pPr algn="l"/>
-                      <a:r>
-                        <a:rPr sz="1200" b="0" i="0">
-                          <a:solidFill>
-                            <a:srgbClr val="1A1A1A"/>
-                          </a:solidFill>
-                          <a:latin typeface="Calibri"/>
-                        </a:rPr>
-                        <a:t/>
-                      </a:r>
+                      <a:endParaRPr/>
                     </a:p>
                   </a:txBody>
                   <a:tcPr marL="54864" marR="54864" marT="18288" marB="18288" anchor="ctr">
@@ -17060,15 +17234,7 @@
                     <a:lstStyle/>
                     <a:p>
                       <a:pPr algn="l"/>
-                      <a:r>
-                        <a:rPr sz="1200" b="0" i="0">
-                          <a:solidFill>
-                            <a:srgbClr val="1A1A1A"/>
-                          </a:solidFill>
-                          <a:latin typeface="Calibri"/>
-                        </a:rPr>
-                        <a:t/>
-                      </a:r>
+                      <a:endParaRPr/>
                     </a:p>
                   </a:txBody>
                   <a:tcPr marL="54864" marR="54864" marT="18288" marB="18288" anchor="ctr">
@@ -17083,15 +17249,7 @@
                     <a:lstStyle/>
                     <a:p>
                       <a:pPr algn="l"/>
-                      <a:r>
-                        <a:rPr sz="1200" b="0" i="0">
-                          <a:solidFill>
-                            <a:srgbClr val="1A1A1A"/>
-                          </a:solidFill>
-                          <a:latin typeface="Calibri"/>
-                        </a:rPr>
-                        <a:t/>
-                      </a:r>
+                      <a:endParaRPr/>
                     </a:p>
                   </a:txBody>
                   <a:tcPr marL="54864" marR="54864" marT="18288" marB="18288" anchor="ctr">
@@ -17106,15 +17264,7 @@
                     <a:lstStyle/>
                     <a:p>
                       <a:pPr algn="l"/>
-                      <a:r>
-                        <a:rPr sz="1200" b="0" i="0">
-                          <a:solidFill>
-                            <a:srgbClr val="1A1A1A"/>
-                          </a:solidFill>
-                          <a:latin typeface="Calibri"/>
-                        </a:rPr>
-                        <a:t/>
-                      </a:r>
+                      <a:endParaRPr/>
                     </a:p>
                   </a:txBody>
                   <a:tcPr marL="54864" marR="54864" marT="18288" marB="18288" anchor="ctr">
@@ -17129,15 +17279,7 @@
                     <a:lstStyle/>
                     <a:p>
                       <a:pPr algn="l"/>
-                      <a:r>
-                        <a:rPr sz="1200" b="0" i="0">
-                          <a:solidFill>
-                            <a:srgbClr val="1A1A1A"/>
-                          </a:solidFill>
-                          <a:latin typeface="Calibri"/>
-                        </a:rPr>
-                        <a:t/>
-                      </a:r>
+                      <a:endParaRPr/>
                     </a:p>
                   </a:txBody>
                   <a:tcPr marL="54864" marR="54864" marT="18288" marB="18288" anchor="ctr">
@@ -17146,6 +17288,11 @@
                     </a:solidFill>
                   </a:tcPr>
                 </a:tc>
+                <a:extLst>
+                  <a:ext uri="{0D108BD9-81ED-4DB2-BD59-A6C34878D82A}">
+                    <a16:rowId xmlns:a16="http://schemas.microsoft.com/office/drawing/2014/main" val="10001"/>
+                  </a:ext>
+                </a:extLst>
               </a:tr>
               <a:tr h="260603">
                 <a:tc>
@@ -17286,6 +17433,11 @@
                     </a:solidFill>
                   </a:tcPr>
                 </a:tc>
+                <a:extLst>
+                  <a:ext uri="{0D108BD9-81ED-4DB2-BD59-A6C34878D82A}">
+                    <a16:rowId xmlns:a16="http://schemas.microsoft.com/office/drawing/2014/main" val="10002"/>
+                  </a:ext>
+                </a:extLst>
               </a:tr>
               <a:tr h="260603">
                 <a:tc>
@@ -17426,6 +17578,11 @@
                     </a:solidFill>
                   </a:tcPr>
                 </a:tc>
+                <a:extLst>
+                  <a:ext uri="{0D108BD9-81ED-4DB2-BD59-A6C34878D82A}">
+                    <a16:rowId xmlns:a16="http://schemas.microsoft.com/office/drawing/2014/main" val="10003"/>
+                  </a:ext>
+                </a:extLst>
               </a:tr>
               <a:tr h="260603">
                 <a:tc>
@@ -17566,6 +17723,11 @@
                     </a:solidFill>
                   </a:tcPr>
                 </a:tc>
+                <a:extLst>
+                  <a:ext uri="{0D108BD9-81ED-4DB2-BD59-A6C34878D82A}">
+                    <a16:rowId xmlns:a16="http://schemas.microsoft.com/office/drawing/2014/main" val="10004"/>
+                  </a:ext>
+                </a:extLst>
               </a:tr>
               <a:tr h="260603">
                 <a:tc gridSpan="6">
@@ -17597,15 +17759,7 @@
                     <a:lstStyle/>
                     <a:p>
                       <a:pPr algn="l"/>
-                      <a:r>
-                        <a:rPr sz="1200" b="0" i="0">
-                          <a:solidFill>
-                            <a:srgbClr val="1A1A1A"/>
-                          </a:solidFill>
-                          <a:latin typeface="Calibri"/>
-                        </a:rPr>
-                        <a:t/>
-                      </a:r>
+                      <a:endParaRPr/>
                     </a:p>
                   </a:txBody>
                   <a:tcPr marL="54864" marR="54864" marT="18288" marB="18288" anchor="ctr">
@@ -17620,15 +17774,7 @@
                     <a:lstStyle/>
                     <a:p>
                       <a:pPr algn="l"/>
-                      <a:r>
-                        <a:rPr sz="1200" b="0" i="0">
-                          <a:solidFill>
-                            <a:srgbClr val="1A1A1A"/>
-                          </a:solidFill>
-                          <a:latin typeface="Calibri"/>
-                        </a:rPr>
-                        <a:t/>
-                      </a:r>
+                      <a:endParaRPr/>
                     </a:p>
                   </a:txBody>
                   <a:tcPr marL="54864" marR="54864" marT="18288" marB="18288" anchor="ctr">
@@ -17643,15 +17789,7 @@
                     <a:lstStyle/>
                     <a:p>
                       <a:pPr algn="l"/>
-                      <a:r>
-                        <a:rPr sz="1200" b="0" i="0">
-                          <a:solidFill>
-                            <a:srgbClr val="1A1A1A"/>
-                          </a:solidFill>
-                          <a:latin typeface="Calibri"/>
-                        </a:rPr>
-                        <a:t/>
-                      </a:r>
+                      <a:endParaRPr/>
                     </a:p>
                   </a:txBody>
                   <a:tcPr marL="54864" marR="54864" marT="18288" marB="18288" anchor="ctr">
@@ -17666,15 +17804,7 @@
                     <a:lstStyle/>
                     <a:p>
                       <a:pPr algn="l"/>
-                      <a:r>
-                        <a:rPr sz="1200" b="0" i="0">
-                          <a:solidFill>
-                            <a:srgbClr val="1A1A1A"/>
-                          </a:solidFill>
-                          <a:latin typeface="Calibri"/>
-                        </a:rPr>
-                        <a:t/>
-                      </a:r>
+                      <a:endParaRPr/>
                     </a:p>
                   </a:txBody>
                   <a:tcPr marL="54864" marR="54864" marT="18288" marB="18288" anchor="ctr">
@@ -17689,15 +17819,7 @@
                     <a:lstStyle/>
                     <a:p>
                       <a:pPr algn="l"/>
-                      <a:r>
-                        <a:rPr sz="1200" b="0" i="0">
-                          <a:solidFill>
-                            <a:srgbClr val="1A1A1A"/>
-                          </a:solidFill>
-                          <a:latin typeface="Calibri"/>
-                        </a:rPr>
-                        <a:t/>
-                      </a:r>
+                      <a:endParaRPr/>
                     </a:p>
                   </a:txBody>
                   <a:tcPr marL="54864" marR="54864" marT="18288" marB="18288" anchor="ctr">
@@ -17706,6 +17828,11 @@
                     </a:solidFill>
                   </a:tcPr>
                 </a:tc>
+                <a:extLst>
+                  <a:ext uri="{0D108BD9-81ED-4DB2-BD59-A6C34878D82A}">
+                    <a16:rowId xmlns:a16="http://schemas.microsoft.com/office/drawing/2014/main" val="10005"/>
+                  </a:ext>
+                </a:extLst>
               </a:tr>
               <a:tr h="260603">
                 <a:tc>
@@ -17846,6 +17973,11 @@
                     </a:solidFill>
                   </a:tcPr>
                 </a:tc>
+                <a:extLst>
+                  <a:ext uri="{0D108BD9-81ED-4DB2-BD59-A6C34878D82A}">
+                    <a16:rowId xmlns:a16="http://schemas.microsoft.com/office/drawing/2014/main" val="10006"/>
+                  </a:ext>
+                </a:extLst>
               </a:tr>
               <a:tr h="260603">
                 <a:tc>
@@ -17986,6 +18118,11 @@
                     </a:solidFill>
                   </a:tcPr>
                 </a:tc>
+                <a:extLst>
+                  <a:ext uri="{0D108BD9-81ED-4DB2-BD59-A6C34878D82A}">
+                    <a16:rowId xmlns:a16="http://schemas.microsoft.com/office/drawing/2014/main" val="10007"/>
+                  </a:ext>
+                </a:extLst>
               </a:tr>
               <a:tr h="260603">
                 <a:tc>
@@ -18126,6 +18263,11 @@
                     </a:solidFill>
                   </a:tcPr>
                 </a:tc>
+                <a:extLst>
+                  <a:ext uri="{0D108BD9-81ED-4DB2-BD59-A6C34878D82A}">
+                    <a16:rowId xmlns:a16="http://schemas.microsoft.com/office/drawing/2014/main" val="10008"/>
+                  </a:ext>
+                </a:extLst>
               </a:tr>
               <a:tr h="260603">
                 <a:tc>
@@ -18266,6 +18408,11 @@
                     </a:solidFill>
                   </a:tcPr>
                 </a:tc>
+                <a:extLst>
+                  <a:ext uri="{0D108BD9-81ED-4DB2-BD59-A6C34878D82A}">
+                    <a16:rowId xmlns:a16="http://schemas.microsoft.com/office/drawing/2014/main" val="10009"/>
+                  </a:ext>
+                </a:extLst>
               </a:tr>
               <a:tr h="260603">
                 <a:tc gridSpan="6">
@@ -18297,15 +18444,7 @@
                     <a:lstStyle/>
                     <a:p>
                       <a:pPr algn="l"/>
-                      <a:r>
-                        <a:rPr sz="1200" b="0" i="0">
-                          <a:solidFill>
-                            <a:srgbClr val="1A1A1A"/>
-                          </a:solidFill>
-                          <a:latin typeface="Calibri"/>
-                        </a:rPr>
-                        <a:t/>
-                      </a:r>
+                      <a:endParaRPr/>
                     </a:p>
                   </a:txBody>
                   <a:tcPr marL="54864" marR="54864" marT="18288" marB="18288" anchor="ctr">
@@ -18320,15 +18459,7 @@
                     <a:lstStyle/>
                     <a:p>
                       <a:pPr algn="l"/>
-                      <a:r>
-                        <a:rPr sz="1200" b="0" i="0">
-                          <a:solidFill>
-                            <a:srgbClr val="1A1A1A"/>
-                          </a:solidFill>
-                          <a:latin typeface="Calibri"/>
-                        </a:rPr>
-                        <a:t/>
-                      </a:r>
+                      <a:endParaRPr/>
                     </a:p>
                   </a:txBody>
                   <a:tcPr marL="54864" marR="54864" marT="18288" marB="18288" anchor="ctr">
@@ -18343,15 +18474,7 @@
                     <a:lstStyle/>
                     <a:p>
                       <a:pPr algn="l"/>
-                      <a:r>
-                        <a:rPr sz="1200" b="0" i="0">
-                          <a:solidFill>
-                            <a:srgbClr val="1A1A1A"/>
-                          </a:solidFill>
-                          <a:latin typeface="Calibri"/>
-                        </a:rPr>
-                        <a:t/>
-                      </a:r>
+                      <a:endParaRPr/>
                     </a:p>
                   </a:txBody>
                   <a:tcPr marL="54864" marR="54864" marT="18288" marB="18288" anchor="ctr">
@@ -18366,15 +18489,7 @@
                     <a:lstStyle/>
                     <a:p>
                       <a:pPr algn="l"/>
-                      <a:r>
-                        <a:rPr sz="1200" b="0" i="0">
-                          <a:solidFill>
-                            <a:srgbClr val="1A1A1A"/>
-                          </a:solidFill>
-                          <a:latin typeface="Calibri"/>
-                        </a:rPr>
-                        <a:t/>
-                      </a:r>
+                      <a:endParaRPr/>
                     </a:p>
                   </a:txBody>
                   <a:tcPr marL="54864" marR="54864" marT="18288" marB="18288" anchor="ctr">
@@ -18389,15 +18504,7 @@
                     <a:lstStyle/>
                     <a:p>
                       <a:pPr algn="l"/>
-                      <a:r>
-                        <a:rPr sz="1200" b="0" i="0">
-                          <a:solidFill>
-                            <a:srgbClr val="1A1A1A"/>
-                          </a:solidFill>
-                          <a:latin typeface="Calibri"/>
-                        </a:rPr>
-                        <a:t/>
-                      </a:r>
+                      <a:endParaRPr/>
                     </a:p>
                   </a:txBody>
                   <a:tcPr marL="54864" marR="54864" marT="18288" marB="18288" anchor="ctr">
@@ -18406,6 +18513,11 @@
                     </a:solidFill>
                   </a:tcPr>
                 </a:tc>
+                <a:extLst>
+                  <a:ext uri="{0D108BD9-81ED-4DB2-BD59-A6C34878D82A}">
+                    <a16:rowId xmlns:a16="http://schemas.microsoft.com/office/drawing/2014/main" val="10010"/>
+                  </a:ext>
+                </a:extLst>
               </a:tr>
               <a:tr h="260603">
                 <a:tc>
@@ -18546,6 +18658,11 @@
                     </a:solidFill>
                   </a:tcPr>
                 </a:tc>
+                <a:extLst>
+                  <a:ext uri="{0D108BD9-81ED-4DB2-BD59-A6C34878D82A}">
+                    <a16:rowId xmlns:a16="http://schemas.microsoft.com/office/drawing/2014/main" val="10011"/>
+                  </a:ext>
+                </a:extLst>
               </a:tr>
               <a:tr h="260603">
                 <a:tc>
@@ -18686,6 +18803,11 @@
                     </a:solidFill>
                   </a:tcPr>
                 </a:tc>
+                <a:extLst>
+                  <a:ext uri="{0D108BD9-81ED-4DB2-BD59-A6C34878D82A}">
+                    <a16:rowId xmlns:a16="http://schemas.microsoft.com/office/drawing/2014/main" val="10012"/>
+                  </a:ext>
+                </a:extLst>
               </a:tr>
               <a:tr h="260603">
                 <a:tc gridSpan="6">
@@ -18717,15 +18839,7 @@
                     <a:lstStyle/>
                     <a:p>
                       <a:pPr algn="l"/>
-                      <a:r>
-                        <a:rPr sz="1200" b="0" i="0">
-                          <a:solidFill>
-                            <a:srgbClr val="1A1A1A"/>
-                          </a:solidFill>
-                          <a:latin typeface="Calibri"/>
-                        </a:rPr>
-                        <a:t/>
-                      </a:r>
+                      <a:endParaRPr/>
                     </a:p>
                   </a:txBody>
                   <a:tcPr marL="54864" marR="54864" marT="18288" marB="18288" anchor="ctr">
@@ -18740,15 +18854,7 @@
                     <a:lstStyle/>
                     <a:p>
                       <a:pPr algn="l"/>
-                      <a:r>
-                        <a:rPr sz="1200" b="0" i="0">
-                          <a:solidFill>
-                            <a:srgbClr val="1A1A1A"/>
-                          </a:solidFill>
-                          <a:latin typeface="Calibri"/>
-                        </a:rPr>
-                        <a:t/>
-                      </a:r>
+                      <a:endParaRPr/>
                     </a:p>
                   </a:txBody>
                   <a:tcPr marL="54864" marR="54864" marT="18288" marB="18288" anchor="ctr">
@@ -18763,15 +18869,7 @@
                     <a:lstStyle/>
                     <a:p>
                       <a:pPr algn="l"/>
-                      <a:r>
-                        <a:rPr sz="1200" b="0" i="0">
-                          <a:solidFill>
-                            <a:srgbClr val="1A1A1A"/>
-                          </a:solidFill>
-                          <a:latin typeface="Calibri"/>
-                        </a:rPr>
-                        <a:t/>
-                      </a:r>
+                      <a:endParaRPr/>
                     </a:p>
                   </a:txBody>
                   <a:tcPr marL="54864" marR="54864" marT="18288" marB="18288" anchor="ctr">
@@ -18786,15 +18884,7 @@
                     <a:lstStyle/>
                     <a:p>
                       <a:pPr algn="l"/>
-                      <a:r>
-                        <a:rPr sz="1200" b="0" i="0">
-                          <a:solidFill>
-                            <a:srgbClr val="1A1A1A"/>
-                          </a:solidFill>
-                          <a:latin typeface="Calibri"/>
-                        </a:rPr>
-                        <a:t/>
-                      </a:r>
+                      <a:endParaRPr/>
                     </a:p>
                   </a:txBody>
                   <a:tcPr marL="54864" marR="54864" marT="18288" marB="18288" anchor="ctr">
@@ -18809,15 +18899,7 @@
                     <a:lstStyle/>
                     <a:p>
                       <a:pPr algn="l"/>
-                      <a:r>
-                        <a:rPr sz="1200" b="0" i="0">
-                          <a:solidFill>
-                            <a:srgbClr val="1A1A1A"/>
-                          </a:solidFill>
-                          <a:latin typeface="Calibri"/>
-                        </a:rPr>
-                        <a:t/>
-                      </a:r>
+                      <a:endParaRPr/>
                     </a:p>
                   </a:txBody>
                   <a:tcPr marL="54864" marR="54864" marT="18288" marB="18288" anchor="ctr">
@@ -18826,6 +18908,11 @@
                     </a:solidFill>
                   </a:tcPr>
                 </a:tc>
+                <a:extLst>
+                  <a:ext uri="{0D108BD9-81ED-4DB2-BD59-A6C34878D82A}">
+                    <a16:rowId xmlns:a16="http://schemas.microsoft.com/office/drawing/2014/main" val="10013"/>
+                  </a:ext>
+                </a:extLst>
               </a:tr>
               <a:tr h="260603">
                 <a:tc>
@@ -18966,6 +19053,11 @@
                     </a:solidFill>
                   </a:tcPr>
                 </a:tc>
+                <a:extLst>
+                  <a:ext uri="{0D108BD9-81ED-4DB2-BD59-A6C34878D82A}">
+                    <a16:rowId xmlns:a16="http://schemas.microsoft.com/office/drawing/2014/main" val="10014"/>
+                  </a:ext>
+                </a:extLst>
               </a:tr>
               <a:tr h="260603">
                 <a:tc>
@@ -19106,6 +19198,11 @@
                     </a:solidFill>
                   </a:tcPr>
                 </a:tc>
+                <a:extLst>
+                  <a:ext uri="{0D108BD9-81ED-4DB2-BD59-A6C34878D82A}">
+                    <a16:rowId xmlns:a16="http://schemas.microsoft.com/office/drawing/2014/main" val="10015"/>
+                  </a:ext>
+                </a:extLst>
               </a:tr>
               <a:tr h="260603">
                 <a:tc>
@@ -19246,6 +19343,11 @@
                     </a:solidFill>
                   </a:tcPr>
                 </a:tc>
+                <a:extLst>
+                  <a:ext uri="{0D108BD9-81ED-4DB2-BD59-A6C34878D82A}">
+                    <a16:rowId xmlns:a16="http://schemas.microsoft.com/office/drawing/2014/main" val="10016"/>
+                  </a:ext>
+                </a:extLst>
               </a:tr>
               <a:tr h="260603">
                 <a:tc>
@@ -19386,6 +19488,11 @@
                     </a:solidFill>
                   </a:tcPr>
                 </a:tc>
+                <a:extLst>
+                  <a:ext uri="{0D108BD9-81ED-4DB2-BD59-A6C34878D82A}">
+                    <a16:rowId xmlns:a16="http://schemas.microsoft.com/office/drawing/2014/main" val="10017"/>
+                  </a:ext>
+                </a:extLst>
               </a:tr>
             </a:tbl>
           </a:graphicData>
@@ -19600,7 +19707,7 @@
 </file>
 
 <file path=ppt/slides/slide9.xml><?xml version="1.0" encoding="utf-8"?>
-<p:sld xmlns:a="http://schemas.openxmlformats.org/drawingml/2006/main" xmlns:p="http://schemas.openxmlformats.org/presentationml/2006/main" xmlns:r="http://schemas.openxmlformats.org/officeDocument/2006/relationships">
+<p:sld xmlns:a="http://schemas.openxmlformats.org/drawingml/2006/main" xmlns:r="http://schemas.openxmlformats.org/officeDocument/2006/relationships" xmlns:p="http://schemas.openxmlformats.org/presentationml/2006/main">
   <p:cSld>
     <p:spTree>
       <p:nvGrpSpPr>
@@ -19608,7 +19715,14 @@
         <p:cNvGrpSpPr/>
         <p:nvPr/>
       </p:nvGrpSpPr>
-      <p:grpSpPr/>
+      <p:grpSpPr>
+        <a:xfrm>
+          <a:off x="0" y="0"/>
+          <a:ext cx="0" cy="0"/>
+          <a:chOff x="0" y="0"/>
+          <a:chExt cx="0" cy="0"/>
+        </a:xfrm>
+      </p:grpSpPr>
       <p:sp>
         <p:nvSpPr>
           <p:cNvPr id="2" name="Rectangle 1"/>
@@ -19649,6 +19763,7 @@
           <a:lstStyle/>
           <a:p>
             <a:pPr algn="ctr"/>
+            <a:endParaRPr/>
           </a:p>
         </p:txBody>
       </p:sp>
@@ -19669,7 +19784,7 @@
           <a:noFill/>
         </p:spPr>
         <p:txBody>
-          <a:bodyPr wrap="square" anchor="ctr" lIns="45720" rIns="45720" tIns="27432" bIns="27432">
+          <a:bodyPr wrap="square" lIns="45720" tIns="27432" rIns="45720" bIns="27432" anchor="ctr">
             <a:spAutoFit/>
           </a:bodyPr>
           <a:lstStyle/>
@@ -19704,7 +19819,7 @@
           <a:noFill/>
         </p:spPr>
         <p:txBody>
-          <a:bodyPr wrap="square" anchor="t" lIns="45720" rIns="45720" tIns="27432" bIns="27432">
+          <a:bodyPr wrap="square" lIns="45720" tIns="27432" rIns="45720" bIns="27432" anchor="t">
             <a:spAutoFit/>
           </a:bodyPr>
           <a:lstStyle/>
@@ -19739,7 +19854,7 @@
           <a:noFill/>
         </p:spPr>
         <p:txBody>
-          <a:bodyPr wrap="square" anchor="t" lIns="45720" rIns="45720" tIns="27432" bIns="27432">
+          <a:bodyPr wrap="square" lIns="45720" tIns="27432" rIns="45720" bIns="27432" anchor="t">
             <a:spAutoFit/>
           </a:bodyPr>
           <a:lstStyle/>
@@ -19774,7 +19889,7 @@
           <a:noFill/>
         </p:spPr>
         <p:txBody>
-          <a:bodyPr wrap="square" anchor="t" lIns="45720" rIns="45720" tIns="27432" bIns="27432">
+          <a:bodyPr wrap="square" lIns="45720" tIns="27432" rIns="45720" bIns="27432" anchor="t">
             <a:spAutoFit/>
           </a:bodyPr>
           <a:lstStyle/>
@@ -19802,7 +19917,7 @@
         </p:nvGraphicFramePr>
         <p:xfrm>
           <a:off x="548640" y="1234440"/>
-          <a:ext cx="7680956" cy="3291840"/>
+          <a:ext cx="7680956" cy="3358896"/>
         </p:xfrm>
         <a:graphic>
           <a:graphicData uri="http://schemas.openxmlformats.org/drawingml/2006/table">
@@ -19811,13 +19926,55 @@
                 <a:tableStyleId>{5C22544A-7EE6-4342-B048-85BDC9FD1C3A}</a:tableStyleId>
               </a:tblPr>
               <a:tblGrid>
-                <a:gridCol w="2386317"/>
-                <a:gridCol w="969441"/>
-                <a:gridCol w="671151"/>
-                <a:gridCol w="969441"/>
-                <a:gridCol w="969441"/>
-                <a:gridCol w="894869"/>
-                <a:gridCol w="820296"/>
+                <a:gridCol w="2386317">
+                  <a:extLst>
+                    <a:ext uri="{9D8B030D-6E8A-4147-A177-3AD203B41FA5}">
+                      <a16:colId xmlns:a16="http://schemas.microsoft.com/office/drawing/2014/main" val="20000"/>
+                    </a:ext>
+                  </a:extLst>
+                </a:gridCol>
+                <a:gridCol w="969441">
+                  <a:extLst>
+                    <a:ext uri="{9D8B030D-6E8A-4147-A177-3AD203B41FA5}">
+                      <a16:colId xmlns:a16="http://schemas.microsoft.com/office/drawing/2014/main" val="20001"/>
+                    </a:ext>
+                  </a:extLst>
+                </a:gridCol>
+                <a:gridCol w="671151">
+                  <a:extLst>
+                    <a:ext uri="{9D8B030D-6E8A-4147-A177-3AD203B41FA5}">
+                      <a16:colId xmlns:a16="http://schemas.microsoft.com/office/drawing/2014/main" val="20002"/>
+                    </a:ext>
+                  </a:extLst>
+                </a:gridCol>
+                <a:gridCol w="969441">
+                  <a:extLst>
+                    <a:ext uri="{9D8B030D-6E8A-4147-A177-3AD203B41FA5}">
+                      <a16:colId xmlns:a16="http://schemas.microsoft.com/office/drawing/2014/main" val="20003"/>
+                    </a:ext>
+                  </a:extLst>
+                </a:gridCol>
+                <a:gridCol w="969441">
+                  <a:extLst>
+                    <a:ext uri="{9D8B030D-6E8A-4147-A177-3AD203B41FA5}">
+                      <a16:colId xmlns:a16="http://schemas.microsoft.com/office/drawing/2014/main" val="20004"/>
+                    </a:ext>
+                  </a:extLst>
+                </a:gridCol>
+                <a:gridCol w="894869">
+                  <a:extLst>
+                    <a:ext uri="{9D8B030D-6E8A-4147-A177-3AD203B41FA5}">
+                      <a16:colId xmlns:a16="http://schemas.microsoft.com/office/drawing/2014/main" val="20005"/>
+                    </a:ext>
+                  </a:extLst>
+                </a:gridCol>
+                <a:gridCol w="820296">
+                  <a:extLst>
+                    <a:ext uri="{9D8B030D-6E8A-4147-A177-3AD203B41FA5}">
+                      <a16:colId xmlns:a16="http://schemas.microsoft.com/office/drawing/2014/main" val="20006"/>
+                    </a:ext>
+                  </a:extLst>
+                </a:gridCol>
               </a:tblGrid>
               <a:tr h="365760">
                 <a:tc>
@@ -19981,6 +20138,11 @@
                     </a:solidFill>
                   </a:tcPr>
                 </a:tc>
+                <a:extLst>
+                  <a:ext uri="{0D108BD9-81ED-4DB2-BD59-A6C34878D82A}">
+                    <a16:rowId xmlns:a16="http://schemas.microsoft.com/office/drawing/2014/main" val="10000"/>
+                  </a:ext>
+                </a:extLst>
               </a:tr>
               <a:tr h="365760">
                 <a:tc>
@@ -20144,6 +20306,11 @@
                     </a:solidFill>
                   </a:tcPr>
                 </a:tc>
+                <a:extLst>
+                  <a:ext uri="{0D108BD9-81ED-4DB2-BD59-A6C34878D82A}">
+                    <a16:rowId xmlns:a16="http://schemas.microsoft.com/office/drawing/2014/main" val="10001"/>
+                  </a:ext>
+                </a:extLst>
               </a:tr>
               <a:tr h="365760">
                 <a:tc>
@@ -20307,6 +20474,11 @@
                     </a:solidFill>
                   </a:tcPr>
                 </a:tc>
+                <a:extLst>
+                  <a:ext uri="{0D108BD9-81ED-4DB2-BD59-A6C34878D82A}">
+                    <a16:rowId xmlns:a16="http://schemas.microsoft.com/office/drawing/2014/main" val="10002"/>
+                  </a:ext>
+                </a:extLst>
               </a:tr>
               <a:tr h="365760">
                 <a:tc>
@@ -20470,6 +20642,11 @@
                     </a:solidFill>
                   </a:tcPr>
                 </a:tc>
+                <a:extLst>
+                  <a:ext uri="{0D108BD9-81ED-4DB2-BD59-A6C34878D82A}">
+                    <a16:rowId xmlns:a16="http://schemas.microsoft.com/office/drawing/2014/main" val="10003"/>
+                  </a:ext>
+                </a:extLst>
               </a:tr>
               <a:tr h="365760">
                 <a:tc>
@@ -20633,6 +20810,11 @@
                     </a:solidFill>
                   </a:tcPr>
                 </a:tc>
+                <a:extLst>
+                  <a:ext uri="{0D108BD9-81ED-4DB2-BD59-A6C34878D82A}">
+                    <a16:rowId xmlns:a16="http://schemas.microsoft.com/office/drawing/2014/main" val="10004"/>
+                  </a:ext>
+                </a:extLst>
               </a:tr>
               <a:tr h="365760">
                 <a:tc>
@@ -20796,6 +20978,11 @@
                     </a:solidFill>
                   </a:tcPr>
                 </a:tc>
+                <a:extLst>
+                  <a:ext uri="{0D108BD9-81ED-4DB2-BD59-A6C34878D82A}">
+                    <a16:rowId xmlns:a16="http://schemas.microsoft.com/office/drawing/2014/main" val="10005"/>
+                  </a:ext>
+                </a:extLst>
               </a:tr>
               <a:tr h="365760">
                 <a:tc>
@@ -20959,6 +21146,11 @@
                     </a:solidFill>
                   </a:tcPr>
                 </a:tc>
+                <a:extLst>
+                  <a:ext uri="{0D108BD9-81ED-4DB2-BD59-A6C34878D82A}">
+                    <a16:rowId xmlns:a16="http://schemas.microsoft.com/office/drawing/2014/main" val="10006"/>
+                  </a:ext>
+                </a:extLst>
               </a:tr>
               <a:tr h="365760">
                 <a:tc>
@@ -21122,6 +21314,11 @@
                     </a:solidFill>
                   </a:tcPr>
                 </a:tc>
+                <a:extLst>
+                  <a:ext uri="{0D108BD9-81ED-4DB2-BD59-A6C34878D82A}">
+                    <a16:rowId xmlns:a16="http://schemas.microsoft.com/office/drawing/2014/main" val="10007"/>
+                  </a:ext>
+                </a:extLst>
               </a:tr>
               <a:tr h="365760">
                 <a:tc>
@@ -21285,6 +21482,11 @@
                     </a:solidFill>
                   </a:tcPr>
                 </a:tc>
+                <a:extLst>
+                  <a:ext uri="{0D108BD9-81ED-4DB2-BD59-A6C34878D82A}">
+                    <a16:rowId xmlns:a16="http://schemas.microsoft.com/office/drawing/2014/main" val="10008"/>
+                  </a:ext>
+                </a:extLst>
               </a:tr>
             </a:tbl>
           </a:graphicData>
@@ -21788,44 +21990,44 @@
         <a:sysClr val="window" lastClr="FFFFFF"/>
       </a:lt1>
       <a:dk2>
-        <a:srgbClr val="1F497D"/>
+        <a:srgbClr val="0E2841"/>
       </a:dk2>
       <a:lt2>
-        <a:srgbClr val="EEECE1"/>
+        <a:srgbClr val="E8E8E8"/>
       </a:lt2>
       <a:accent1>
-        <a:srgbClr val="4F81BD"/>
+        <a:srgbClr val="156082"/>
       </a:accent1>
       <a:accent2>
-        <a:srgbClr val="C0504D"/>
+        <a:srgbClr val="E97132"/>
       </a:accent2>
       <a:accent3>
-        <a:srgbClr val="9BBB59"/>
+        <a:srgbClr val="196B24"/>
       </a:accent3>
       <a:accent4>
-        <a:srgbClr val="8064A2"/>
+        <a:srgbClr val="0F9ED5"/>
       </a:accent4>
       <a:accent5>
-        <a:srgbClr val="4BACC6"/>
+        <a:srgbClr val="A02B93"/>
       </a:accent5>
       <a:accent6>
-        <a:srgbClr val="F79646"/>
+        <a:srgbClr val="4EA72E"/>
       </a:accent6>
       <a:hlink>
-        <a:srgbClr val="0000FF"/>
+        <a:srgbClr val="467886"/>
       </a:hlink>
       <a:folHlink>
-        <a:srgbClr val="800080"/>
+        <a:srgbClr val="96607D"/>
       </a:folHlink>
     </a:clrScheme>
     <a:fontScheme name="Office">
       <a:majorFont>
-        <a:latin typeface="Calibri"/>
+        <a:latin typeface="Aptos Display" panose="02110004020202020204"/>
         <a:ea typeface=""/>
         <a:cs typeface=""/>
-        <a:font script="Jpan" typeface="ＭＳ Ｐゴシック"/>
+        <a:font script="Jpan" typeface="游ゴシック Light"/>
         <a:font script="Hang" typeface="맑은 고딕"/>
-        <a:font script="Hans" typeface="宋体"/>
+        <a:font script="Hans" typeface="等线 Light"/>
         <a:font script="Hant" typeface="新細明體"/>
         <a:font script="Arab" typeface="Times New Roman"/>
         <a:font script="Hebr" typeface="Times New Roman"/>
@@ -21853,14 +22055,31 @@
         <a:font script="Viet" typeface="Times New Roman"/>
         <a:font script="Uigh" typeface="Microsoft Uighur"/>
         <a:font script="Geor" typeface="Sylfaen"/>
+        <a:font script="Armn" typeface="Arial"/>
+        <a:font script="Bugi" typeface="Leelawadee UI"/>
+        <a:font script="Bopo" typeface="Microsoft JhengHei"/>
+        <a:font script="Java" typeface="Javanese Text"/>
+        <a:font script="Lisu" typeface="Segoe UI"/>
+        <a:font script="Mymr" typeface="Myanmar Text"/>
+        <a:font script="Nkoo" typeface="Ebrima"/>
+        <a:font script="Olck" typeface="Nirmala UI"/>
+        <a:font script="Osma" typeface="Ebrima"/>
+        <a:font script="Phag" typeface="Phagspa"/>
+        <a:font script="Syrn" typeface="Estrangelo Edessa"/>
+        <a:font script="Syrj" typeface="Estrangelo Edessa"/>
+        <a:font script="Syre" typeface="Estrangelo Edessa"/>
+        <a:font script="Sora" typeface="Nirmala UI"/>
+        <a:font script="Tale" typeface="Microsoft Tai Le"/>
+        <a:font script="Talu" typeface="Microsoft New Tai Lue"/>
+        <a:font script="Tfng" typeface="Ebrima"/>
       </a:majorFont>
       <a:minorFont>
-        <a:latin typeface="Calibri"/>
+        <a:latin typeface="Aptos" panose="02110004020202020204"/>
         <a:ea typeface=""/>
         <a:cs typeface=""/>
-        <a:font script="Jpan" typeface="ＭＳ Ｐゴシック"/>
+        <a:font script="Jpan" typeface="游ゴシック"/>
         <a:font script="Hang" typeface="맑은 고딕"/>
-        <a:font script="Hans" typeface="宋体"/>
+        <a:font script="Hans" typeface="等线"/>
         <a:font script="Hant" typeface="新細明體"/>
         <a:font script="Arab" typeface="Arial"/>
         <a:font script="Hebr" typeface="Arial"/>
@@ -21888,6 +22107,23 @@
         <a:font script="Viet" typeface="Arial"/>
         <a:font script="Uigh" typeface="Microsoft Uighur"/>
         <a:font script="Geor" typeface="Sylfaen"/>
+        <a:font script="Armn" typeface="Arial"/>
+        <a:font script="Bugi" typeface="Leelawadee UI"/>
+        <a:font script="Bopo" typeface="Microsoft JhengHei"/>
+        <a:font script="Java" typeface="Javanese Text"/>
+        <a:font script="Lisu" typeface="Segoe UI"/>
+        <a:font script="Mymr" typeface="Myanmar Text"/>
+        <a:font script="Nkoo" typeface="Ebrima"/>
+        <a:font script="Olck" typeface="Nirmala UI"/>
+        <a:font script="Osma" typeface="Ebrima"/>
+        <a:font script="Phag" typeface="Phagspa"/>
+        <a:font script="Syrn" typeface="Estrangelo Edessa"/>
+        <a:font script="Syrj" typeface="Estrangelo Edessa"/>
+        <a:font script="Syre" typeface="Estrangelo Edessa"/>
+        <a:font script="Sora" typeface="Nirmala UI"/>
+        <a:font script="Tale" typeface="Microsoft Tai Le"/>
+        <a:font script="Talu" typeface="Microsoft New Tai Lue"/>
+        <a:font script="Tfng" typeface="Ebrima"/>
       </a:minorFont>
     </a:fontScheme>
     <a:fmtScheme name="Office">
@@ -21899,180 +22135,136 @@
           <a:gsLst>
             <a:gs pos="0">
               <a:schemeClr val="phClr">
-                <a:tint val="50000"/>
-                <a:satMod val="300000"/>
+                <a:lumMod val="110000"/>
+                <a:satMod val="105000"/>
+                <a:tint val="67000"/>
               </a:schemeClr>
             </a:gs>
-            <a:gs pos="35000">
+            <a:gs pos="50000">
               <a:schemeClr val="phClr">
-                <a:tint val="37000"/>
-                <a:satMod val="300000"/>
+                <a:lumMod val="105000"/>
+                <a:satMod val="103000"/>
+                <a:tint val="73000"/>
               </a:schemeClr>
             </a:gs>
             <a:gs pos="100000">
               <a:schemeClr val="phClr">
-                <a:tint val="15000"/>
-                <a:satMod val="350000"/>
+                <a:lumMod val="105000"/>
+                <a:satMod val="109000"/>
+                <a:tint val="81000"/>
               </a:schemeClr>
             </a:gs>
           </a:gsLst>
-          <a:lin ang="16200000" scaled="1"/>
+          <a:lin ang="5400000" scaled="0"/>
         </a:gradFill>
         <a:gradFill rotWithShape="1">
           <a:gsLst>
             <a:gs pos="0">
               <a:schemeClr val="phClr">
-                <a:tint val="100000"/>
+                <a:satMod val="103000"/>
+                <a:lumMod val="102000"/>
+                <a:tint val="94000"/>
+              </a:schemeClr>
+            </a:gs>
+            <a:gs pos="50000">
+              <a:schemeClr val="phClr">
+                <a:satMod val="110000"/>
+                <a:lumMod val="100000"/>
                 <a:shade val="100000"/>
-                <a:satMod val="130000"/>
               </a:schemeClr>
             </a:gs>
             <a:gs pos="100000">
               <a:schemeClr val="phClr">
-                <a:tint val="50000"/>
-                <a:shade val="100000"/>
-                <a:satMod val="350000"/>
+                <a:lumMod val="99000"/>
+                <a:satMod val="120000"/>
+                <a:shade val="78000"/>
               </a:schemeClr>
             </a:gs>
           </a:gsLst>
-          <a:lin ang="16200000" scaled="0"/>
+          <a:lin ang="5400000" scaled="0"/>
         </a:gradFill>
       </a:fillStyleLst>
       <a:lnStyleLst>
-        <a:ln w="9525" cap="flat" cmpd="sng" algn="ctr">
+        <a:ln w="12700" cap="flat" cmpd="sng" algn="ctr">
           <a:solidFill>
-            <a:schemeClr val="phClr">
-              <a:shade val="95000"/>
-              <a:satMod val="105000"/>
-            </a:schemeClr>
+            <a:schemeClr val="phClr"/>
           </a:solidFill>
           <a:prstDash val="solid"/>
+          <a:miter lim="800000"/>
+        </a:ln>
+        <a:ln w="19050" cap="flat" cmpd="sng" algn="ctr">
+          <a:solidFill>
+            <a:schemeClr val="phClr"/>
+          </a:solidFill>
+          <a:prstDash val="solid"/>
+          <a:miter lim="800000"/>
         </a:ln>
         <a:ln w="25400" cap="flat" cmpd="sng" algn="ctr">
           <a:solidFill>
             <a:schemeClr val="phClr"/>
           </a:solidFill>
           <a:prstDash val="solid"/>
-        </a:ln>
-        <a:ln w="38100" cap="flat" cmpd="sng" algn="ctr">
-          <a:solidFill>
-            <a:schemeClr val="phClr"/>
-          </a:solidFill>
-          <a:prstDash val="solid"/>
+          <a:miter lim="800000"/>
         </a:ln>
       </a:lnStyleLst>
       <a:effectStyleLst>
         <a:effectStyle>
+          <a:effectLst/>
+        </a:effectStyle>
+        <a:effectStyle>
+          <a:effectLst/>
+        </a:effectStyle>
+        <a:effectStyle>
           <a:effectLst>
-            <a:outerShdw blurRad="40000" dist="20000" dir="5400000" rotWithShape="0">
+            <a:outerShdw blurRad="57150" dist="19050" dir="5400000" algn="ctr" rotWithShape="0">
               <a:srgbClr val="000000">
-                <a:alpha val="38000"/>
+                <a:alpha val="63000"/>
               </a:srgbClr>
             </a:outerShdw>
           </a:effectLst>
-        </a:effectStyle>
-        <a:effectStyle>
-          <a:effectLst>
-            <a:outerShdw blurRad="40000" dist="23000" dir="5400000" rotWithShape="0">
-              <a:srgbClr val="000000">
-                <a:alpha val="35000"/>
-              </a:srgbClr>
-            </a:outerShdw>
-          </a:effectLst>
-        </a:effectStyle>
-        <a:effectStyle>
-          <a:effectLst>
-            <a:outerShdw blurRad="40000" dist="23000" dir="5400000" rotWithShape="0">
-              <a:srgbClr val="000000">
-                <a:alpha val="35000"/>
-              </a:srgbClr>
-            </a:outerShdw>
-          </a:effectLst>
-          <a:scene3d>
-            <a:camera prst="orthographicFront">
-              <a:rot lat="0" lon="0" rev="0"/>
-            </a:camera>
-            <a:lightRig rig="threePt" dir="t">
-              <a:rot lat="0" lon="0" rev="1200000"/>
-            </a:lightRig>
-          </a:scene3d>
-          <a:sp3d>
-            <a:bevelT w="63500" h="25400"/>
-          </a:sp3d>
         </a:effectStyle>
       </a:effectStyleLst>
       <a:bgFillStyleLst>
         <a:solidFill>
           <a:schemeClr val="phClr"/>
         </a:solidFill>
+        <a:solidFill>
+          <a:schemeClr val="phClr">
+            <a:tint val="95000"/>
+            <a:satMod val="170000"/>
+          </a:schemeClr>
+        </a:solidFill>
         <a:gradFill rotWithShape="1">
           <a:gsLst>
             <a:gs pos="0">
               <a:schemeClr val="phClr">
-                <a:tint val="40000"/>
-                <a:satMod val="350000"/>
+                <a:tint val="93000"/>
+                <a:satMod val="150000"/>
+                <a:shade val="98000"/>
+                <a:lumMod val="102000"/>
               </a:schemeClr>
             </a:gs>
-            <a:gs pos="40000">
+            <a:gs pos="50000">
               <a:schemeClr val="phClr">
-                <a:tint val="45000"/>
-                <a:shade val="99000"/>
-                <a:satMod val="350000"/>
+                <a:tint val="98000"/>
+                <a:satMod val="130000"/>
+                <a:shade val="90000"/>
+                <a:lumMod val="103000"/>
               </a:schemeClr>
             </a:gs>
             <a:gs pos="100000">
               <a:schemeClr val="phClr">
-                <a:shade val="20000"/>
-                <a:satMod val="255000"/>
+                <a:shade val="63000"/>
+                <a:satMod val="120000"/>
               </a:schemeClr>
             </a:gs>
           </a:gsLst>
-          <a:path path="circle">
-            <a:fillToRect l="50000" t="-80000" r="50000" b="180000"/>
-          </a:path>
-        </a:gradFill>
-        <a:gradFill rotWithShape="1">
-          <a:gsLst>
-            <a:gs pos="0">
-              <a:schemeClr val="phClr">
-                <a:tint val="80000"/>
-                <a:satMod val="300000"/>
-              </a:schemeClr>
-            </a:gs>
-            <a:gs pos="100000">
-              <a:schemeClr val="phClr">
-                <a:shade val="30000"/>
-                <a:satMod val="200000"/>
-              </a:schemeClr>
-            </a:gs>
-          </a:gsLst>
-          <a:path path="circle">
-            <a:fillToRect l="50000" t="50000" r="50000" b="50000"/>
-          </a:path>
+          <a:lin ang="5400000" scaled="0"/>
         </a:gradFill>
       </a:bgFillStyleLst>
     </a:fmtScheme>
   </a:themeElements>
   <a:objectDefaults>
-    <a:spDef>
-      <a:spPr/>
-      <a:bodyPr/>
-      <a:lstStyle/>
-      <a:style>
-        <a:lnRef idx="1">
-          <a:schemeClr val="accent1"/>
-        </a:lnRef>
-        <a:fillRef idx="3">
-          <a:schemeClr val="accent1"/>
-        </a:fillRef>
-        <a:effectRef idx="2">
-          <a:schemeClr val="accent1"/>
-        </a:effectRef>
-        <a:fontRef idx="minor">
-          <a:schemeClr val="lt1"/>
-        </a:fontRef>
-      </a:style>
-    </a:spDef>
     <a:lnDef>
       <a:spPr/>
       <a:bodyPr/>
@@ -22094,5 +22286,10 @@
     </a:lnDef>
   </a:objectDefaults>
   <a:extraClrSchemeLst/>
+  <a:extLst>
+    <a:ext uri="{05A4C25C-085E-4340-85A3-A5531E510DB2}">
+      <thm15:themeFamily xmlns:thm15="http://schemas.microsoft.com/office/thememl/2012/main" name="Office Theme" id="{2E142A2C-CD16-42D6-873A-C26D2A0506FA}" vid="{1BDDFF52-6CD6-40A5-AB3C-68EB2F1E4D0A}"/>
+    </a:ext>
+  </a:extLst>
 </a:theme>
 </file>